--- a/livefile/livepowerpoint.pptx
+++ b/livefile/livepowerpoint.pptx
@@ -8619,7 +8619,7 @@
         </p:nvSpPr>
         <p:spPr>
           <a:xfrm>
-            <a:off x="6552869" y="3310117"/>
+            <a:off x="3021275" y="4671853"/>
             <a:ext cx="700405" cy="368300"/>
           </a:xfrm>
           <a:prstGeom prst="rect">
@@ -8822,7 +8822,7 @@
         </p:nvSpPr>
         <p:spPr>
           <a:xfrm>
-            <a:off x="2973651" y="4600951"/>
+            <a:off x="6536518" y="3337099"/>
             <a:ext cx="872863" cy="369056"/>
           </a:xfrm>
           <a:prstGeom prst="rect">
@@ -8838,7 +8838,7 @@
           <a:p>
             <a:r>
               <a:rPr lang="en-US" altLang="zh-CN" dirty="0"/>
-              <a:t>nszx1</a:t>
+              <a:t>cl3</a:t>
             </a:r>
           </a:p>
         </p:txBody>
@@ -8858,7 +8858,7 @@
         </p:nvSpPr>
         <p:spPr>
           <a:xfrm>
-            <a:off x="2973651" y="5233636"/>
+            <a:off x="2973651" y="5804652"/>
             <a:ext cx="795655" cy="369332"/>
           </a:xfrm>
           <a:prstGeom prst="rect">

--- a/livefile/livepowerpoint.pptx
+++ b/livefile/livepowerpoint.pptx
@@ -208,7 +208,7 @@
           <a:p>
             <a:fld id="{16A2333F-9A84-48D5-897E-B51363C09104}" type="datetimeFigureOut">
               <a:rPr lang="zh-CN" altLang="en-US" smtClean="0"/>
-              <a:t>2024/3/20</a:t>
+              <a:t>2024/3/21</a:t>
             </a:fld>
             <a:endParaRPr lang="zh-CN" altLang="en-US"/>
           </a:p>
@@ -864,7 +864,7 @@
             </a:pPr>
             <a:fld id="{8D7D9A98-2B42-4142-BB4A-011734DDEA85}" type="datetimeFigureOut">
               <a:rPr lang="zh-CN" altLang="en-US"/>
-              <a:t>2024/3/20</a:t>
+              <a:t>2024/3/21</a:t>
             </a:fld>
             <a:endParaRPr lang="zh-CN" altLang="en-US"/>
           </a:p>
@@ -1013,7 +1013,7 @@
             </a:pPr>
             <a:fld id="{12F3D532-36F8-4FDA-B03A-4B8348962AD1}" type="datetime1">
               <a:rPr lang="zh-CN" altLang="en-US"/>
-              <a:t>2024/3/20</a:t>
+              <a:t>2024/3/21</a:t>
             </a:fld>
             <a:endParaRPr lang="zh-CN" altLang="en-US"/>
           </a:p>
@@ -1122,7 +1122,7 @@
           <a:p>
             <a:fld id="{F487EE23-058C-4F57-8869-2B6561E3103C}" type="datetimeFigureOut">
               <a:rPr lang="zh-CN" altLang="en-US" smtClean="0"/>
-              <a:t>2024/3/20</a:t>
+              <a:t>2024/3/21</a:t>
             </a:fld>
             <a:endParaRPr lang="zh-CN" altLang="en-US"/>
           </a:p>
@@ -1378,7 +1378,7 @@
           <a:p>
             <a:fld id="{F487EE23-058C-4F57-8869-2B6561E3103C}" type="datetimeFigureOut">
               <a:rPr lang="zh-CN" altLang="en-US" smtClean="0"/>
-              <a:t>2024/3/20</a:t>
+              <a:t>2024/3/21</a:t>
             </a:fld>
             <a:endParaRPr lang="zh-CN" altLang="en-US"/>
           </a:p>
@@ -1600,7 +1600,7 @@
             </a:pPr>
             <a:fld id="{A293AA06-7DE4-4BE9-9894-758112E5DCC1}" type="datetime1">
               <a:rPr lang="zh-CN" altLang="en-US"/>
-              <a:t>2024/3/20</a:t>
+              <a:t>2024/3/21</a:t>
             </a:fld>
             <a:endParaRPr lang="zh-CN" altLang="en-US"/>
           </a:p>
@@ -1914,7 +1914,7 @@
           <a:p>
             <a:fld id="{F487EE23-058C-4F57-8869-2B6561E3103C}" type="datetimeFigureOut">
               <a:rPr lang="zh-CN" altLang="en-US" smtClean="0"/>
-              <a:t>2024/3/20</a:t>
+              <a:t>2024/3/21</a:t>
             </a:fld>
             <a:endParaRPr lang="zh-CN" altLang="en-US"/>
           </a:p>
@@ -2165,7 +2165,7 @@
             </a:pPr>
             <a:fld id="{BEDED714-68C8-44B6-9732-DDF7DD97772E}" type="datetime1">
               <a:rPr lang="zh-CN" altLang="en-US"/>
-              <a:t>2024/3/20</a:t>
+              <a:t>2024/3/21</a:t>
             </a:fld>
             <a:endParaRPr lang="zh-CN" altLang="en-US"/>
           </a:p>
@@ -2547,7 +2547,7 @@
             </a:pPr>
             <a:fld id="{27A77D59-FE09-433D-B821-9B2BE50A514A}" type="datetime1">
               <a:rPr lang="zh-CN" altLang="en-US"/>
-              <a:t>2024/3/20</a:t>
+              <a:t>2024/3/21</a:t>
             </a:fld>
             <a:endParaRPr lang="zh-CN" altLang="en-US"/>
           </a:p>
@@ -2856,7 +2856,7 @@
             </a:pPr>
             <a:fld id="{E11AF4AC-5AFC-4379-B912-FCE9AB7477D3}" type="datetime1">
               <a:rPr lang="zh-CN" altLang="en-US"/>
-              <a:t>2024/3/20</a:t>
+              <a:t>2024/3/21</a:t>
             </a:fld>
             <a:endParaRPr lang="zh-CN" altLang="en-US"/>
           </a:p>
@@ -3584,7 +3584,7 @@
             </a:pPr>
             <a:fld id="{D2392E56-C887-40A0-B45B-7A180C992FB2}" type="datetime1">
               <a:rPr lang="zh-CN" altLang="en-US"/>
-              <a:t>2024/3/20</a:t>
+              <a:t>2024/3/21</a:t>
             </a:fld>
             <a:endParaRPr lang="zh-CN" altLang="en-US"/>
           </a:p>
@@ -4027,7 +4027,7 @@
             </a:pPr>
             <a:fld id="{614AAE4D-FD61-4E21-A39B-A3D833986EBE}" type="datetime1">
               <a:rPr lang="zh-CN" altLang="en-US"/>
-              <a:t>2024/3/20</a:t>
+              <a:t>2024/3/21</a:t>
             </a:fld>
             <a:endParaRPr lang="zh-CN" altLang="en-US"/>
           </a:p>
@@ -4389,7 +4389,7 @@
           <a:p>
             <a:fld id="{F487EE23-058C-4F57-8869-2B6561E3103C}" type="datetimeFigureOut">
               <a:rPr lang="zh-CN" altLang="en-US" smtClean="0"/>
-              <a:t>2024/3/20</a:t>
+              <a:t>2024/3/21</a:t>
             </a:fld>
             <a:endParaRPr lang="zh-CN" altLang="en-US"/>
           </a:p>
@@ -4875,7 +4875,7 @@
           <a:p>
             <a:fld id="{F487EE23-058C-4F57-8869-2B6561E3103C}" type="datetimeFigureOut">
               <a:rPr lang="zh-CN" altLang="en-US" smtClean="0"/>
-              <a:t>2024/3/20</a:t>
+              <a:t>2024/3/21</a:t>
             </a:fld>
             <a:endParaRPr lang="zh-CN" altLang="en-US"/>
           </a:p>
@@ -5148,7 +5148,7 @@
           <a:p>
             <a:fld id="{F487EE23-058C-4F57-8869-2B6561E3103C}" type="datetimeFigureOut">
               <a:rPr lang="zh-CN" altLang="en-US" smtClean="0"/>
-              <a:t>2024/3/20</a:t>
+              <a:t>2024/3/21</a:t>
             </a:fld>
             <a:endParaRPr lang="zh-CN" altLang="en-US"/>
           </a:p>
@@ -6717,7 +6717,7 @@
         <p:spPr>
           <a:xfrm>
             <a:off x="1200150" y="1981517"/>
-            <a:ext cx="1413510" cy="437515"/>
+            <a:ext cx="840486" cy="437515"/>
           </a:xfrm>
           <a:prstGeom prst="rect">
             <a:avLst/>
@@ -6748,7 +6748,7 @@
         <p:spPr>
           <a:xfrm>
             <a:off x="1200150" y="2991485"/>
-            <a:ext cx="1413510" cy="437515"/>
+            <a:ext cx="840486" cy="437515"/>
           </a:xfrm>
           <a:prstGeom prst="rect">
             <a:avLst/>
@@ -6779,7 +6779,7 @@
         <p:spPr>
           <a:xfrm>
             <a:off x="1200150" y="4001453"/>
-            <a:ext cx="1413510" cy="437515"/>
+            <a:ext cx="840486" cy="437515"/>
           </a:xfrm>
           <a:prstGeom prst="rect">
             <a:avLst/>
@@ -6810,7 +6810,7 @@
         <p:spPr>
           <a:xfrm>
             <a:off x="1200150" y="4792663"/>
-            <a:ext cx="1413510" cy="437515"/>
+            <a:ext cx="840486" cy="437515"/>
           </a:xfrm>
           <a:prstGeom prst="rect">
             <a:avLst/>
@@ -6840,7 +6840,7 @@
         </p:nvSpPr>
         <p:spPr>
           <a:xfrm>
-            <a:off x="8787349" y="1981518"/>
+            <a:off x="7373839" y="1981519"/>
             <a:ext cx="1117338" cy="437514"/>
           </a:xfrm>
           <a:prstGeom prst="rect">
@@ -6877,7 +6877,7 @@
         <p:spPr>
           <a:xfrm>
             <a:off x="1200150" y="5583873"/>
-            <a:ext cx="1413510" cy="437515"/>
+            <a:ext cx="840486" cy="437515"/>
           </a:xfrm>
           <a:prstGeom prst="rect">
             <a:avLst/>
@@ -6912,8 +6912,8 @@
         </p:nvSpPr>
         <p:spPr>
           <a:xfrm>
-            <a:off x="4682490" y="1981517"/>
-            <a:ext cx="1413510" cy="437515"/>
+            <a:off x="3985395" y="1981517"/>
+            <a:ext cx="840486" cy="437515"/>
           </a:xfrm>
           <a:prstGeom prst="rect">
             <a:avLst/>
@@ -6948,8 +6948,8 @@
         </p:nvSpPr>
         <p:spPr>
           <a:xfrm>
-            <a:off x="4682490" y="2991484"/>
-            <a:ext cx="1413510" cy="437515"/>
+            <a:off x="3985395" y="2991484"/>
+            <a:ext cx="840486" cy="437515"/>
           </a:xfrm>
           <a:prstGeom prst="rect">
             <a:avLst/>
@@ -6984,8 +6984,8 @@
         </p:nvSpPr>
         <p:spPr>
           <a:xfrm>
-            <a:off x="4682490" y="4001453"/>
-            <a:ext cx="1413510" cy="437515"/>
+            <a:off x="3985395" y="4001453"/>
+            <a:ext cx="840486" cy="437515"/>
           </a:xfrm>
           <a:prstGeom prst="rect">
             <a:avLst/>
@@ -7042,6 +7042,50 @@
               <a:t>DF</a:t>
             </a:r>
             <a:endParaRPr lang="zh-CN" altLang="en-US" dirty="0"/>
+          </a:p>
+        </p:txBody>
+      </p:sp>
+      <p:sp>
+        <p:nvSpPr>
+          <p:cNvPr id="4" name="文本框 3">
+            <a:hlinkClick r:id="rId11"/>
+            <a:extLst>
+              <a:ext uri="{FF2B5EF4-FFF2-40B4-BE49-F238E27FC236}">
+                <a16:creationId xmlns:a16="http://schemas.microsoft.com/office/drawing/2014/main" id="{837B52E5-09E4-8E2F-6DFE-E914CEC7955C}"/>
+              </a:ext>
+            </a:extLst>
+          </p:cNvPr>
+          <p:cNvSpPr txBox="1"/>
+          <p:nvPr/>
+        </p:nvSpPr>
+        <p:spPr>
+          <a:xfrm>
+            <a:off x="7373838" y="2991485"/>
+            <a:ext cx="3404651" cy="437514"/>
+          </a:xfrm>
+          <a:prstGeom prst="rect">
+            <a:avLst/>
+          </a:prstGeom>
+          <a:noFill/>
+        </p:spPr>
+        <p:txBody>
+          <a:bodyPr wrap="square">
+            <a:noAutofit/>
+          </a:bodyPr>
+          <a:lstStyle/>
+          <a:p>
+            <a:r>
+              <a:rPr lang="en-US" altLang="zh-CN" dirty="0"/>
+              <a:t>GitHub</a:t>
+            </a:r>
+            <a:r>
+              <a:rPr lang="zh-CN" altLang="en-US" dirty="0"/>
+              <a:t>入门与实践完整版</a:t>
+            </a:r>
+            <a:r>
+              <a:rPr lang="en-US" altLang="zh-CN" dirty="0"/>
+              <a:t>.pdf</a:t>
+            </a:r>
           </a:p>
         </p:txBody>
       </p:sp>

--- a/livefile/livepowerpoint.pptx
+++ b/livefile/livepowerpoint.pptx
@@ -5,23 +5,24 @@
     <p:sldMasterId id="2147483648" r:id="rId1"/>
   </p:sldMasterIdLst>
   <p:notesMasterIdLst>
-    <p:notesMasterId r:id="rId11"/>
+    <p:notesMasterId r:id="rId12"/>
   </p:notesMasterIdLst>
   <p:sldIdLst>
     <p:sldId id="260" r:id="rId2"/>
     <p:sldId id="268" r:id="rId3"/>
-    <p:sldId id="259" r:id="rId4"/>
-    <p:sldId id="263" r:id="rId5"/>
-    <p:sldId id="256" r:id="rId6"/>
-    <p:sldId id="269" r:id="rId7"/>
-    <p:sldId id="258" r:id="rId8"/>
-    <p:sldId id="262" r:id="rId9"/>
-    <p:sldId id="257" r:id="rId10"/>
+    <p:sldId id="270" r:id="rId4"/>
+    <p:sldId id="259" r:id="rId5"/>
+    <p:sldId id="263" r:id="rId6"/>
+    <p:sldId id="256" r:id="rId7"/>
+    <p:sldId id="269" r:id="rId8"/>
+    <p:sldId id="258" r:id="rId9"/>
+    <p:sldId id="262" r:id="rId10"/>
+    <p:sldId id="257" r:id="rId11"/>
   </p:sldIdLst>
   <p:sldSz cx="12192000" cy="6858000"/>
   <p:notesSz cx="6858000" cy="9144000"/>
   <p:custDataLst>
-    <p:tags r:id="rId12"/>
+    <p:tags r:id="rId13"/>
   </p:custDataLst>
   <p:defaultTextStyle>
     <a:defPPr>
@@ -535,7 +536,7 @@
           <a:p>
             <a:fld id="{5EF15249-D9FD-41E0-944D-0CA148925727}" type="slidenum">
               <a:rPr lang="zh-CN" altLang="en-US" smtClean="0"/>
-              <a:t>8</a:t>
+              <a:t>9</a:t>
             </a:fld>
             <a:endParaRPr lang="zh-CN" altLang="en-US"/>
           </a:p>
@@ -5967,13 +5968,356 @@
           <a:lstStyle/>
           <a:p>
             <a:r>
-              <a:rPr lang="en-US" altLang="zh-CN" dirty="0" err="1"/>
+              <a:rPr lang="en-US" altLang="zh-CN" dirty="0"/>
               <a:t>Bukehi</a:t>
             </a:r>
             <a:r>
               <a:rPr lang="zh-CN" altLang="en-US" dirty="0"/>
               <a:t>的小窝</a:t>
             </a:r>
+          </a:p>
+        </p:txBody>
+      </p:sp>
+    </p:spTree>
+  </p:cSld>
+  <p:clrMapOvr>
+    <a:masterClrMapping/>
+  </p:clrMapOvr>
+</p:sld>
+</file>
+
+<file path=ppt/slides/slide10.xml><?xml version="1.0" encoding="utf-8"?>
+<p:sld xmlns:a="http://schemas.openxmlformats.org/drawingml/2006/main" xmlns:r="http://schemas.openxmlformats.org/officeDocument/2006/relationships" xmlns:p="http://schemas.openxmlformats.org/presentationml/2006/main">
+  <p:cSld>
+    <p:spTree>
+      <p:nvGrpSpPr>
+        <p:cNvPr id="1" name=""/>
+        <p:cNvGrpSpPr/>
+        <p:nvPr/>
+      </p:nvGrpSpPr>
+      <p:grpSpPr>
+        <a:xfrm>
+          <a:off x="0" y="0"/>
+          <a:ext cx="0" cy="0"/>
+          <a:chOff x="0" y="0"/>
+          <a:chExt cx="0" cy="0"/>
+        </a:xfrm>
+      </p:grpSpPr>
+      <p:sp>
+        <p:nvSpPr>
+          <p:cNvPr id="4" name="文本框 3"/>
+          <p:cNvSpPr txBox="1"/>
+          <p:nvPr/>
+        </p:nvSpPr>
+        <p:spPr>
+          <a:xfrm>
+            <a:off x="433928" y="372227"/>
+            <a:ext cx="601447" cy="369332"/>
+          </a:xfrm>
+          <a:prstGeom prst="rect">
+            <a:avLst/>
+          </a:prstGeom>
+          <a:noFill/>
+        </p:spPr>
+        <p:txBody>
+          <a:bodyPr wrap="none" rtlCol="0">
+            <a:spAutoFit/>
+          </a:bodyPr>
+          <a:lstStyle/>
+          <a:p>
+            <a:r>
+              <a:rPr lang="en-US" altLang="zh-CN" dirty="0"/>
+              <a:t>Java</a:t>
+            </a:r>
+            <a:endParaRPr lang="zh-CN" altLang="en-US" dirty="0"/>
+          </a:p>
+        </p:txBody>
+      </p:sp>
+      <p:sp>
+        <p:nvSpPr>
+          <p:cNvPr id="9" name="文本框 8">
+            <a:hlinkClick r:id="rId2"/>
+          </p:cNvPr>
+          <p:cNvSpPr txBox="1"/>
+          <p:nvPr/>
+        </p:nvSpPr>
+        <p:spPr>
+          <a:xfrm>
+            <a:off x="534670" y="1030605"/>
+            <a:ext cx="1943735" cy="368300"/>
+          </a:xfrm>
+          <a:prstGeom prst="rect">
+            <a:avLst/>
+          </a:prstGeom>
+          <a:noFill/>
+        </p:spPr>
+        <p:txBody>
+          <a:bodyPr wrap="square">
+            <a:noAutofit/>
+          </a:bodyPr>
+          <a:lstStyle/>
+          <a:p>
+            <a:r>
+              <a:rPr lang="en-US" altLang="zh-CN" dirty="0"/>
+              <a:t>21Java1</a:t>
+            </a:r>
+            <a:endParaRPr lang="zh-CN" altLang="en-US" dirty="0"/>
+          </a:p>
+        </p:txBody>
+      </p:sp>
+      <p:sp>
+        <p:nvSpPr>
+          <p:cNvPr id="18" name="文本框 17">
+            <a:hlinkClick r:id="rId3"/>
+          </p:cNvPr>
+          <p:cNvSpPr txBox="1"/>
+          <p:nvPr/>
+        </p:nvSpPr>
+        <p:spPr>
+          <a:xfrm>
+            <a:off x="534670" y="1687830"/>
+            <a:ext cx="1943735" cy="368300"/>
+          </a:xfrm>
+          <a:prstGeom prst="rect">
+            <a:avLst/>
+          </a:prstGeom>
+          <a:noFill/>
+        </p:spPr>
+        <p:txBody>
+          <a:bodyPr wrap="square">
+            <a:noAutofit/>
+          </a:bodyPr>
+          <a:lstStyle/>
+          <a:p>
+            <a:r>
+              <a:rPr lang="en-US" altLang="zh-CN" dirty="0"/>
+              <a:t>21Java2</a:t>
+            </a:r>
+            <a:endParaRPr lang="zh-CN" altLang="en-US" dirty="0"/>
+          </a:p>
+        </p:txBody>
+      </p:sp>
+      <p:sp>
+        <p:nvSpPr>
+          <p:cNvPr id="19" name="文本框 18">
+            <a:hlinkClick r:id="rId4"/>
+          </p:cNvPr>
+          <p:cNvSpPr txBox="1"/>
+          <p:nvPr/>
+        </p:nvSpPr>
+        <p:spPr>
+          <a:xfrm>
+            <a:off x="534670" y="2345690"/>
+            <a:ext cx="1943735" cy="368300"/>
+          </a:xfrm>
+          <a:prstGeom prst="rect">
+            <a:avLst/>
+          </a:prstGeom>
+          <a:noFill/>
+        </p:spPr>
+        <p:txBody>
+          <a:bodyPr wrap="square">
+            <a:noAutofit/>
+          </a:bodyPr>
+          <a:lstStyle/>
+          <a:p>
+            <a:r>
+              <a:rPr lang="en-US" altLang="zh-CN" dirty="0"/>
+              <a:t>21Java3</a:t>
+            </a:r>
+            <a:endParaRPr lang="zh-CN" altLang="en-US" dirty="0"/>
+          </a:p>
+        </p:txBody>
+      </p:sp>
+      <p:sp>
+        <p:nvSpPr>
+          <p:cNvPr id="23" name="文本框 22">
+            <a:hlinkClick r:id="rId5" action="ppaction://hlinkfile"/>
+          </p:cNvPr>
+          <p:cNvSpPr txBox="1"/>
+          <p:nvPr/>
+        </p:nvSpPr>
+        <p:spPr>
+          <a:xfrm>
+            <a:off x="534670" y="3002915"/>
+            <a:ext cx="1943735" cy="368300"/>
+          </a:xfrm>
+          <a:prstGeom prst="rect">
+            <a:avLst/>
+          </a:prstGeom>
+          <a:noFill/>
+        </p:spPr>
+        <p:txBody>
+          <a:bodyPr wrap="square">
+            <a:noAutofit/>
+          </a:bodyPr>
+          <a:lstStyle/>
+          <a:p>
+            <a:r>
+              <a:rPr lang="en-US" altLang="zh-CN" dirty="0"/>
+              <a:t>EffectiveJava1</a:t>
+            </a:r>
+            <a:endParaRPr lang="zh-CN" altLang="en-US" dirty="0"/>
+          </a:p>
+        </p:txBody>
+      </p:sp>
+      <p:sp>
+        <p:nvSpPr>
+          <p:cNvPr id="24" name="文本框 23">
+            <a:hlinkClick r:id="rId6" action="ppaction://hlinkfile"/>
+          </p:cNvPr>
+          <p:cNvSpPr txBox="1"/>
+          <p:nvPr/>
+        </p:nvSpPr>
+        <p:spPr>
+          <a:xfrm>
+            <a:off x="534670" y="3660775"/>
+            <a:ext cx="1943735" cy="368300"/>
+          </a:xfrm>
+          <a:prstGeom prst="rect">
+            <a:avLst/>
+          </a:prstGeom>
+          <a:noFill/>
+        </p:spPr>
+        <p:txBody>
+          <a:bodyPr wrap="square">
+            <a:noAutofit/>
+          </a:bodyPr>
+          <a:lstStyle/>
+          <a:p>
+            <a:r>
+              <a:rPr lang="en-US" altLang="zh-CN" dirty="0"/>
+              <a:t>EffectiveJava2</a:t>
+            </a:r>
+            <a:endParaRPr lang="zh-CN" altLang="en-US" dirty="0"/>
+          </a:p>
+        </p:txBody>
+      </p:sp>
+      <p:sp>
+        <p:nvSpPr>
+          <p:cNvPr id="25" name="文本框 24">
+            <a:hlinkClick r:id="rId7" action="ppaction://hlinkfile"/>
+          </p:cNvPr>
+          <p:cNvSpPr txBox="1"/>
+          <p:nvPr/>
+        </p:nvSpPr>
+        <p:spPr>
+          <a:xfrm>
+            <a:off x="534670" y="4318000"/>
+            <a:ext cx="1943735" cy="368300"/>
+          </a:xfrm>
+          <a:prstGeom prst="rect">
+            <a:avLst/>
+          </a:prstGeom>
+          <a:noFill/>
+        </p:spPr>
+        <p:txBody>
+          <a:bodyPr wrap="square">
+            <a:noAutofit/>
+          </a:bodyPr>
+          <a:lstStyle/>
+          <a:p>
+            <a:r>
+              <a:rPr lang="en-US" altLang="zh-CN" dirty="0"/>
+              <a:t>EffectiveJava3</a:t>
+            </a:r>
+            <a:endParaRPr lang="zh-CN" altLang="en-US" dirty="0"/>
+          </a:p>
+        </p:txBody>
+      </p:sp>
+      <p:sp>
+        <p:nvSpPr>
+          <p:cNvPr id="30" name="文本框 29">
+            <a:hlinkClick r:id="rId8" action="ppaction://hlinkfile"/>
+          </p:cNvPr>
+          <p:cNvSpPr txBox="1"/>
+          <p:nvPr/>
+        </p:nvSpPr>
+        <p:spPr>
+          <a:xfrm>
+            <a:off x="4507580" y="1030605"/>
+            <a:ext cx="1943735" cy="368300"/>
+          </a:xfrm>
+          <a:prstGeom prst="rect">
+            <a:avLst/>
+          </a:prstGeom>
+          <a:noFill/>
+        </p:spPr>
+        <p:txBody>
+          <a:bodyPr wrap="square">
+            <a:noAutofit/>
+          </a:bodyPr>
+          <a:lstStyle/>
+          <a:p>
+            <a:r>
+              <a:rPr lang="en-US" altLang="zh-CN" dirty="0"/>
+              <a:t>HeadFirstJava1</a:t>
+            </a:r>
+            <a:endParaRPr lang="zh-CN" altLang="en-US" dirty="0"/>
+          </a:p>
+        </p:txBody>
+      </p:sp>
+      <p:sp>
+        <p:nvSpPr>
+          <p:cNvPr id="31" name="文本框 30">
+            <a:hlinkClick r:id="rId9" action="ppaction://hlinkfile"/>
+          </p:cNvPr>
+          <p:cNvSpPr txBox="1"/>
+          <p:nvPr/>
+        </p:nvSpPr>
+        <p:spPr>
+          <a:xfrm>
+            <a:off x="4507580" y="1687830"/>
+            <a:ext cx="1943735" cy="368300"/>
+          </a:xfrm>
+          <a:prstGeom prst="rect">
+            <a:avLst/>
+          </a:prstGeom>
+          <a:noFill/>
+        </p:spPr>
+        <p:txBody>
+          <a:bodyPr wrap="square">
+            <a:noAutofit/>
+          </a:bodyPr>
+          <a:lstStyle/>
+          <a:p>
+            <a:r>
+              <a:rPr lang="en-US" altLang="zh-CN" dirty="0"/>
+              <a:t>HeadFirstJava2</a:t>
+            </a:r>
+            <a:endParaRPr lang="zh-CN" altLang="en-US" dirty="0"/>
+          </a:p>
+        </p:txBody>
+      </p:sp>
+      <p:sp>
+        <p:nvSpPr>
+          <p:cNvPr id="32" name="文本框 31">
+            <a:hlinkClick r:id="rId10" action="ppaction://hlinkfile"/>
+          </p:cNvPr>
+          <p:cNvSpPr txBox="1"/>
+          <p:nvPr/>
+        </p:nvSpPr>
+        <p:spPr>
+          <a:xfrm>
+            <a:off x="4507580" y="2345690"/>
+            <a:ext cx="1943735" cy="368300"/>
+          </a:xfrm>
+          <a:prstGeom prst="rect">
+            <a:avLst/>
+          </a:prstGeom>
+          <a:noFill/>
+        </p:spPr>
+        <p:txBody>
+          <a:bodyPr wrap="square">
+            <a:noAutofit/>
+          </a:bodyPr>
+          <a:lstStyle/>
+          <a:p>
+            <a:r>
+              <a:rPr lang="en-US" altLang="zh-CN" dirty="0"/>
+              <a:t>HeadFirstJava3</a:t>
+            </a:r>
+            <a:endParaRPr lang="zh-CN" altLang="en-US" dirty="0"/>
           </a:p>
         </p:txBody>
       </p:sp>
@@ -6234,6 +6578,182 @@
           </a:p>
         </p:txBody>
       </p:sp>
+      <p:sp>
+        <p:nvSpPr>
+          <p:cNvPr id="2" name="文本框 1">
+            <a:extLst>
+              <a:ext uri="{FF2B5EF4-FFF2-40B4-BE49-F238E27FC236}">
+                <a16:creationId xmlns:a16="http://schemas.microsoft.com/office/drawing/2014/main" id="{4C382994-F34C-C722-1D7F-8BB4E8EDAB81}"/>
+              </a:ext>
+            </a:extLst>
+          </p:cNvPr>
+          <p:cNvSpPr txBox="1"/>
+          <p:nvPr/>
+        </p:nvSpPr>
+        <p:spPr>
+          <a:xfrm>
+            <a:off x="983383" y="2371769"/>
+            <a:ext cx="646331" cy="369332"/>
+          </a:xfrm>
+          <a:prstGeom prst="rect">
+            <a:avLst/>
+          </a:prstGeom>
+          <a:noFill/>
+        </p:spPr>
+        <p:txBody>
+          <a:bodyPr wrap="none" rtlCol="0">
+            <a:spAutoFit/>
+          </a:bodyPr>
+          <a:lstStyle/>
+          <a:p>
+            <a:r>
+              <a:rPr lang="zh-CN" altLang="en-US" dirty="0"/>
+              <a:t>热搜</a:t>
+            </a:r>
+          </a:p>
+        </p:txBody>
+      </p:sp>
+      <p:sp>
+        <p:nvSpPr>
+          <p:cNvPr id="4" name="文本框 3">
+            <a:extLst>
+              <a:ext uri="{FF2B5EF4-FFF2-40B4-BE49-F238E27FC236}">
+                <a16:creationId xmlns:a16="http://schemas.microsoft.com/office/drawing/2014/main" id="{17B7D0B5-E1ED-3F19-2C64-79845A99614E}"/>
+              </a:ext>
+            </a:extLst>
+          </p:cNvPr>
+          <p:cNvSpPr txBox="1"/>
+          <p:nvPr/>
+        </p:nvSpPr>
+        <p:spPr>
+          <a:xfrm>
+            <a:off x="983382" y="3770115"/>
+            <a:ext cx="646331" cy="369332"/>
+          </a:xfrm>
+          <a:prstGeom prst="rect">
+            <a:avLst/>
+          </a:prstGeom>
+          <a:noFill/>
+        </p:spPr>
+        <p:txBody>
+          <a:bodyPr wrap="none" rtlCol="0">
+            <a:spAutoFit/>
+          </a:bodyPr>
+          <a:lstStyle/>
+          <a:p>
+            <a:r>
+              <a:rPr lang="zh-CN" altLang="en-US" dirty="0"/>
+              <a:t>音乐</a:t>
+            </a:r>
+          </a:p>
+        </p:txBody>
+      </p:sp>
+      <p:sp>
+        <p:nvSpPr>
+          <p:cNvPr id="9" name="文本框 8">
+            <a:extLst>
+              <a:ext uri="{FF2B5EF4-FFF2-40B4-BE49-F238E27FC236}">
+                <a16:creationId xmlns:a16="http://schemas.microsoft.com/office/drawing/2014/main" id="{9E69F4C3-508B-021A-5199-9A41FDD5C502}"/>
+              </a:ext>
+            </a:extLst>
+          </p:cNvPr>
+          <p:cNvSpPr txBox="1"/>
+          <p:nvPr/>
+        </p:nvSpPr>
+        <p:spPr>
+          <a:xfrm>
+            <a:off x="952170" y="5400631"/>
+            <a:ext cx="569387" cy="369332"/>
+          </a:xfrm>
+          <a:prstGeom prst="rect">
+            <a:avLst/>
+          </a:prstGeom>
+          <a:noFill/>
+        </p:spPr>
+        <p:txBody>
+          <a:bodyPr wrap="none" rtlCol="0">
+            <a:spAutoFit/>
+          </a:bodyPr>
+          <a:lstStyle/>
+          <a:p>
+            <a:r>
+              <a:rPr lang="en-US" altLang="zh-CN" dirty="0"/>
+              <a:t>101</a:t>
+            </a:r>
+            <a:endParaRPr lang="zh-CN" altLang="en-US" dirty="0"/>
+          </a:p>
+        </p:txBody>
+      </p:sp>
+      <p:sp>
+        <p:nvSpPr>
+          <p:cNvPr id="10" name="文本框 9">
+            <a:extLst>
+              <a:ext uri="{FF2B5EF4-FFF2-40B4-BE49-F238E27FC236}">
+                <a16:creationId xmlns:a16="http://schemas.microsoft.com/office/drawing/2014/main" id="{5D76A465-E9E2-34FC-617B-B1347B695327}"/>
+              </a:ext>
+            </a:extLst>
+          </p:cNvPr>
+          <p:cNvSpPr txBox="1"/>
+          <p:nvPr/>
+        </p:nvSpPr>
+        <p:spPr>
+          <a:xfrm>
+            <a:off x="3972609" y="2302452"/>
+            <a:ext cx="646331" cy="369332"/>
+          </a:xfrm>
+          <a:prstGeom prst="rect">
+            <a:avLst/>
+          </a:prstGeom>
+          <a:noFill/>
+        </p:spPr>
+        <p:txBody>
+          <a:bodyPr wrap="none" rtlCol="0">
+            <a:spAutoFit/>
+          </a:bodyPr>
+          <a:lstStyle/>
+          <a:p>
+            <a:r>
+              <a:rPr lang="zh-CN" altLang="en-US" dirty="0"/>
+              <a:t>答案</a:t>
+            </a:r>
+          </a:p>
+        </p:txBody>
+      </p:sp>
+      <p:sp>
+        <p:nvSpPr>
+          <p:cNvPr id="12" name="文本框 11">
+            <a:extLst>
+              <a:ext uri="{FF2B5EF4-FFF2-40B4-BE49-F238E27FC236}">
+                <a16:creationId xmlns:a16="http://schemas.microsoft.com/office/drawing/2014/main" id="{DA15EEB2-45D9-D54B-89BE-44D25A580095}"/>
+              </a:ext>
+            </a:extLst>
+          </p:cNvPr>
+          <p:cNvSpPr txBox="1"/>
+          <p:nvPr/>
+        </p:nvSpPr>
+        <p:spPr>
+          <a:xfrm>
+            <a:off x="3972609" y="3816884"/>
+            <a:ext cx="646331" cy="369332"/>
+          </a:xfrm>
+          <a:prstGeom prst="rect">
+            <a:avLst/>
+          </a:prstGeom>
+          <a:noFill/>
+        </p:spPr>
+        <p:txBody>
+          <a:bodyPr wrap="none" rtlCol="0">
+            <a:spAutoFit/>
+          </a:bodyPr>
+          <a:lstStyle/>
+          <a:p>
+            <a:r>
+              <a:rPr lang="zh-CN" altLang="en-US" dirty="0"/>
+              <a:t>小说</a:t>
+            </a:r>
+          </a:p>
+        </p:txBody>
+      </p:sp>
     </p:spTree>
   </p:cSld>
   <p:clrMapOvr>
@@ -6261,359 +6781,10 @@
       </p:grpSpPr>
       <p:sp>
         <p:nvSpPr>
-          <p:cNvPr id="5" name="文本框 4">
-            <a:hlinkClick r:id="rId2"/>
-          </p:cNvPr>
-          <p:cNvSpPr txBox="1"/>
-          <p:nvPr/>
-        </p:nvSpPr>
-        <p:spPr>
-          <a:xfrm>
-            <a:off x="819569" y="1809023"/>
-            <a:ext cx="1160780" cy="368300"/>
-          </a:xfrm>
-          <a:prstGeom prst="rect">
-            <a:avLst/>
-          </a:prstGeom>
-          <a:noFill/>
-        </p:spPr>
-        <p:txBody>
-          <a:bodyPr wrap="none" rtlCol="0">
-            <a:spAutoFit/>
-          </a:bodyPr>
-          <a:lstStyle/>
-          <a:p>
-            <a:r>
-              <a:rPr lang="en-US" altLang="zh-CN" dirty="0"/>
-              <a:t>Live word</a:t>
-            </a:r>
-            <a:endParaRPr lang="zh-CN" altLang="en-US" dirty="0"/>
-          </a:p>
-        </p:txBody>
-      </p:sp>
-      <p:sp>
-        <p:nvSpPr>
-          <p:cNvPr id="6" name="文本框 5">
-            <a:hlinkClick r:id="rId3"/>
-          </p:cNvPr>
-          <p:cNvSpPr txBox="1"/>
-          <p:nvPr/>
-        </p:nvSpPr>
-        <p:spPr>
-          <a:xfrm>
-            <a:off x="798990" y="2606667"/>
-            <a:ext cx="1833880" cy="368300"/>
-          </a:xfrm>
-          <a:prstGeom prst="rect">
-            <a:avLst/>
-          </a:prstGeom>
-          <a:noFill/>
-        </p:spPr>
-        <p:txBody>
-          <a:bodyPr wrap="none" rtlCol="0">
-            <a:spAutoFit/>
-          </a:bodyPr>
-          <a:lstStyle/>
-          <a:p>
-            <a:r>
-              <a:rPr lang="en-US" altLang="zh-CN" dirty="0"/>
-              <a:t>Live PowerPoint</a:t>
-            </a:r>
-            <a:endParaRPr lang="zh-CN" altLang="en-US" dirty="0"/>
-          </a:p>
-        </p:txBody>
-      </p:sp>
-      <p:sp>
-        <p:nvSpPr>
-          <p:cNvPr id="7" name="文本框 6">
-            <a:hlinkClick r:id="rId4"/>
-          </p:cNvPr>
-          <p:cNvSpPr txBox="1"/>
-          <p:nvPr/>
-        </p:nvSpPr>
-        <p:spPr>
-          <a:xfrm>
-            <a:off x="798990" y="3358867"/>
-            <a:ext cx="982980" cy="368300"/>
-          </a:xfrm>
-          <a:prstGeom prst="rect">
-            <a:avLst/>
-          </a:prstGeom>
-          <a:noFill/>
-        </p:spPr>
-        <p:txBody>
-          <a:bodyPr wrap="none" rtlCol="0">
-            <a:spAutoFit/>
-          </a:bodyPr>
-          <a:lstStyle/>
-          <a:p>
-            <a:r>
-              <a:rPr lang="en-US" altLang="zh-CN" dirty="0"/>
-              <a:t>Live pdf</a:t>
-            </a:r>
-            <a:endParaRPr lang="zh-CN" altLang="en-US" dirty="0"/>
-          </a:p>
-        </p:txBody>
-      </p:sp>
-      <p:sp>
-        <p:nvSpPr>
-          <p:cNvPr id="8" name="文本框 7">
-            <a:hlinkClick r:id="rId5"/>
-          </p:cNvPr>
-          <p:cNvSpPr txBox="1"/>
-          <p:nvPr/>
-        </p:nvSpPr>
-        <p:spPr>
-          <a:xfrm>
-            <a:off x="798990" y="4223996"/>
-            <a:ext cx="1198880" cy="368300"/>
-          </a:xfrm>
-          <a:prstGeom prst="rect">
-            <a:avLst/>
-          </a:prstGeom>
-          <a:noFill/>
-        </p:spPr>
-        <p:txBody>
-          <a:bodyPr wrap="none" rtlCol="0">
-            <a:spAutoFit/>
-          </a:bodyPr>
-          <a:lstStyle/>
-          <a:p>
-            <a:r>
-              <a:rPr lang="en-US" altLang="zh-CN" dirty="0"/>
-              <a:t>Live excel</a:t>
-            </a:r>
-            <a:endParaRPr lang="zh-CN" altLang="en-US" dirty="0"/>
-          </a:p>
-        </p:txBody>
-      </p:sp>
-      <p:sp>
-        <p:nvSpPr>
-          <p:cNvPr id="9" name="文本框 8">
-            <a:hlinkClick r:id="rId6"/>
-          </p:cNvPr>
-          <p:cNvSpPr txBox="1"/>
-          <p:nvPr/>
-        </p:nvSpPr>
-        <p:spPr>
-          <a:xfrm>
-            <a:off x="798990" y="5089124"/>
-            <a:ext cx="640080" cy="368300"/>
-          </a:xfrm>
-          <a:prstGeom prst="rect">
-            <a:avLst/>
-          </a:prstGeom>
-          <a:noFill/>
-        </p:spPr>
-        <p:txBody>
-          <a:bodyPr wrap="none" rtlCol="0">
-            <a:spAutoFit/>
-          </a:bodyPr>
-          <a:lstStyle/>
-          <a:p>
-            <a:r>
-              <a:rPr lang="zh-CN" altLang="en-US" dirty="0"/>
-              <a:t>热搜</a:t>
-            </a:r>
-          </a:p>
-        </p:txBody>
-      </p:sp>
-      <p:sp>
-        <p:nvSpPr>
-          <p:cNvPr id="2" name="文本框 1">
-            <a:hlinkClick r:id="rId7" action="ppaction://hlinkfile"/>
-          </p:cNvPr>
-          <p:cNvSpPr txBox="1"/>
-          <p:nvPr/>
-        </p:nvSpPr>
-        <p:spPr>
-          <a:xfrm>
-            <a:off x="5278006" y="1790595"/>
-            <a:ext cx="1410335" cy="368300"/>
-          </a:xfrm>
-          <a:prstGeom prst="rect">
-            <a:avLst/>
-          </a:prstGeom>
-          <a:noFill/>
-        </p:spPr>
-        <p:txBody>
-          <a:bodyPr wrap="square" rtlCol="0">
-            <a:spAutoFit/>
-          </a:bodyPr>
-          <a:lstStyle/>
-          <a:p>
-            <a:r>
-              <a:rPr lang="en-US" altLang="zh-CN" dirty="0"/>
-              <a:t>wulianwser</a:t>
-            </a:r>
-          </a:p>
-        </p:txBody>
-      </p:sp>
-      <p:sp>
-        <p:nvSpPr>
-          <p:cNvPr id="3" name="文本框 2">
-            <a:hlinkClick r:id="rId8" action="ppaction://hlinkfile"/>
-          </p:cNvPr>
-          <p:cNvSpPr txBox="1"/>
-          <p:nvPr/>
-        </p:nvSpPr>
-        <p:spPr>
-          <a:xfrm>
-            <a:off x="5278006" y="2636699"/>
-            <a:ext cx="1378220" cy="368300"/>
-          </a:xfrm>
-          <a:prstGeom prst="rect">
-            <a:avLst/>
-          </a:prstGeom>
-          <a:noFill/>
-        </p:spPr>
-        <p:txBody>
-          <a:bodyPr wrap="square" rtlCol="0">
-            <a:spAutoFit/>
-          </a:bodyPr>
-          <a:lstStyle/>
-          <a:p>
-            <a:r>
-              <a:rPr lang="en-US" altLang="zh-CN"/>
-              <a:t>101</a:t>
-            </a:r>
-          </a:p>
-        </p:txBody>
-      </p:sp>
-      <p:sp>
-        <p:nvSpPr>
-          <p:cNvPr id="10" name="文本框 9">
-            <a:hlinkClick r:id="rId9"/>
-          </p:cNvPr>
-          <p:cNvSpPr txBox="1"/>
-          <p:nvPr/>
-        </p:nvSpPr>
-        <p:spPr>
-          <a:xfrm>
-            <a:off x="5278006" y="5089124"/>
-            <a:ext cx="1490980" cy="368300"/>
-          </a:xfrm>
-          <a:prstGeom prst="rect">
-            <a:avLst/>
-          </a:prstGeom>
-          <a:noFill/>
-        </p:spPr>
-        <p:txBody>
-          <a:bodyPr wrap="none" rtlCol="0">
-            <a:spAutoFit/>
-          </a:bodyPr>
-          <a:lstStyle/>
-          <a:p>
-            <a:r>
-              <a:rPr lang="en-US" altLang="zh-CN" dirty="0"/>
-              <a:t>main project</a:t>
-            </a:r>
-            <a:endParaRPr lang="zh-CN" altLang="en-US" dirty="0"/>
-          </a:p>
-        </p:txBody>
-      </p:sp>
-      <p:sp>
-        <p:nvSpPr>
-          <p:cNvPr id="13" name="文本框 12">
-            <a:hlinkClick r:id="rId10"/>
-          </p:cNvPr>
-          <p:cNvSpPr txBox="1"/>
-          <p:nvPr/>
-        </p:nvSpPr>
-        <p:spPr>
-          <a:xfrm>
-            <a:off x="5278005" y="3482551"/>
-            <a:ext cx="1490979" cy="368300"/>
-          </a:xfrm>
-          <a:prstGeom prst="rect">
-            <a:avLst/>
-          </a:prstGeom>
-          <a:noFill/>
-        </p:spPr>
-        <p:txBody>
-          <a:bodyPr wrap="square" rtlCol="0">
-            <a:noAutofit/>
-          </a:bodyPr>
-          <a:lstStyle/>
-          <a:p>
-            <a:r>
-              <a:rPr lang="zh-CN" altLang="en-US" dirty="0"/>
-              <a:t>数学答案</a:t>
-            </a:r>
-            <a:endParaRPr lang="en-US" altLang="zh-CN" dirty="0"/>
-          </a:p>
-        </p:txBody>
-      </p:sp>
-      <p:sp>
-        <p:nvSpPr>
-          <p:cNvPr id="15" name="文本框 14">
-            <a:hlinkClick r:id="rId11"/>
-          </p:cNvPr>
-          <p:cNvSpPr txBox="1"/>
-          <p:nvPr/>
-        </p:nvSpPr>
-        <p:spPr>
-          <a:xfrm>
-            <a:off x="8311121" y="2549819"/>
-            <a:ext cx="1033780" cy="368300"/>
-          </a:xfrm>
-          <a:prstGeom prst="rect">
-            <a:avLst/>
-          </a:prstGeom>
-          <a:noFill/>
-        </p:spPr>
-        <p:txBody>
-          <a:bodyPr wrap="none" rtlCol="0">
-            <a:spAutoFit/>
-          </a:bodyPr>
-          <a:lstStyle/>
-          <a:p>
-            <a:r>
-              <a:rPr lang="en-US" altLang="zh-CN" dirty="0"/>
-              <a:t>Live text</a:t>
-            </a:r>
-            <a:endParaRPr lang="zh-CN" altLang="en-US" dirty="0"/>
-          </a:p>
-        </p:txBody>
-      </p:sp>
-      <p:sp>
-        <p:nvSpPr>
-          <p:cNvPr id="14" name="文本框 13">
-            <a:hlinkClick r:id="rId12"/>
-          </p:cNvPr>
-          <p:cNvSpPr txBox="1"/>
-          <p:nvPr/>
-        </p:nvSpPr>
-        <p:spPr>
-          <a:xfrm>
-            <a:off x="8311121" y="1790595"/>
-            <a:ext cx="1410335" cy="368300"/>
-          </a:xfrm>
-          <a:prstGeom prst="rect">
-            <a:avLst/>
-          </a:prstGeom>
-          <a:noFill/>
-        </p:spPr>
-        <p:txBody>
-          <a:bodyPr wrap="square" rtlCol="0">
-            <a:spAutoFit/>
-          </a:bodyPr>
-          <a:lstStyle/>
-          <a:p>
-            <a:r>
-              <a:rPr lang="zh-CN" altLang="en-US" dirty="0"/>
-              <a:t>词形转换</a:t>
-            </a:r>
-            <a:endParaRPr lang="en-US" altLang="zh-CN" dirty="0"/>
-          </a:p>
-        </p:txBody>
-      </p:sp>
-      <p:sp>
-        <p:nvSpPr>
-          <p:cNvPr id="11" name="标题 10">
+          <p:cNvPr id="7" name="标题 6">
             <a:extLst>
               <a:ext uri="{FF2B5EF4-FFF2-40B4-BE49-F238E27FC236}">
-                <a16:creationId xmlns:a16="http://schemas.microsoft.com/office/drawing/2014/main" id="{2C3A1F1D-C7A4-2995-C534-193F3CBBB9B8}"/>
+                <a16:creationId xmlns:a16="http://schemas.microsoft.com/office/drawing/2014/main" id="{C32C7573-52D6-9B00-E43C-4039B489ED02}"/>
               </a:ext>
             </a:extLst>
           </p:cNvPr>
@@ -6626,8 +6797,8 @@
         </p:nvSpPr>
         <p:spPr>
           <a:xfrm>
-            <a:off x="193437" y="208485"/>
-            <a:ext cx="2110766" cy="703017"/>
+            <a:off x="265599" y="182880"/>
+            <a:ext cx="1490050" cy="670983"/>
           </a:xfrm>
         </p:spPr>
         <p:txBody>
@@ -6636,18 +6807,17 @@
           <a:p>
             <a:r>
               <a:rPr lang="zh-CN" altLang="en-US" dirty="0"/>
-              <a:t>活动文件</a:t>
-            </a:r>
-          </a:p>
-        </p:txBody>
-      </p:sp>
-      <p:sp>
-        <p:nvSpPr>
-          <p:cNvPr id="4" name="文本框 3">
-            <a:hlinkClick r:id="rId13"/>
+              <a:t>交流</a:t>
+            </a:r>
+          </a:p>
+        </p:txBody>
+      </p:sp>
+      <p:sp>
+        <p:nvSpPr>
+          <p:cNvPr id="8" name="文本框 7">
             <a:extLst>
               <a:ext uri="{FF2B5EF4-FFF2-40B4-BE49-F238E27FC236}">
-                <a16:creationId xmlns:a16="http://schemas.microsoft.com/office/drawing/2014/main" id="{92A893C4-FCF0-B4C2-8D87-14F4DBF127AB}"/>
+                <a16:creationId xmlns:a16="http://schemas.microsoft.com/office/drawing/2014/main" id="{519BD100-2844-E85B-C92F-C42D966B164E}"/>
               </a:ext>
             </a:extLst>
           </p:cNvPr>
@@ -6656,8 +6826,8 @@
         </p:nvSpPr>
         <p:spPr>
           <a:xfrm>
-            <a:off x="5278005" y="4223996"/>
-            <a:ext cx="1490979" cy="368300"/>
+            <a:off x="1267274" y="2628900"/>
+            <a:ext cx="8520281" cy="646331"/>
           </a:xfrm>
           <a:prstGeom prst="rect">
             <a:avLst/>
@@ -6665,23 +6835,99 @@
           <a:noFill/>
         </p:spPr>
         <p:txBody>
+          <a:bodyPr wrap="none" rtlCol="0">
+            <a:spAutoFit/>
+          </a:bodyPr>
+          <a:lstStyle/>
+          <a:p>
+            <a:r>
+              <a:rPr lang="zh-CN" altLang="en-US" dirty="0"/>
+              <a:t>如果在使用过程中遇到问题，可以通过</a:t>
+            </a:r>
+            <a:r>
+              <a:rPr lang="en-US" altLang="zh-CN" dirty="0"/>
+              <a:t>GitHub</a:t>
+            </a:r>
+            <a:r>
+              <a:rPr lang="zh-CN" altLang="en-US" dirty="0"/>
+              <a:t>联系我，如果有资源更新需求，请在</a:t>
+            </a:r>
+            <a:endParaRPr lang="en-US" altLang="zh-CN" dirty="0"/>
+          </a:p>
+          <a:p>
+            <a:r>
+              <a:rPr lang="en-US" altLang="zh-CN" dirty="0" err="1"/>
+              <a:t>i</a:t>
+            </a:r>
+            <a:r>
+              <a:rPr lang="en-US" altLang="zh-CN" dirty="0" err="1">
+                <a:hlinkClick r:id="rId2"/>
+              </a:rPr>
+              <a:t>Issues</a:t>
+            </a:r>
+            <a:r>
+              <a:rPr lang="en-US" altLang="zh-CN" dirty="0">
+                <a:hlinkClick r:id="rId2"/>
+              </a:rPr>
+              <a:t> · Bukehi/BukehiWeb (github.com)</a:t>
+            </a:r>
+            <a:r>
+              <a:rPr lang="zh-CN" altLang="en-US" dirty="0"/>
+              <a:t>中留言。</a:t>
+            </a:r>
+            <a:endParaRPr lang="en-US" altLang="zh-CN" dirty="0"/>
+          </a:p>
+        </p:txBody>
+      </p:sp>
+      <p:sp>
+        <p:nvSpPr>
+          <p:cNvPr id="9" name="文本框 8">
+            <a:extLst>
+              <a:ext uri="{FF2B5EF4-FFF2-40B4-BE49-F238E27FC236}">
+                <a16:creationId xmlns:a16="http://schemas.microsoft.com/office/drawing/2014/main" id="{80C360A8-C124-D942-B9C2-323C377D3F56}"/>
+              </a:ext>
+            </a:extLst>
+          </p:cNvPr>
+          <p:cNvSpPr txBox="1"/>
+          <p:nvPr/>
+        </p:nvSpPr>
+        <p:spPr>
+          <a:xfrm>
+            <a:off x="1267274" y="975777"/>
+            <a:ext cx="4645151" cy="830997"/>
+          </a:xfrm>
+          <a:prstGeom prst="rect">
+            <a:avLst/>
+          </a:prstGeom>
+          <a:noFill/>
+        </p:spPr>
+        <p:txBody>
           <a:bodyPr wrap="square" rtlCol="0">
-            <a:noAutofit/>
-          </a:bodyPr>
-          <a:lstStyle/>
-          <a:p>
-            <a:r>
-              <a:rPr lang="zh-CN" altLang="en-US" dirty="0"/>
-              <a:t>数学答案</a:t>
-            </a:r>
-            <a:r>
-              <a:rPr lang="en-US" altLang="zh-CN" dirty="0"/>
-              <a:t>1</a:t>
+            <a:spAutoFit/>
+          </a:bodyPr>
+          <a:lstStyle/>
+          <a:p>
+            <a:r>
+              <a:rPr lang="zh-CN" altLang="en-US" sz="3200" dirty="0"/>
+              <a:t>本内容有</a:t>
+            </a:r>
+            <a:r>
+              <a:rPr lang="en-US" altLang="zh-CN" sz="4800" dirty="0"/>
+              <a:t>Bukehi</a:t>
+            </a:r>
+            <a:r>
+              <a:rPr lang="zh-CN" altLang="en-US" sz="3200" dirty="0"/>
+              <a:t>提供</a:t>
             </a:r>
           </a:p>
         </p:txBody>
       </p:sp>
     </p:spTree>
+    <p:extLst>
+      <p:ext uri="{BB962C8B-B14F-4D97-AF65-F5344CB8AC3E}">
+        <p14:creationId xmlns:p14="http://schemas.microsoft.com/office/powerpoint/2010/main" val="3933952672"/>
+      </p:ext>
+    </p:extLst>
   </p:cSld>
   <p:clrMapOvr>
     <a:masterClrMapping/>
@@ -6716,8 +6962,8 @@
         </p:nvSpPr>
         <p:spPr>
           <a:xfrm>
-            <a:off x="1200150" y="1981517"/>
-            <a:ext cx="840486" cy="437515"/>
+            <a:off x="819569" y="1809023"/>
+            <a:ext cx="1160780" cy="368300"/>
           </a:xfrm>
           <a:prstGeom prst="rect">
             <a:avLst/>
@@ -6725,15 +6971,16 @@
           <a:noFill/>
         </p:spPr>
         <p:txBody>
-          <a:bodyPr wrap="square" rtlCol="0">
-            <a:noAutofit/>
+          <a:bodyPr wrap="none" rtlCol="0">
+            <a:spAutoFit/>
           </a:bodyPr>
           <a:lstStyle/>
           <a:p>
             <a:r>
               <a:rPr lang="en-US" altLang="zh-CN" dirty="0"/>
-              <a:t>pdf1</a:t>
-            </a:r>
+              <a:t>Live word</a:t>
+            </a:r>
+            <a:endParaRPr lang="zh-CN" altLang="en-US" dirty="0"/>
           </a:p>
         </p:txBody>
       </p:sp>
@@ -6747,8 +6994,8 @@
         </p:nvSpPr>
         <p:spPr>
           <a:xfrm>
-            <a:off x="1200150" y="2991485"/>
-            <a:ext cx="840486" cy="437515"/>
+            <a:off x="798990" y="2606667"/>
+            <a:ext cx="1833880" cy="368300"/>
           </a:xfrm>
           <a:prstGeom prst="rect">
             <a:avLst/>
@@ -6756,21 +7003,22 @@
           <a:noFill/>
         </p:spPr>
         <p:txBody>
-          <a:bodyPr wrap="square" rtlCol="0">
-            <a:noAutofit/>
+          <a:bodyPr wrap="none" rtlCol="0">
+            <a:spAutoFit/>
           </a:bodyPr>
           <a:lstStyle/>
           <a:p>
             <a:r>
               <a:rPr lang="en-US" altLang="zh-CN" dirty="0"/>
-              <a:t>pdf2</a:t>
-            </a:r>
-          </a:p>
-        </p:txBody>
-      </p:sp>
-      <p:sp>
-        <p:nvSpPr>
-          <p:cNvPr id="2" name="文本框 1">
+              <a:t>Live PowerPoint</a:t>
+            </a:r>
+            <a:endParaRPr lang="zh-CN" altLang="en-US" dirty="0"/>
+          </a:p>
+        </p:txBody>
+      </p:sp>
+      <p:sp>
+        <p:nvSpPr>
+          <p:cNvPr id="7" name="文本框 6">
             <a:hlinkClick r:id="rId4"/>
           </p:cNvPr>
           <p:cNvSpPr txBox="1"/>
@@ -6778,8 +7026,8 @@
         </p:nvSpPr>
         <p:spPr>
           <a:xfrm>
-            <a:off x="1200150" y="4001453"/>
-            <a:ext cx="840486" cy="437515"/>
+            <a:off x="798990" y="3358867"/>
+            <a:ext cx="982980" cy="368300"/>
           </a:xfrm>
           <a:prstGeom prst="rect">
             <a:avLst/>
@@ -6787,21 +7035,22 @@
           <a:noFill/>
         </p:spPr>
         <p:txBody>
-          <a:bodyPr wrap="square" rtlCol="0">
-            <a:noAutofit/>
+          <a:bodyPr wrap="none" rtlCol="0">
+            <a:spAutoFit/>
           </a:bodyPr>
           <a:lstStyle/>
           <a:p>
             <a:r>
               <a:rPr lang="en-US" altLang="zh-CN" dirty="0"/>
-              <a:t>pdf3</a:t>
-            </a:r>
-          </a:p>
-        </p:txBody>
-      </p:sp>
-      <p:sp>
-        <p:nvSpPr>
-          <p:cNvPr id="3" name="文本框 2">
+              <a:t>Live pdf</a:t>
+            </a:r>
+            <a:endParaRPr lang="zh-CN" altLang="en-US" dirty="0"/>
+          </a:p>
+        </p:txBody>
+      </p:sp>
+      <p:sp>
+        <p:nvSpPr>
+          <p:cNvPr id="8" name="文本框 7">
             <a:hlinkClick r:id="rId5"/>
           </p:cNvPr>
           <p:cNvSpPr txBox="1"/>
@@ -6809,8 +7058,8 @@
         </p:nvSpPr>
         <p:spPr>
           <a:xfrm>
-            <a:off x="1200150" y="4792663"/>
-            <a:ext cx="840486" cy="437515"/>
+            <a:off x="798990" y="4223996"/>
+            <a:ext cx="1198880" cy="368300"/>
           </a:xfrm>
           <a:prstGeom prst="rect">
             <a:avLst/>
@@ -6818,30 +7067,31 @@
           <a:noFill/>
         </p:spPr>
         <p:txBody>
-          <a:bodyPr wrap="square" rtlCol="0">
-            <a:noAutofit/>
+          <a:bodyPr wrap="none" rtlCol="0">
+            <a:spAutoFit/>
           </a:bodyPr>
           <a:lstStyle/>
           <a:p>
             <a:r>
               <a:rPr lang="en-US" altLang="zh-CN" dirty="0"/>
-              <a:t>pdf4</a:t>
-            </a:r>
-          </a:p>
-        </p:txBody>
-      </p:sp>
-      <p:sp>
-        <p:nvSpPr>
-          <p:cNvPr id="7" name="文本框 6">
-            <a:hlinkClick r:id="rId6" action="ppaction://hlinkfile"/>
+              <a:t>Live excel</a:t>
+            </a:r>
+            <a:endParaRPr lang="zh-CN" altLang="en-US" dirty="0"/>
+          </a:p>
+        </p:txBody>
+      </p:sp>
+      <p:sp>
+        <p:nvSpPr>
+          <p:cNvPr id="9" name="文本框 8">
+            <a:hlinkClick r:id="rId6"/>
           </p:cNvPr>
           <p:cNvSpPr txBox="1"/>
           <p:nvPr/>
         </p:nvSpPr>
         <p:spPr>
           <a:xfrm>
-            <a:off x="7373839" y="1981519"/>
-            <a:ext cx="1117338" cy="437514"/>
+            <a:off x="798990" y="5089124"/>
+            <a:ext cx="640080" cy="368300"/>
           </a:xfrm>
           <a:prstGeom prst="rect">
             <a:avLst/>
@@ -6849,35 +7099,30 @@
           <a:noFill/>
         </p:spPr>
         <p:txBody>
-          <a:bodyPr wrap="square">
-            <a:noAutofit/>
-          </a:bodyPr>
-          <a:lstStyle/>
-          <a:p>
-            <a:r>
-              <a:rPr lang="en-US" altLang="zh-CN" dirty="0"/>
-              <a:t>python</a:t>
-            </a:r>
-          </a:p>
-        </p:txBody>
-      </p:sp>
-      <p:sp>
-        <p:nvSpPr>
-          <p:cNvPr id="8" name="文本框 7">
-            <a:hlinkClick r:id="rId7"/>
-            <a:extLst>
-              <a:ext uri="{FF2B5EF4-FFF2-40B4-BE49-F238E27FC236}">
-                <a16:creationId xmlns:a16="http://schemas.microsoft.com/office/drawing/2014/main" id="{0B260AE6-5A6D-69AE-B95A-6A685ECF22BA}"/>
-              </a:ext>
-            </a:extLst>
+          <a:bodyPr wrap="none" rtlCol="0">
+            <a:spAutoFit/>
+          </a:bodyPr>
+          <a:lstStyle/>
+          <a:p>
+            <a:r>
+              <a:rPr lang="zh-CN" altLang="en-US" dirty="0"/>
+              <a:t>热搜</a:t>
+            </a:r>
+          </a:p>
+        </p:txBody>
+      </p:sp>
+      <p:sp>
+        <p:nvSpPr>
+          <p:cNvPr id="2" name="文本框 1">
+            <a:hlinkClick r:id="rId7" action="ppaction://hlinkfile"/>
           </p:cNvPr>
           <p:cNvSpPr txBox="1"/>
           <p:nvPr/>
         </p:nvSpPr>
         <p:spPr>
           <a:xfrm>
-            <a:off x="1200150" y="5583873"/>
-            <a:ext cx="840486" cy="437515"/>
+            <a:off x="5278006" y="1790595"/>
+            <a:ext cx="1410335" cy="368300"/>
           </a:xfrm>
           <a:prstGeom prst="rect">
             <a:avLst/>
@@ -6886,34 +7131,29 @@
         </p:spPr>
         <p:txBody>
           <a:bodyPr wrap="square" rtlCol="0">
-            <a:noAutofit/>
+            <a:spAutoFit/>
           </a:bodyPr>
           <a:lstStyle/>
           <a:p>
             <a:r>
               <a:rPr lang="en-US" altLang="zh-CN" dirty="0"/>
-              <a:t>pdf5</a:t>
-            </a:r>
-          </a:p>
-        </p:txBody>
-      </p:sp>
-      <p:sp>
-        <p:nvSpPr>
-          <p:cNvPr id="9" name="文本框 8">
-            <a:hlinkClick r:id="rId8"/>
-            <a:extLst>
-              <a:ext uri="{FF2B5EF4-FFF2-40B4-BE49-F238E27FC236}">
-                <a16:creationId xmlns:a16="http://schemas.microsoft.com/office/drawing/2014/main" id="{7B914DE2-DA90-1505-C2FC-151C871A9656}"/>
-              </a:ext>
-            </a:extLst>
+              <a:t>wulianwser</a:t>
+            </a:r>
+          </a:p>
+        </p:txBody>
+      </p:sp>
+      <p:sp>
+        <p:nvSpPr>
+          <p:cNvPr id="3" name="文本框 2">
+            <a:hlinkClick r:id="rId8" action="ppaction://hlinkfile"/>
           </p:cNvPr>
           <p:cNvSpPr txBox="1"/>
           <p:nvPr/>
         </p:nvSpPr>
         <p:spPr>
           <a:xfrm>
-            <a:off x="3985395" y="1981517"/>
-            <a:ext cx="840486" cy="437515"/>
+            <a:off x="5278006" y="2636699"/>
+            <a:ext cx="1378220" cy="368300"/>
           </a:xfrm>
           <a:prstGeom prst="rect">
             <a:avLst/>
@@ -6922,13 +7162,13 @@
         </p:spPr>
         <p:txBody>
           <a:bodyPr wrap="square" rtlCol="0">
-            <a:noAutofit/>
-          </a:bodyPr>
-          <a:lstStyle/>
-          <a:p>
-            <a:r>
-              <a:rPr lang="en-US" altLang="zh-CN" dirty="0"/>
-              <a:t>pdf6</a:t>
+            <a:spAutoFit/>
+          </a:bodyPr>
+          <a:lstStyle/>
+          <a:p>
+            <a:r>
+              <a:rPr lang="en-US" altLang="zh-CN"/>
+              <a:t>101</a:t>
             </a:r>
           </a:p>
         </p:txBody>
@@ -6937,19 +7177,14 @@
         <p:nvSpPr>
           <p:cNvPr id="10" name="文本框 9">
             <a:hlinkClick r:id="rId9"/>
-            <a:extLst>
-              <a:ext uri="{FF2B5EF4-FFF2-40B4-BE49-F238E27FC236}">
-                <a16:creationId xmlns:a16="http://schemas.microsoft.com/office/drawing/2014/main" id="{6800C8A5-D85D-E947-2980-9275E5439645}"/>
-              </a:ext>
-            </a:extLst>
           </p:cNvPr>
           <p:cNvSpPr txBox="1"/>
           <p:nvPr/>
         </p:nvSpPr>
         <p:spPr>
           <a:xfrm>
-            <a:off x="3985395" y="2991484"/>
-            <a:ext cx="840486" cy="437515"/>
+            <a:off x="5278006" y="5089124"/>
+            <a:ext cx="1490980" cy="368300"/>
           </a:xfrm>
           <a:prstGeom prst="rect">
             <a:avLst/>
@@ -6957,35 +7192,31 @@
           <a:noFill/>
         </p:spPr>
         <p:txBody>
-          <a:bodyPr wrap="square" rtlCol="0">
-            <a:noAutofit/>
+          <a:bodyPr wrap="none" rtlCol="0">
+            <a:spAutoFit/>
           </a:bodyPr>
           <a:lstStyle/>
           <a:p>
             <a:r>
               <a:rPr lang="en-US" altLang="zh-CN" dirty="0"/>
-              <a:t>pdf7</a:t>
-            </a:r>
-          </a:p>
-        </p:txBody>
-      </p:sp>
-      <p:sp>
-        <p:nvSpPr>
-          <p:cNvPr id="11" name="文本框 10">
+              <a:t>main project</a:t>
+            </a:r>
+            <a:endParaRPr lang="zh-CN" altLang="en-US" dirty="0"/>
+          </a:p>
+        </p:txBody>
+      </p:sp>
+      <p:sp>
+        <p:nvSpPr>
+          <p:cNvPr id="13" name="文本框 12">
             <a:hlinkClick r:id="rId10"/>
-            <a:extLst>
-              <a:ext uri="{FF2B5EF4-FFF2-40B4-BE49-F238E27FC236}">
-                <a16:creationId xmlns:a16="http://schemas.microsoft.com/office/drawing/2014/main" id="{AC00C3B6-920F-F09C-2893-A67EB8FA4D37}"/>
-              </a:ext>
-            </a:extLst>
           </p:cNvPr>
           <p:cNvSpPr txBox="1"/>
           <p:nvPr/>
         </p:nvSpPr>
         <p:spPr>
           <a:xfrm>
-            <a:off x="3985395" y="4001453"/>
-            <a:ext cx="840486" cy="437515"/>
+            <a:off x="5278005" y="3482551"/>
+            <a:ext cx="1490979" cy="368300"/>
           </a:xfrm>
           <a:prstGeom prst="rect">
             <a:avLst/>
@@ -6999,18 +7230,83 @@
           <a:lstStyle/>
           <a:p>
             <a:r>
+              <a:rPr lang="zh-CN" altLang="en-US" dirty="0"/>
+              <a:t>数学答案</a:t>
+            </a:r>
+            <a:endParaRPr lang="en-US" altLang="zh-CN" dirty="0"/>
+          </a:p>
+        </p:txBody>
+      </p:sp>
+      <p:sp>
+        <p:nvSpPr>
+          <p:cNvPr id="15" name="文本框 14">
+            <a:hlinkClick r:id="rId11"/>
+          </p:cNvPr>
+          <p:cNvSpPr txBox="1"/>
+          <p:nvPr/>
+        </p:nvSpPr>
+        <p:spPr>
+          <a:xfrm>
+            <a:off x="8311121" y="2549819"/>
+            <a:ext cx="1033780" cy="368300"/>
+          </a:xfrm>
+          <a:prstGeom prst="rect">
+            <a:avLst/>
+          </a:prstGeom>
+          <a:noFill/>
+        </p:spPr>
+        <p:txBody>
+          <a:bodyPr wrap="none" rtlCol="0">
+            <a:spAutoFit/>
+          </a:bodyPr>
+          <a:lstStyle/>
+          <a:p>
+            <a:r>
               <a:rPr lang="en-US" altLang="zh-CN" dirty="0"/>
-              <a:t>pdf8</a:t>
-            </a:r>
-          </a:p>
-        </p:txBody>
-      </p:sp>
-      <p:sp>
-        <p:nvSpPr>
-          <p:cNvPr id="12" name="标题 11">
+              <a:t>Live text</a:t>
+            </a:r>
+            <a:endParaRPr lang="zh-CN" altLang="en-US" dirty="0"/>
+          </a:p>
+        </p:txBody>
+      </p:sp>
+      <p:sp>
+        <p:nvSpPr>
+          <p:cNvPr id="14" name="文本框 13">
+            <a:hlinkClick r:id="rId12"/>
+          </p:cNvPr>
+          <p:cNvSpPr txBox="1"/>
+          <p:nvPr/>
+        </p:nvSpPr>
+        <p:spPr>
+          <a:xfrm>
+            <a:off x="8311121" y="1790595"/>
+            <a:ext cx="1410335" cy="368300"/>
+          </a:xfrm>
+          <a:prstGeom prst="rect">
+            <a:avLst/>
+          </a:prstGeom>
+          <a:noFill/>
+        </p:spPr>
+        <p:txBody>
+          <a:bodyPr wrap="square" rtlCol="0">
+            <a:spAutoFit/>
+          </a:bodyPr>
+          <a:lstStyle/>
+          <a:p>
+            <a:r>
+              <a:rPr lang="zh-CN" altLang="en-US" dirty="0"/>
+              <a:t>词形转换</a:t>
+            </a:r>
+            <a:endParaRPr lang="en-US" altLang="zh-CN" dirty="0"/>
+          </a:p>
+        </p:txBody>
+      </p:sp>
+      <p:sp>
+        <p:nvSpPr>
+          <p:cNvPr id="11" name="标题 10">
             <a:extLst>
               <a:ext uri="{FF2B5EF4-FFF2-40B4-BE49-F238E27FC236}">
-                <a16:creationId xmlns:a16="http://schemas.microsoft.com/office/drawing/2014/main" id="{908EC3CF-1981-D912-40B2-8A99EDC4E8C3}"/>
+                <a16:creationId xmlns:a16="http://schemas.microsoft.com/office/drawing/2014/main" id="{2C3A1F1D-C7A4-2995-C534-193F3CBBB9B8}"/>
               </a:ext>
             </a:extLst>
           </p:cNvPr>
@@ -7023,35 +7319,28 @@
         </p:nvSpPr>
         <p:spPr>
           <a:xfrm>
-            <a:off x="287755" y="390419"/>
-            <a:ext cx="1115684" cy="437515"/>
-          </a:xfrm>
-        </p:spPr>
-        <p:txBody>
-          <a:bodyPr>
-            <a:normAutofit fontScale="90000"/>
-          </a:bodyPr>
+            <a:off x="193437" y="208485"/>
+            <a:ext cx="2110766" cy="703017"/>
+          </a:xfrm>
+        </p:spPr>
+        <p:txBody>
+          <a:bodyPr/>
           <a:lstStyle/>
           <a:p>
             <a:r>
               <a:rPr lang="zh-CN" altLang="en-US" dirty="0"/>
-              <a:t>P</a:t>
-            </a:r>
-            <a:r>
-              <a:rPr lang="en-US" altLang="zh-CN" dirty="0"/>
-              <a:t>DF</a:t>
-            </a:r>
-            <a:endParaRPr lang="zh-CN" altLang="en-US" dirty="0"/>
+              <a:t>活动文件</a:t>
+            </a:r>
           </a:p>
         </p:txBody>
       </p:sp>
       <p:sp>
         <p:nvSpPr>
           <p:cNvPr id="4" name="文本框 3">
-            <a:hlinkClick r:id="rId11"/>
+            <a:hlinkClick r:id="rId13"/>
             <a:extLst>
               <a:ext uri="{FF2B5EF4-FFF2-40B4-BE49-F238E27FC236}">
-                <a16:creationId xmlns:a16="http://schemas.microsoft.com/office/drawing/2014/main" id="{837B52E5-09E4-8E2F-6DFE-E914CEC7955C}"/>
+                <a16:creationId xmlns:a16="http://schemas.microsoft.com/office/drawing/2014/main" id="{92A893C4-FCF0-B4C2-8D87-14F4DBF127AB}"/>
               </a:ext>
             </a:extLst>
           </p:cNvPr>
@@ -7060,8 +7349,8 @@
         </p:nvSpPr>
         <p:spPr>
           <a:xfrm>
-            <a:off x="7373838" y="2991485"/>
-            <a:ext cx="3404651" cy="437514"/>
+            <a:off x="5278005" y="4223996"/>
+            <a:ext cx="1490979" cy="368300"/>
           </a:xfrm>
           <a:prstGeom prst="rect">
             <a:avLst/>
@@ -7069,22 +7358,18 @@
           <a:noFill/>
         </p:spPr>
         <p:txBody>
-          <a:bodyPr wrap="square">
+          <a:bodyPr wrap="square" rtlCol="0">
             <a:noAutofit/>
           </a:bodyPr>
           <a:lstStyle/>
           <a:p>
             <a:r>
+              <a:rPr lang="zh-CN" altLang="en-US" dirty="0"/>
+              <a:t>数学答案</a:t>
+            </a:r>
+            <a:r>
               <a:rPr lang="en-US" altLang="zh-CN" dirty="0"/>
-              <a:t>GitHub</a:t>
-            </a:r>
-            <a:r>
-              <a:rPr lang="zh-CN" altLang="en-US" dirty="0"/>
-              <a:t>入门与实践完整版</a:t>
-            </a:r>
-            <a:r>
-              <a:rPr lang="en-US" altLang="zh-CN" dirty="0"/>
-              <a:t>.pdf</a:t>
+              <a:t>1</a:t>
             </a:r>
           </a:p>
         </p:txBody>
@@ -7124,8 +7409,8 @@
         </p:nvSpPr>
         <p:spPr>
           <a:xfrm>
-            <a:off x="1278255" y="1377315"/>
-            <a:ext cx="2352675" cy="368300"/>
+            <a:off x="1200150" y="1981517"/>
+            <a:ext cx="840486" cy="437515"/>
           </a:xfrm>
           <a:prstGeom prst="rect">
             <a:avLst/>
@@ -7134,28 +7419,20 @@
         </p:spPr>
         <p:txBody>
           <a:bodyPr wrap="square" rtlCol="0">
-            <a:spAutoFit/>
+            <a:noAutofit/>
           </a:bodyPr>
           <a:lstStyle/>
           <a:p>
             <a:r>
               <a:rPr lang="en-US" altLang="zh-CN" dirty="0"/>
-              <a:t>《</a:t>
-            </a:r>
-            <a:r>
-              <a:rPr lang="zh-CN" altLang="en-US" dirty="0"/>
-              <a:t>万相之王</a:t>
-            </a:r>
-            <a:r>
-              <a:rPr lang="en-US" altLang="zh-CN" dirty="0"/>
-              <a:t>》</a:t>
-            </a:r>
-          </a:p>
-        </p:txBody>
-      </p:sp>
-      <p:sp>
-        <p:nvSpPr>
-          <p:cNvPr id="12" name="文本框 11">
+              <a:t>pdf1</a:t>
+            </a:r>
+          </a:p>
+        </p:txBody>
+      </p:sp>
+      <p:sp>
+        <p:nvSpPr>
+          <p:cNvPr id="6" name="文本框 5">
             <a:hlinkClick r:id="rId3"/>
           </p:cNvPr>
           <p:cNvSpPr txBox="1"/>
@@ -7163,8 +7440,8 @@
         </p:nvSpPr>
         <p:spPr>
           <a:xfrm>
-            <a:off x="1278255" y="2064385"/>
-            <a:ext cx="3928745" cy="368300"/>
+            <a:off x="1200150" y="2991485"/>
+            <a:ext cx="840486" cy="437515"/>
           </a:xfrm>
           <a:prstGeom prst="rect">
             <a:avLst/>
@@ -7172,29 +7449,21 @@
           <a:noFill/>
         </p:spPr>
         <p:txBody>
-          <a:bodyPr wrap="square">
-            <a:spAutoFit/>
+          <a:bodyPr wrap="square" rtlCol="0">
+            <a:noAutofit/>
           </a:bodyPr>
           <a:lstStyle/>
           <a:p>
             <a:r>
               <a:rPr lang="en-US" altLang="zh-CN" dirty="0"/>
-              <a:t>《</a:t>
-            </a:r>
-            <a:r>
-              <a:rPr lang="zh-CN" altLang="en-US" dirty="0"/>
-              <a:t>轮盘世界</a:t>
-            </a:r>
-            <a:r>
-              <a:rPr lang="en-US" altLang="zh-CN" dirty="0"/>
-              <a:t>》</a:t>
-            </a:r>
-          </a:p>
-        </p:txBody>
-      </p:sp>
-      <p:sp>
-        <p:nvSpPr>
-          <p:cNvPr id="14" name="文本框 13">
+              <a:t>pdf2</a:t>
+            </a:r>
+          </a:p>
+        </p:txBody>
+      </p:sp>
+      <p:sp>
+        <p:nvSpPr>
+          <p:cNvPr id="2" name="文本框 1">
             <a:hlinkClick r:id="rId4"/>
           </p:cNvPr>
           <p:cNvSpPr txBox="1"/>
@@ -7202,8 +7471,8 @@
         </p:nvSpPr>
         <p:spPr>
           <a:xfrm>
-            <a:off x="1278255" y="2751455"/>
-            <a:ext cx="3928745" cy="368300"/>
+            <a:off x="1200150" y="4001453"/>
+            <a:ext cx="840486" cy="437515"/>
           </a:xfrm>
           <a:prstGeom prst="rect">
             <a:avLst/>
@@ -7211,29 +7480,21 @@
           <a:noFill/>
         </p:spPr>
         <p:txBody>
-          <a:bodyPr wrap="square">
-            <a:spAutoFit/>
+          <a:bodyPr wrap="square" rtlCol="0">
+            <a:noAutofit/>
           </a:bodyPr>
           <a:lstStyle/>
           <a:p>
             <a:r>
               <a:rPr lang="en-US" altLang="zh-CN" dirty="0"/>
-              <a:t>《</a:t>
-            </a:r>
-            <a:r>
-              <a:rPr lang="zh-CN" altLang="en-US" dirty="0"/>
-              <a:t>末世超级小卖部</a:t>
-            </a:r>
-            <a:r>
-              <a:rPr lang="en-US" altLang="zh-CN" dirty="0"/>
-              <a:t>》</a:t>
-            </a:r>
-          </a:p>
-        </p:txBody>
-      </p:sp>
-      <p:sp>
-        <p:nvSpPr>
-          <p:cNvPr id="18" name="文本框 17">
+              <a:t>pdf3</a:t>
+            </a:r>
+          </a:p>
+        </p:txBody>
+      </p:sp>
+      <p:sp>
+        <p:nvSpPr>
+          <p:cNvPr id="3" name="文本框 2">
             <a:hlinkClick r:id="rId5"/>
           </p:cNvPr>
           <p:cNvSpPr txBox="1"/>
@@ -7241,8 +7502,8 @@
         </p:nvSpPr>
         <p:spPr>
           <a:xfrm>
-            <a:off x="1278255" y="3438525"/>
-            <a:ext cx="3928745" cy="368300"/>
+            <a:off x="1200150" y="4792663"/>
+            <a:ext cx="840486" cy="437515"/>
           </a:xfrm>
           <a:prstGeom prst="rect">
             <a:avLst/>
@@ -7250,39 +7511,30 @@
           <a:noFill/>
         </p:spPr>
         <p:txBody>
-          <a:bodyPr wrap="square">
-            <a:spAutoFit/>
+          <a:bodyPr wrap="square" rtlCol="0">
+            <a:noAutofit/>
           </a:bodyPr>
           <a:lstStyle/>
           <a:p>
             <a:r>
               <a:rPr lang="en-US" altLang="zh-CN" dirty="0"/>
-              <a:t>《</a:t>
-            </a:r>
-            <a:r>
-              <a:rPr lang="zh-CN" altLang="en-US" dirty="0"/>
-              <a:t>末世：我的关键词比别人多一个</a:t>
-            </a:r>
-            <a:r>
-              <a:rPr lang="en-US" altLang="zh-CN" dirty="0"/>
-              <a:t>》</a:t>
-            </a:r>
-            <a:endParaRPr lang="zh-CN" altLang="en-US" dirty="0"/>
-          </a:p>
-        </p:txBody>
-      </p:sp>
-      <p:sp>
-        <p:nvSpPr>
-          <p:cNvPr id="20" name="文本框 19">
-            <a:hlinkClick r:id="rId6"/>
+              <a:t>pdf4</a:t>
+            </a:r>
+          </a:p>
+        </p:txBody>
+      </p:sp>
+      <p:sp>
+        <p:nvSpPr>
+          <p:cNvPr id="7" name="文本框 6">
+            <a:hlinkClick r:id="rId6" action="ppaction://hlinkfile"/>
           </p:cNvPr>
           <p:cNvSpPr txBox="1"/>
           <p:nvPr/>
         </p:nvSpPr>
         <p:spPr>
           <a:xfrm>
-            <a:off x="1278255" y="4125595"/>
-            <a:ext cx="3928745" cy="368300"/>
+            <a:off x="7373839" y="1981519"/>
+            <a:ext cx="1117338" cy="437514"/>
           </a:xfrm>
           <a:prstGeom prst="rect">
             <a:avLst/>
@@ -7291,95 +7543,24 @@
         </p:spPr>
         <p:txBody>
           <a:bodyPr wrap="square">
-            <a:spAutoFit/>
+            <a:noAutofit/>
           </a:bodyPr>
           <a:lstStyle/>
           <a:p>
             <a:r>
               <a:rPr lang="en-US" altLang="zh-CN" dirty="0"/>
-              <a:t>《</a:t>
-            </a:r>
-            <a:r>
-              <a:rPr lang="zh-CN" altLang="en-US" dirty="0"/>
-              <a:t>全球废土：避难所无限升级</a:t>
-            </a:r>
-            <a:r>
-              <a:rPr lang="en-US" altLang="zh-CN" dirty="0"/>
-              <a:t>》</a:t>
-            </a:r>
-            <a:endParaRPr lang="zh-CN" altLang="en-US" dirty="0"/>
-          </a:p>
-        </p:txBody>
-      </p:sp>
-      <p:sp>
-        <p:nvSpPr>
-          <p:cNvPr id="2" name="文本框 1">
-            <a:hlinkClick r:id="rId7" action="ppaction://hlinkfile"/>
-          </p:cNvPr>
-          <p:cNvSpPr txBox="1"/>
-          <p:nvPr/>
-        </p:nvSpPr>
-        <p:spPr>
-          <a:xfrm>
-            <a:off x="1278255" y="4812665"/>
-            <a:ext cx="1571625" cy="314960"/>
-          </a:xfrm>
-          <a:prstGeom prst="rect">
-            <a:avLst/>
-          </a:prstGeom>
-          <a:noFill/>
-        </p:spPr>
-        <p:txBody>
-          <a:bodyPr wrap="square" rtlCol="0">
-            <a:noAutofit/>
-          </a:bodyPr>
-          <a:lstStyle/>
-          <a:p>
-            <a:r>
-              <a:rPr lang="zh-CN" altLang="en-US" dirty="0"/>
-              <a:t>《蛊真人》</a:t>
-            </a:r>
-          </a:p>
-        </p:txBody>
-      </p:sp>
-      <p:sp>
-        <p:nvSpPr>
-          <p:cNvPr id="3" name="文本框 2">
-            <a:hlinkClick r:id="rId8" action="ppaction://hlinkfile"/>
-          </p:cNvPr>
-          <p:cNvSpPr txBox="1"/>
-          <p:nvPr/>
-        </p:nvSpPr>
-        <p:spPr>
-          <a:xfrm>
-            <a:off x="1278255" y="5446395"/>
-            <a:ext cx="3928745" cy="368300"/>
-          </a:xfrm>
-          <a:prstGeom prst="rect">
-            <a:avLst/>
-          </a:prstGeom>
-          <a:noFill/>
-        </p:spPr>
-        <p:txBody>
-          <a:bodyPr wrap="square">
-            <a:spAutoFit/>
-          </a:bodyPr>
-          <a:lstStyle/>
-          <a:p>
-            <a:r>
-              <a:rPr lang="zh-CN" altLang="en-US" dirty="0"/>
-              <a:t>《斗罗大陆II绝世唐门》</a:t>
-            </a:r>
-          </a:p>
-        </p:txBody>
-      </p:sp>
-      <p:sp>
-        <p:nvSpPr>
-          <p:cNvPr id="6" name="文本框 5">
-            <a:hlinkClick r:id="rId9"/>
+              <a:t>python</a:t>
+            </a:r>
+          </a:p>
+        </p:txBody>
+      </p:sp>
+      <p:sp>
+        <p:nvSpPr>
+          <p:cNvPr id="8" name="文本框 7">
+            <a:hlinkClick r:id="rId7"/>
             <a:extLst>
               <a:ext uri="{FF2B5EF4-FFF2-40B4-BE49-F238E27FC236}">
-                <a16:creationId xmlns:a16="http://schemas.microsoft.com/office/drawing/2014/main" id="{F4FF3375-1005-18D2-8304-774F6BDCCC15}"/>
+                <a16:creationId xmlns:a16="http://schemas.microsoft.com/office/drawing/2014/main" id="{0B260AE6-5A6D-69AE-B95A-6A685ECF22BA}"/>
               </a:ext>
             </a:extLst>
           </p:cNvPr>
@@ -7388,8 +7569,8 @@
         </p:nvSpPr>
         <p:spPr>
           <a:xfrm>
-            <a:off x="6733125" y="1377315"/>
-            <a:ext cx="1827948" cy="368300"/>
+            <a:off x="1200150" y="5583873"/>
+            <a:ext cx="840486" cy="437515"/>
           </a:xfrm>
           <a:prstGeom prst="rect">
             <a:avLst/>
@@ -7397,22 +7578,14 @@
           <a:noFill/>
         </p:spPr>
         <p:txBody>
-          <a:bodyPr wrap="square">
-            <a:spAutoFit/>
+          <a:bodyPr wrap="square" rtlCol="0">
+            <a:noAutofit/>
           </a:bodyPr>
           <a:lstStyle/>
           <a:p>
             <a:r>
               <a:rPr lang="en-US" altLang="zh-CN" dirty="0"/>
-              <a:t>《</a:t>
-            </a:r>
-            <a:r>
-              <a:rPr lang="zh-CN" altLang="en-US" dirty="0"/>
-              <a:t>后真相时代</a:t>
-            </a:r>
-            <a:r>
-              <a:rPr lang="en-US" altLang="zh-CN" dirty="0"/>
-              <a:t>》</a:t>
+              <a:t>pdf5</a:t>
             </a:r>
           </a:p>
         </p:txBody>
@@ -7420,10 +7593,10 @@
       <p:sp>
         <p:nvSpPr>
           <p:cNvPr id="9" name="文本框 8">
-            <a:hlinkClick r:id="rId10"/>
+            <a:hlinkClick r:id="rId8"/>
             <a:extLst>
               <a:ext uri="{FF2B5EF4-FFF2-40B4-BE49-F238E27FC236}">
-                <a16:creationId xmlns:a16="http://schemas.microsoft.com/office/drawing/2014/main" id="{228052F6-87BB-782A-D720-7AC2231B507C}"/>
+                <a16:creationId xmlns:a16="http://schemas.microsoft.com/office/drawing/2014/main" id="{7B914DE2-DA90-1505-C2FC-151C871A9656}"/>
               </a:ext>
             </a:extLst>
           </p:cNvPr>
@@ -7432,8 +7605,8 @@
         </p:nvSpPr>
         <p:spPr>
           <a:xfrm>
-            <a:off x="6733124" y="2064385"/>
-            <a:ext cx="3157109" cy="369332"/>
+            <a:off x="3985395" y="1981517"/>
+            <a:ext cx="840486" cy="437515"/>
           </a:xfrm>
           <a:prstGeom prst="rect">
             <a:avLst/>
@@ -7441,34 +7614,25 @@
           <a:noFill/>
         </p:spPr>
         <p:txBody>
-          <a:bodyPr wrap="square">
-            <a:spAutoFit/>
+          <a:bodyPr wrap="square" rtlCol="0">
+            <a:noAutofit/>
           </a:bodyPr>
           <a:lstStyle/>
           <a:p>
             <a:r>
               <a:rPr lang="en-US" altLang="zh-CN" dirty="0"/>
-              <a:t>《</a:t>
-            </a:r>
-            <a:r>
-              <a:rPr lang="zh-CN" altLang="en-US" dirty="0"/>
-              <a:t>全球游戏：开局百亿灵能币</a:t>
-            </a:r>
-            <a:r>
-              <a:rPr lang="en-US" altLang="zh-CN" dirty="0"/>
-              <a:t>》</a:t>
-            </a:r>
-            <a:endParaRPr lang="zh-CN" altLang="en-US" dirty="0"/>
-          </a:p>
-        </p:txBody>
-      </p:sp>
-      <p:sp>
-        <p:nvSpPr>
-          <p:cNvPr id="7" name="文本框 6">
-            <a:hlinkClick r:id="rId11"/>
+              <a:t>pdf6</a:t>
+            </a:r>
+          </a:p>
+        </p:txBody>
+      </p:sp>
+      <p:sp>
+        <p:nvSpPr>
+          <p:cNvPr id="10" name="文本框 9">
+            <a:hlinkClick r:id="rId9"/>
             <a:extLst>
               <a:ext uri="{FF2B5EF4-FFF2-40B4-BE49-F238E27FC236}">
-                <a16:creationId xmlns:a16="http://schemas.microsoft.com/office/drawing/2014/main" id="{48947CAC-90CF-38F9-68E9-05B3CC70F0B8}"/>
+                <a16:creationId xmlns:a16="http://schemas.microsoft.com/office/drawing/2014/main" id="{6800C8A5-D85D-E947-2980-9275E5439645}"/>
               </a:ext>
             </a:extLst>
           </p:cNvPr>
@@ -7477,8 +7641,8 @@
         </p:nvSpPr>
         <p:spPr>
           <a:xfrm>
-            <a:off x="6733123" y="2750423"/>
-            <a:ext cx="3157109" cy="369332"/>
+            <a:off x="3985395" y="2991484"/>
+            <a:ext cx="840486" cy="437515"/>
           </a:xfrm>
           <a:prstGeom prst="rect">
             <a:avLst/>
@@ -7486,34 +7650,25 @@
           <a:noFill/>
         </p:spPr>
         <p:txBody>
-          <a:bodyPr wrap="square">
-            <a:spAutoFit/>
+          <a:bodyPr wrap="square" rtlCol="0">
+            <a:noAutofit/>
           </a:bodyPr>
           <a:lstStyle/>
           <a:p>
             <a:r>
               <a:rPr lang="en-US" altLang="zh-CN" dirty="0"/>
-              <a:t>《</a:t>
-            </a:r>
-            <a:r>
-              <a:rPr lang="zh-CN" altLang="en-US" dirty="0"/>
-              <a:t>穿成巴比伦暴君的剑</a:t>
-            </a:r>
-            <a:r>
-              <a:rPr lang="en-US" altLang="zh-CN" dirty="0"/>
-              <a:t>》</a:t>
-            </a:r>
-            <a:endParaRPr lang="zh-CN" altLang="en-US" dirty="0"/>
-          </a:p>
-        </p:txBody>
-      </p:sp>
-      <p:sp>
-        <p:nvSpPr>
-          <p:cNvPr id="8" name="文本框 7">
-            <a:hlinkClick r:id="rId12"/>
+              <a:t>pdf7</a:t>
+            </a:r>
+          </a:p>
+        </p:txBody>
+      </p:sp>
+      <p:sp>
+        <p:nvSpPr>
+          <p:cNvPr id="11" name="文本框 10">
+            <a:hlinkClick r:id="rId10"/>
             <a:extLst>
               <a:ext uri="{FF2B5EF4-FFF2-40B4-BE49-F238E27FC236}">
-                <a16:creationId xmlns:a16="http://schemas.microsoft.com/office/drawing/2014/main" id="{4E0BB707-368A-1CA4-14EB-9E21A10CC738}"/>
+                <a16:creationId xmlns:a16="http://schemas.microsoft.com/office/drawing/2014/main" id="{AC00C3B6-920F-F09C-2893-A67EB8FA4D37}"/>
               </a:ext>
             </a:extLst>
           </p:cNvPr>
@@ -7522,8 +7677,8 @@
         </p:nvSpPr>
         <p:spPr>
           <a:xfrm>
-            <a:off x="6733123" y="3436461"/>
-            <a:ext cx="3157109" cy="369332"/>
+            <a:off x="3985395" y="4001453"/>
+            <a:ext cx="840486" cy="437515"/>
           </a:xfrm>
           <a:prstGeom prst="rect">
             <a:avLst/>
@@ -7531,168 +7686,24 @@
           <a:noFill/>
         </p:spPr>
         <p:txBody>
-          <a:bodyPr wrap="square">
-            <a:spAutoFit/>
+          <a:bodyPr wrap="square" rtlCol="0">
+            <a:noAutofit/>
           </a:bodyPr>
           <a:lstStyle/>
           <a:p>
             <a:r>
               <a:rPr lang="en-US" altLang="zh-CN" dirty="0"/>
-              <a:t>《</a:t>
-            </a:r>
-            <a:r>
-              <a:rPr lang="zh-CN" altLang="en-US" dirty="0"/>
-              <a:t>夫人，你马甲又掉了</a:t>
-            </a:r>
-            <a:r>
-              <a:rPr lang="en-US" altLang="zh-CN" dirty="0"/>
-              <a:t>》</a:t>
-            </a:r>
-            <a:endParaRPr lang="zh-CN" altLang="en-US" dirty="0"/>
-          </a:p>
-        </p:txBody>
-      </p:sp>
-      <p:sp>
-        <p:nvSpPr>
-          <p:cNvPr id="10" name="文本框 9">
-            <a:hlinkClick r:id="rId13"/>
+              <a:t>pdf8</a:t>
+            </a:r>
+          </a:p>
+        </p:txBody>
+      </p:sp>
+      <p:sp>
+        <p:nvSpPr>
+          <p:cNvPr id="12" name="标题 11">
             <a:extLst>
               <a:ext uri="{FF2B5EF4-FFF2-40B4-BE49-F238E27FC236}">
-                <a16:creationId xmlns:a16="http://schemas.microsoft.com/office/drawing/2014/main" id="{1B7A347A-0A36-4A5F-68A1-B513D14424E7}"/>
-              </a:ext>
-            </a:extLst>
-          </p:cNvPr>
-          <p:cNvSpPr txBox="1"/>
-          <p:nvPr/>
-        </p:nvSpPr>
-        <p:spPr>
-          <a:xfrm>
-            <a:off x="6733123" y="4122499"/>
-            <a:ext cx="3157109" cy="369332"/>
-          </a:xfrm>
-          <a:prstGeom prst="rect">
-            <a:avLst/>
-          </a:prstGeom>
-          <a:noFill/>
-        </p:spPr>
-        <p:txBody>
-          <a:bodyPr wrap="square">
-            <a:spAutoFit/>
-          </a:bodyPr>
-          <a:lstStyle/>
-          <a:p>
-            <a:r>
-              <a:rPr lang="en-US" altLang="zh-CN" dirty="0"/>
-              <a:t>《</a:t>
-            </a:r>
-            <a:r>
-              <a:rPr lang="zh-CN" altLang="en-US" dirty="0"/>
-              <a:t>法老王的猫瘾症</a:t>
-            </a:r>
-            <a:r>
-              <a:rPr lang="en-US" altLang="zh-CN" dirty="0"/>
-              <a:t>》</a:t>
-            </a:r>
-            <a:endParaRPr lang="zh-CN" altLang="en-US" dirty="0"/>
-          </a:p>
-        </p:txBody>
-      </p:sp>
-      <p:sp>
-        <p:nvSpPr>
-          <p:cNvPr id="11" name="文本框 10">
-            <a:hlinkClick r:id="rId14"/>
-            <a:extLst>
-              <a:ext uri="{FF2B5EF4-FFF2-40B4-BE49-F238E27FC236}">
-                <a16:creationId xmlns:a16="http://schemas.microsoft.com/office/drawing/2014/main" id="{06C97A59-3170-BF31-A1AF-D31B3B65F5BD}"/>
-              </a:ext>
-            </a:extLst>
-          </p:cNvPr>
-          <p:cNvSpPr txBox="1"/>
-          <p:nvPr/>
-        </p:nvSpPr>
-        <p:spPr>
-          <a:xfrm>
-            <a:off x="6733122" y="4758293"/>
-            <a:ext cx="3157109" cy="369332"/>
-          </a:xfrm>
-          <a:prstGeom prst="rect">
-            <a:avLst/>
-          </a:prstGeom>
-          <a:noFill/>
-        </p:spPr>
-        <p:txBody>
-          <a:bodyPr wrap="square">
-            <a:spAutoFit/>
-          </a:bodyPr>
-          <a:lstStyle/>
-          <a:p>
-            <a:r>
-              <a:rPr lang="en-US" altLang="zh-CN" dirty="0"/>
-              <a:t>《</a:t>
-            </a:r>
-            <a:r>
-              <a:rPr lang="zh-CN" altLang="en-US" dirty="0"/>
-              <a:t>原神之永恒者</a:t>
-            </a:r>
-            <a:r>
-              <a:rPr lang="en-US" altLang="zh-CN" dirty="0"/>
-              <a:t>》</a:t>
-            </a:r>
-            <a:endParaRPr lang="zh-CN" altLang="en-US" dirty="0"/>
-          </a:p>
-        </p:txBody>
-      </p:sp>
-      <p:sp>
-        <p:nvSpPr>
-          <p:cNvPr id="13" name="文本框 12">
-            <a:hlinkClick r:id="rId15"/>
-            <a:extLst>
-              <a:ext uri="{FF2B5EF4-FFF2-40B4-BE49-F238E27FC236}">
-                <a16:creationId xmlns:a16="http://schemas.microsoft.com/office/drawing/2014/main" id="{C13A42D9-6684-BF35-552A-BDAE009DEEE4}"/>
-              </a:ext>
-            </a:extLst>
-          </p:cNvPr>
-          <p:cNvSpPr txBox="1"/>
-          <p:nvPr/>
-        </p:nvSpPr>
-        <p:spPr>
-          <a:xfrm>
-            <a:off x="6733122" y="5394088"/>
-            <a:ext cx="3582453" cy="369332"/>
-          </a:xfrm>
-          <a:prstGeom prst="rect">
-            <a:avLst/>
-          </a:prstGeom>
-          <a:noFill/>
-        </p:spPr>
-        <p:txBody>
-          <a:bodyPr wrap="square">
-            <a:spAutoFit/>
-          </a:bodyPr>
-          <a:lstStyle/>
-          <a:p>
-            <a:r>
-              <a:rPr lang="en-US" altLang="zh-CN" dirty="0"/>
-              <a:t>《</a:t>
-            </a:r>
-            <a:r>
-              <a:rPr lang="zh-CN" altLang="en-US" dirty="0"/>
-              <a:t>穿越恶龙：开局国王献祭公主</a:t>
-            </a:r>
-            <a:r>
-              <a:rPr lang="en-US" altLang="zh-CN" dirty="0"/>
-              <a:t>》</a:t>
-            </a:r>
-            <a:endParaRPr lang="zh-CN" altLang="en-US" dirty="0"/>
-          </a:p>
-        </p:txBody>
-      </p:sp>
-      <p:sp>
-        <p:nvSpPr>
-          <p:cNvPr id="15" name="标题 14">
-            <a:extLst>
-              <a:ext uri="{FF2B5EF4-FFF2-40B4-BE49-F238E27FC236}">
-                <a16:creationId xmlns:a16="http://schemas.microsoft.com/office/drawing/2014/main" id="{67FC8885-F1FB-5A92-FAC8-EF9D574078A3}"/>
+                <a16:creationId xmlns:a16="http://schemas.microsoft.com/office/drawing/2014/main" id="{908EC3CF-1981-D912-40B2-8A99EDC4E8C3}"/>
               </a:ext>
             </a:extLst>
           </p:cNvPr>
@@ -7705,20 +7716,66 @@
         </p:nvSpPr>
         <p:spPr>
           <a:xfrm>
-            <a:off x="336600" y="204171"/>
-            <a:ext cx="1223260" cy="618490"/>
+            <a:off x="287755" y="390419"/>
+            <a:ext cx="1115684" cy="437515"/>
           </a:xfrm>
         </p:spPr>
         <p:txBody>
           <a:bodyPr>
-            <a:normAutofit/>
+            <a:normAutofit fontScale="90000"/>
           </a:bodyPr>
           <a:lstStyle/>
           <a:p>
             <a:r>
               <a:rPr lang="zh-CN" altLang="en-US" dirty="0"/>
-              <a:t>小说</a:t>
-            </a:r>
+              <a:t>P</a:t>
+            </a:r>
+            <a:r>
+              <a:rPr lang="en-US" altLang="zh-CN" dirty="0"/>
+              <a:t>DF</a:t>
+            </a:r>
+            <a:endParaRPr lang="zh-CN" altLang="en-US" dirty="0"/>
+          </a:p>
+        </p:txBody>
+      </p:sp>
+      <p:sp>
+        <p:nvSpPr>
+          <p:cNvPr id="4" name="文本框 3">
+            <a:hlinkClick r:id="rId11"/>
+            <a:extLst>
+              <a:ext uri="{FF2B5EF4-FFF2-40B4-BE49-F238E27FC236}">
+                <a16:creationId xmlns:a16="http://schemas.microsoft.com/office/drawing/2014/main" id="{837B52E5-09E4-8E2F-6DFE-E914CEC7955C}"/>
+              </a:ext>
+            </a:extLst>
+          </p:cNvPr>
+          <p:cNvSpPr txBox="1"/>
+          <p:nvPr/>
+        </p:nvSpPr>
+        <p:spPr>
+          <a:xfrm>
+            <a:off x="7373838" y="2991485"/>
+            <a:ext cx="3404651" cy="437514"/>
+          </a:xfrm>
+          <a:prstGeom prst="rect">
+            <a:avLst/>
+          </a:prstGeom>
+          <a:noFill/>
+        </p:spPr>
+        <p:txBody>
+          <a:bodyPr wrap="square">
+            <a:noAutofit/>
+          </a:bodyPr>
+          <a:lstStyle/>
+          <a:p>
+            <a:r>
+              <a:rPr lang="en-US" altLang="zh-CN" dirty="0"/>
+              <a:t>GitHub</a:t>
+            </a:r>
+            <a:r>
+              <a:rPr lang="zh-CN" altLang="en-US" dirty="0"/>
+              <a:t>入门与实践完整版</a:t>
+            </a:r>
+            <a:endParaRPr lang="en-US" altLang="zh-CN" dirty="0"/>
           </a:p>
         </p:txBody>
       </p:sp>
@@ -7749,10 +7806,583 @@
       </p:grpSpPr>
       <p:sp>
         <p:nvSpPr>
-          <p:cNvPr id="9" name="标题 14">
+          <p:cNvPr id="5" name="文本框 4">
+            <a:hlinkClick r:id="rId2"/>
+          </p:cNvPr>
+          <p:cNvSpPr txBox="1"/>
+          <p:nvPr/>
+        </p:nvSpPr>
+        <p:spPr>
+          <a:xfrm>
+            <a:off x="1278255" y="1377315"/>
+            <a:ext cx="2352675" cy="368300"/>
+          </a:xfrm>
+          <a:prstGeom prst="rect">
+            <a:avLst/>
+          </a:prstGeom>
+          <a:noFill/>
+        </p:spPr>
+        <p:txBody>
+          <a:bodyPr wrap="square" rtlCol="0">
+            <a:spAutoFit/>
+          </a:bodyPr>
+          <a:lstStyle/>
+          <a:p>
+            <a:r>
+              <a:rPr lang="en-US" altLang="zh-CN" dirty="0"/>
+              <a:t>《</a:t>
+            </a:r>
+            <a:r>
+              <a:rPr lang="zh-CN" altLang="en-US" dirty="0"/>
+              <a:t>万相之王</a:t>
+            </a:r>
+            <a:r>
+              <a:rPr lang="en-US" altLang="zh-CN" dirty="0"/>
+              <a:t>》</a:t>
+            </a:r>
+          </a:p>
+        </p:txBody>
+      </p:sp>
+      <p:sp>
+        <p:nvSpPr>
+          <p:cNvPr id="12" name="文本框 11">
+            <a:hlinkClick r:id="rId3"/>
+          </p:cNvPr>
+          <p:cNvSpPr txBox="1"/>
+          <p:nvPr/>
+        </p:nvSpPr>
+        <p:spPr>
+          <a:xfrm>
+            <a:off x="1278255" y="2064385"/>
+            <a:ext cx="3928745" cy="368300"/>
+          </a:xfrm>
+          <a:prstGeom prst="rect">
+            <a:avLst/>
+          </a:prstGeom>
+          <a:noFill/>
+        </p:spPr>
+        <p:txBody>
+          <a:bodyPr wrap="square">
+            <a:spAutoFit/>
+          </a:bodyPr>
+          <a:lstStyle/>
+          <a:p>
+            <a:r>
+              <a:rPr lang="en-US" altLang="zh-CN" dirty="0"/>
+              <a:t>《</a:t>
+            </a:r>
+            <a:r>
+              <a:rPr lang="zh-CN" altLang="en-US" dirty="0"/>
+              <a:t>轮盘世界</a:t>
+            </a:r>
+            <a:r>
+              <a:rPr lang="en-US" altLang="zh-CN" dirty="0"/>
+              <a:t>》</a:t>
+            </a:r>
+          </a:p>
+        </p:txBody>
+      </p:sp>
+      <p:sp>
+        <p:nvSpPr>
+          <p:cNvPr id="14" name="文本框 13">
+            <a:hlinkClick r:id="rId4"/>
+          </p:cNvPr>
+          <p:cNvSpPr txBox="1"/>
+          <p:nvPr/>
+        </p:nvSpPr>
+        <p:spPr>
+          <a:xfrm>
+            <a:off x="1278255" y="2751455"/>
+            <a:ext cx="3928745" cy="368300"/>
+          </a:xfrm>
+          <a:prstGeom prst="rect">
+            <a:avLst/>
+          </a:prstGeom>
+          <a:noFill/>
+        </p:spPr>
+        <p:txBody>
+          <a:bodyPr wrap="square">
+            <a:spAutoFit/>
+          </a:bodyPr>
+          <a:lstStyle/>
+          <a:p>
+            <a:r>
+              <a:rPr lang="en-US" altLang="zh-CN" dirty="0"/>
+              <a:t>《</a:t>
+            </a:r>
+            <a:r>
+              <a:rPr lang="zh-CN" altLang="en-US" dirty="0"/>
+              <a:t>末世超级小卖部</a:t>
+            </a:r>
+            <a:r>
+              <a:rPr lang="en-US" altLang="zh-CN" dirty="0"/>
+              <a:t>》</a:t>
+            </a:r>
+          </a:p>
+        </p:txBody>
+      </p:sp>
+      <p:sp>
+        <p:nvSpPr>
+          <p:cNvPr id="18" name="文本框 17">
+            <a:hlinkClick r:id="rId5"/>
+          </p:cNvPr>
+          <p:cNvSpPr txBox="1"/>
+          <p:nvPr/>
+        </p:nvSpPr>
+        <p:spPr>
+          <a:xfrm>
+            <a:off x="1278255" y="3438525"/>
+            <a:ext cx="3928745" cy="368300"/>
+          </a:xfrm>
+          <a:prstGeom prst="rect">
+            <a:avLst/>
+          </a:prstGeom>
+          <a:noFill/>
+        </p:spPr>
+        <p:txBody>
+          <a:bodyPr wrap="square">
+            <a:spAutoFit/>
+          </a:bodyPr>
+          <a:lstStyle/>
+          <a:p>
+            <a:r>
+              <a:rPr lang="en-US" altLang="zh-CN" dirty="0"/>
+              <a:t>《</a:t>
+            </a:r>
+            <a:r>
+              <a:rPr lang="zh-CN" altLang="en-US" dirty="0"/>
+              <a:t>末世：我的关键词比别人多一个</a:t>
+            </a:r>
+            <a:r>
+              <a:rPr lang="en-US" altLang="zh-CN" dirty="0"/>
+              <a:t>》</a:t>
+            </a:r>
+            <a:endParaRPr lang="zh-CN" altLang="en-US" dirty="0"/>
+          </a:p>
+        </p:txBody>
+      </p:sp>
+      <p:sp>
+        <p:nvSpPr>
+          <p:cNvPr id="20" name="文本框 19">
+            <a:hlinkClick r:id="rId6"/>
+          </p:cNvPr>
+          <p:cNvSpPr txBox="1"/>
+          <p:nvPr/>
+        </p:nvSpPr>
+        <p:spPr>
+          <a:xfrm>
+            <a:off x="1278255" y="4125595"/>
+            <a:ext cx="3928745" cy="368300"/>
+          </a:xfrm>
+          <a:prstGeom prst="rect">
+            <a:avLst/>
+          </a:prstGeom>
+          <a:noFill/>
+        </p:spPr>
+        <p:txBody>
+          <a:bodyPr wrap="square">
+            <a:spAutoFit/>
+          </a:bodyPr>
+          <a:lstStyle/>
+          <a:p>
+            <a:r>
+              <a:rPr lang="en-US" altLang="zh-CN" dirty="0"/>
+              <a:t>《</a:t>
+            </a:r>
+            <a:r>
+              <a:rPr lang="zh-CN" altLang="en-US" dirty="0"/>
+              <a:t>全球废土：避难所无限升级</a:t>
+            </a:r>
+            <a:r>
+              <a:rPr lang="en-US" altLang="zh-CN" dirty="0"/>
+              <a:t>》</a:t>
+            </a:r>
+            <a:endParaRPr lang="zh-CN" altLang="en-US" dirty="0"/>
+          </a:p>
+        </p:txBody>
+      </p:sp>
+      <p:sp>
+        <p:nvSpPr>
+          <p:cNvPr id="2" name="文本框 1">
+            <a:hlinkClick r:id="rId7" action="ppaction://hlinkfile"/>
+          </p:cNvPr>
+          <p:cNvSpPr txBox="1"/>
+          <p:nvPr/>
+        </p:nvSpPr>
+        <p:spPr>
+          <a:xfrm>
+            <a:off x="1278255" y="4812665"/>
+            <a:ext cx="1571625" cy="314960"/>
+          </a:xfrm>
+          <a:prstGeom prst="rect">
+            <a:avLst/>
+          </a:prstGeom>
+          <a:noFill/>
+        </p:spPr>
+        <p:txBody>
+          <a:bodyPr wrap="square" rtlCol="0">
+            <a:noAutofit/>
+          </a:bodyPr>
+          <a:lstStyle/>
+          <a:p>
+            <a:r>
+              <a:rPr lang="zh-CN" altLang="en-US" dirty="0"/>
+              <a:t>《蛊真人》</a:t>
+            </a:r>
+          </a:p>
+        </p:txBody>
+      </p:sp>
+      <p:sp>
+        <p:nvSpPr>
+          <p:cNvPr id="3" name="文本框 2">
+            <a:hlinkClick r:id="rId8" action="ppaction://hlinkfile"/>
+          </p:cNvPr>
+          <p:cNvSpPr txBox="1"/>
+          <p:nvPr/>
+        </p:nvSpPr>
+        <p:spPr>
+          <a:xfrm>
+            <a:off x="1278255" y="5446395"/>
+            <a:ext cx="3928745" cy="368300"/>
+          </a:xfrm>
+          <a:prstGeom prst="rect">
+            <a:avLst/>
+          </a:prstGeom>
+          <a:noFill/>
+        </p:spPr>
+        <p:txBody>
+          <a:bodyPr wrap="square">
+            <a:spAutoFit/>
+          </a:bodyPr>
+          <a:lstStyle/>
+          <a:p>
+            <a:r>
+              <a:rPr lang="zh-CN" altLang="en-US" dirty="0"/>
+              <a:t>《斗罗大陆II绝世唐门》</a:t>
+            </a:r>
+          </a:p>
+        </p:txBody>
+      </p:sp>
+      <p:sp>
+        <p:nvSpPr>
+          <p:cNvPr id="6" name="文本框 5">
+            <a:hlinkClick r:id="rId9"/>
             <a:extLst>
               <a:ext uri="{FF2B5EF4-FFF2-40B4-BE49-F238E27FC236}">
-                <a16:creationId xmlns:a16="http://schemas.microsoft.com/office/drawing/2014/main" id="{EF8A0758-A02D-98C7-65EA-4C73C17FFCB8}"/>
+                <a16:creationId xmlns:a16="http://schemas.microsoft.com/office/drawing/2014/main" id="{F4FF3375-1005-18D2-8304-774F6BDCCC15}"/>
+              </a:ext>
+            </a:extLst>
+          </p:cNvPr>
+          <p:cNvSpPr txBox="1"/>
+          <p:nvPr/>
+        </p:nvSpPr>
+        <p:spPr>
+          <a:xfrm>
+            <a:off x="6733125" y="1377315"/>
+            <a:ext cx="1827948" cy="368300"/>
+          </a:xfrm>
+          <a:prstGeom prst="rect">
+            <a:avLst/>
+          </a:prstGeom>
+          <a:noFill/>
+        </p:spPr>
+        <p:txBody>
+          <a:bodyPr wrap="square">
+            <a:spAutoFit/>
+          </a:bodyPr>
+          <a:lstStyle/>
+          <a:p>
+            <a:r>
+              <a:rPr lang="en-US" altLang="zh-CN" dirty="0"/>
+              <a:t>《</a:t>
+            </a:r>
+            <a:r>
+              <a:rPr lang="zh-CN" altLang="en-US" dirty="0"/>
+              <a:t>后真相时代</a:t>
+            </a:r>
+            <a:r>
+              <a:rPr lang="en-US" altLang="zh-CN" dirty="0"/>
+              <a:t>》</a:t>
+            </a:r>
+          </a:p>
+        </p:txBody>
+      </p:sp>
+      <p:sp>
+        <p:nvSpPr>
+          <p:cNvPr id="9" name="文本框 8">
+            <a:hlinkClick r:id="rId10"/>
+            <a:extLst>
+              <a:ext uri="{FF2B5EF4-FFF2-40B4-BE49-F238E27FC236}">
+                <a16:creationId xmlns:a16="http://schemas.microsoft.com/office/drawing/2014/main" id="{228052F6-87BB-782A-D720-7AC2231B507C}"/>
+              </a:ext>
+            </a:extLst>
+          </p:cNvPr>
+          <p:cNvSpPr txBox="1"/>
+          <p:nvPr/>
+        </p:nvSpPr>
+        <p:spPr>
+          <a:xfrm>
+            <a:off x="6733124" y="2064385"/>
+            <a:ext cx="3157109" cy="369332"/>
+          </a:xfrm>
+          <a:prstGeom prst="rect">
+            <a:avLst/>
+          </a:prstGeom>
+          <a:noFill/>
+        </p:spPr>
+        <p:txBody>
+          <a:bodyPr wrap="square">
+            <a:spAutoFit/>
+          </a:bodyPr>
+          <a:lstStyle/>
+          <a:p>
+            <a:r>
+              <a:rPr lang="en-US" altLang="zh-CN" dirty="0"/>
+              <a:t>《</a:t>
+            </a:r>
+            <a:r>
+              <a:rPr lang="zh-CN" altLang="en-US" dirty="0"/>
+              <a:t>全球游戏：开局百亿灵能币</a:t>
+            </a:r>
+            <a:r>
+              <a:rPr lang="en-US" altLang="zh-CN" dirty="0"/>
+              <a:t>》</a:t>
+            </a:r>
+            <a:endParaRPr lang="zh-CN" altLang="en-US" dirty="0"/>
+          </a:p>
+        </p:txBody>
+      </p:sp>
+      <p:sp>
+        <p:nvSpPr>
+          <p:cNvPr id="7" name="文本框 6">
+            <a:hlinkClick r:id="rId11"/>
+            <a:extLst>
+              <a:ext uri="{FF2B5EF4-FFF2-40B4-BE49-F238E27FC236}">
+                <a16:creationId xmlns:a16="http://schemas.microsoft.com/office/drawing/2014/main" id="{48947CAC-90CF-38F9-68E9-05B3CC70F0B8}"/>
+              </a:ext>
+            </a:extLst>
+          </p:cNvPr>
+          <p:cNvSpPr txBox="1"/>
+          <p:nvPr/>
+        </p:nvSpPr>
+        <p:spPr>
+          <a:xfrm>
+            <a:off x="6733123" y="2750423"/>
+            <a:ext cx="3157109" cy="369332"/>
+          </a:xfrm>
+          <a:prstGeom prst="rect">
+            <a:avLst/>
+          </a:prstGeom>
+          <a:noFill/>
+        </p:spPr>
+        <p:txBody>
+          <a:bodyPr wrap="square">
+            <a:spAutoFit/>
+          </a:bodyPr>
+          <a:lstStyle/>
+          <a:p>
+            <a:r>
+              <a:rPr lang="en-US" altLang="zh-CN" dirty="0"/>
+              <a:t>《</a:t>
+            </a:r>
+            <a:r>
+              <a:rPr lang="zh-CN" altLang="en-US" dirty="0"/>
+              <a:t>穿成巴比伦暴君的剑</a:t>
+            </a:r>
+            <a:r>
+              <a:rPr lang="en-US" altLang="zh-CN" dirty="0"/>
+              <a:t>》</a:t>
+            </a:r>
+            <a:endParaRPr lang="zh-CN" altLang="en-US" dirty="0"/>
+          </a:p>
+        </p:txBody>
+      </p:sp>
+      <p:sp>
+        <p:nvSpPr>
+          <p:cNvPr id="8" name="文本框 7">
+            <a:hlinkClick r:id="rId12"/>
+            <a:extLst>
+              <a:ext uri="{FF2B5EF4-FFF2-40B4-BE49-F238E27FC236}">
+                <a16:creationId xmlns:a16="http://schemas.microsoft.com/office/drawing/2014/main" id="{4E0BB707-368A-1CA4-14EB-9E21A10CC738}"/>
+              </a:ext>
+            </a:extLst>
+          </p:cNvPr>
+          <p:cNvSpPr txBox="1"/>
+          <p:nvPr/>
+        </p:nvSpPr>
+        <p:spPr>
+          <a:xfrm>
+            <a:off x="6733123" y="3436461"/>
+            <a:ext cx="3157109" cy="369332"/>
+          </a:xfrm>
+          <a:prstGeom prst="rect">
+            <a:avLst/>
+          </a:prstGeom>
+          <a:noFill/>
+        </p:spPr>
+        <p:txBody>
+          <a:bodyPr wrap="square">
+            <a:spAutoFit/>
+          </a:bodyPr>
+          <a:lstStyle/>
+          <a:p>
+            <a:r>
+              <a:rPr lang="en-US" altLang="zh-CN" dirty="0"/>
+              <a:t>《</a:t>
+            </a:r>
+            <a:r>
+              <a:rPr lang="zh-CN" altLang="en-US" dirty="0"/>
+              <a:t>夫人，你马甲又掉了</a:t>
+            </a:r>
+            <a:r>
+              <a:rPr lang="en-US" altLang="zh-CN" dirty="0"/>
+              <a:t>》</a:t>
+            </a:r>
+            <a:endParaRPr lang="zh-CN" altLang="en-US" dirty="0"/>
+          </a:p>
+        </p:txBody>
+      </p:sp>
+      <p:sp>
+        <p:nvSpPr>
+          <p:cNvPr id="10" name="文本框 9">
+            <a:hlinkClick r:id="rId13"/>
+            <a:extLst>
+              <a:ext uri="{FF2B5EF4-FFF2-40B4-BE49-F238E27FC236}">
+                <a16:creationId xmlns:a16="http://schemas.microsoft.com/office/drawing/2014/main" id="{1B7A347A-0A36-4A5F-68A1-B513D14424E7}"/>
+              </a:ext>
+            </a:extLst>
+          </p:cNvPr>
+          <p:cNvSpPr txBox="1"/>
+          <p:nvPr/>
+        </p:nvSpPr>
+        <p:spPr>
+          <a:xfrm>
+            <a:off x="6733123" y="4122499"/>
+            <a:ext cx="3157109" cy="369332"/>
+          </a:xfrm>
+          <a:prstGeom prst="rect">
+            <a:avLst/>
+          </a:prstGeom>
+          <a:noFill/>
+        </p:spPr>
+        <p:txBody>
+          <a:bodyPr wrap="square">
+            <a:spAutoFit/>
+          </a:bodyPr>
+          <a:lstStyle/>
+          <a:p>
+            <a:r>
+              <a:rPr lang="en-US" altLang="zh-CN" dirty="0"/>
+              <a:t>《</a:t>
+            </a:r>
+            <a:r>
+              <a:rPr lang="zh-CN" altLang="en-US" dirty="0"/>
+              <a:t>法老王的猫瘾症</a:t>
+            </a:r>
+            <a:r>
+              <a:rPr lang="en-US" altLang="zh-CN" dirty="0"/>
+              <a:t>》</a:t>
+            </a:r>
+            <a:endParaRPr lang="zh-CN" altLang="en-US" dirty="0"/>
+          </a:p>
+        </p:txBody>
+      </p:sp>
+      <p:sp>
+        <p:nvSpPr>
+          <p:cNvPr id="11" name="文本框 10">
+            <a:hlinkClick r:id="rId14"/>
+            <a:extLst>
+              <a:ext uri="{FF2B5EF4-FFF2-40B4-BE49-F238E27FC236}">
+                <a16:creationId xmlns:a16="http://schemas.microsoft.com/office/drawing/2014/main" id="{06C97A59-3170-BF31-A1AF-D31B3B65F5BD}"/>
+              </a:ext>
+            </a:extLst>
+          </p:cNvPr>
+          <p:cNvSpPr txBox="1"/>
+          <p:nvPr/>
+        </p:nvSpPr>
+        <p:spPr>
+          <a:xfrm>
+            <a:off x="6733122" y="4758293"/>
+            <a:ext cx="3157109" cy="369332"/>
+          </a:xfrm>
+          <a:prstGeom prst="rect">
+            <a:avLst/>
+          </a:prstGeom>
+          <a:noFill/>
+        </p:spPr>
+        <p:txBody>
+          <a:bodyPr wrap="square">
+            <a:spAutoFit/>
+          </a:bodyPr>
+          <a:lstStyle/>
+          <a:p>
+            <a:r>
+              <a:rPr lang="en-US" altLang="zh-CN" dirty="0"/>
+              <a:t>《</a:t>
+            </a:r>
+            <a:r>
+              <a:rPr lang="zh-CN" altLang="en-US" dirty="0"/>
+              <a:t>原神之永恒者</a:t>
+            </a:r>
+            <a:r>
+              <a:rPr lang="en-US" altLang="zh-CN" dirty="0"/>
+              <a:t>》</a:t>
+            </a:r>
+            <a:endParaRPr lang="zh-CN" altLang="en-US" dirty="0"/>
+          </a:p>
+        </p:txBody>
+      </p:sp>
+      <p:sp>
+        <p:nvSpPr>
+          <p:cNvPr id="13" name="文本框 12">
+            <a:hlinkClick r:id="rId15"/>
+            <a:extLst>
+              <a:ext uri="{FF2B5EF4-FFF2-40B4-BE49-F238E27FC236}">
+                <a16:creationId xmlns:a16="http://schemas.microsoft.com/office/drawing/2014/main" id="{C13A42D9-6684-BF35-552A-BDAE009DEEE4}"/>
+              </a:ext>
+            </a:extLst>
+          </p:cNvPr>
+          <p:cNvSpPr txBox="1"/>
+          <p:nvPr/>
+        </p:nvSpPr>
+        <p:spPr>
+          <a:xfrm>
+            <a:off x="6733122" y="5394088"/>
+            <a:ext cx="3582453" cy="369332"/>
+          </a:xfrm>
+          <a:prstGeom prst="rect">
+            <a:avLst/>
+          </a:prstGeom>
+          <a:noFill/>
+        </p:spPr>
+        <p:txBody>
+          <a:bodyPr wrap="square">
+            <a:spAutoFit/>
+          </a:bodyPr>
+          <a:lstStyle/>
+          <a:p>
+            <a:r>
+              <a:rPr lang="en-US" altLang="zh-CN" dirty="0"/>
+              <a:t>《</a:t>
+            </a:r>
+            <a:r>
+              <a:rPr lang="zh-CN" altLang="en-US" dirty="0"/>
+              <a:t>穿越恶龙：开局国王献祭公主</a:t>
+            </a:r>
+            <a:r>
+              <a:rPr lang="en-US" altLang="zh-CN" dirty="0"/>
+              <a:t>》</a:t>
+            </a:r>
+            <a:endParaRPr lang="zh-CN" altLang="en-US" dirty="0"/>
+          </a:p>
+        </p:txBody>
+      </p:sp>
+      <p:sp>
+        <p:nvSpPr>
+          <p:cNvPr id="15" name="标题 14">
+            <a:extLst>
+              <a:ext uri="{FF2B5EF4-FFF2-40B4-BE49-F238E27FC236}">
+                <a16:creationId xmlns:a16="http://schemas.microsoft.com/office/drawing/2014/main" id="{67FC8885-F1FB-5A92-FAC8-EF9D574078A3}"/>
               </a:ext>
             </a:extLst>
           </p:cNvPr>
@@ -7782,100 +8412,7 @@
           </a:p>
         </p:txBody>
       </p:sp>
-      <p:sp>
-        <p:nvSpPr>
-          <p:cNvPr id="10" name="文本框 9">
-            <a:hlinkClick r:id="rId2"/>
-            <a:extLst>
-              <a:ext uri="{FF2B5EF4-FFF2-40B4-BE49-F238E27FC236}">
-                <a16:creationId xmlns:a16="http://schemas.microsoft.com/office/drawing/2014/main" id="{FFB1D901-FB8A-EFC5-2381-1AA7E9DD7EB1}"/>
-              </a:ext>
-            </a:extLst>
-          </p:cNvPr>
-          <p:cNvSpPr txBox="1"/>
-          <p:nvPr/>
-        </p:nvSpPr>
-        <p:spPr>
-          <a:xfrm>
-            <a:off x="1278255" y="1377315"/>
-            <a:ext cx="2890333" cy="369332"/>
-          </a:xfrm>
-          <a:prstGeom prst="rect">
-            <a:avLst/>
-          </a:prstGeom>
-          <a:noFill/>
-        </p:spPr>
-        <p:txBody>
-          <a:bodyPr wrap="square" rtlCol="0">
-            <a:spAutoFit/>
-          </a:bodyPr>
-          <a:lstStyle/>
-          <a:p>
-            <a:r>
-              <a:rPr lang="en-US" altLang="zh-CN" dirty="0"/>
-              <a:t>《</a:t>
-            </a:r>
-            <a:r>
-              <a:rPr lang="zh-CN" altLang="en-US" dirty="0"/>
-              <a:t>规则怪谈：我即怪谈</a:t>
-            </a:r>
-            <a:r>
-              <a:rPr lang="en-US" altLang="zh-CN" dirty="0"/>
-              <a:t>》</a:t>
-            </a:r>
-          </a:p>
-        </p:txBody>
-      </p:sp>
-      <p:sp>
-        <p:nvSpPr>
-          <p:cNvPr id="2" name="文本框 1">
-            <a:hlinkClick r:id="rId3"/>
-            <a:extLst>
-              <a:ext uri="{FF2B5EF4-FFF2-40B4-BE49-F238E27FC236}">
-                <a16:creationId xmlns:a16="http://schemas.microsoft.com/office/drawing/2014/main" id="{CAC7D0B7-D8EB-54FC-4341-BFB8ABEA4CD6}"/>
-              </a:ext>
-            </a:extLst>
-          </p:cNvPr>
-          <p:cNvSpPr txBox="1"/>
-          <p:nvPr/>
-        </p:nvSpPr>
-        <p:spPr>
-          <a:xfrm>
-            <a:off x="1278255" y="2116635"/>
-            <a:ext cx="2890333" cy="369332"/>
-          </a:xfrm>
-          <a:prstGeom prst="rect">
-            <a:avLst/>
-          </a:prstGeom>
-          <a:noFill/>
-        </p:spPr>
-        <p:txBody>
-          <a:bodyPr wrap="square" rtlCol="0">
-            <a:spAutoFit/>
-          </a:bodyPr>
-          <a:lstStyle/>
-          <a:p>
-            <a:r>
-              <a:rPr lang="en-US" altLang="zh-CN" dirty="0"/>
-              <a:t>《</a:t>
-            </a:r>
-            <a:r>
-              <a:rPr lang="zh-CN" altLang="en-US" dirty="0"/>
-              <a:t>重生之我真没想当渣男</a:t>
-            </a:r>
-            <a:r>
-              <a:rPr lang="en-US" altLang="zh-CN" dirty="0"/>
-              <a:t>》</a:t>
-            </a:r>
-          </a:p>
-        </p:txBody>
-      </p:sp>
     </p:spTree>
-    <p:extLst>
-      <p:ext uri="{BB962C8B-B14F-4D97-AF65-F5344CB8AC3E}">
-        <p14:creationId xmlns:p14="http://schemas.microsoft.com/office/powerpoint/2010/main" val="2426126051"/>
-      </p:ext>
-    </p:extLst>
   </p:cSld>
   <p:clrMapOvr>
     <a:masterClrMapping/>
@@ -7902,6 +8439,159 @@
       </p:grpSpPr>
       <p:sp>
         <p:nvSpPr>
+          <p:cNvPr id="9" name="标题 14">
+            <a:extLst>
+              <a:ext uri="{FF2B5EF4-FFF2-40B4-BE49-F238E27FC236}">
+                <a16:creationId xmlns:a16="http://schemas.microsoft.com/office/drawing/2014/main" id="{EF8A0758-A02D-98C7-65EA-4C73C17FFCB8}"/>
+              </a:ext>
+            </a:extLst>
+          </p:cNvPr>
+          <p:cNvSpPr>
+            <a:spLocks noGrp="1"/>
+          </p:cNvSpPr>
+          <p:nvPr>
+            <p:ph type="title"/>
+          </p:nvPr>
+        </p:nvSpPr>
+        <p:spPr>
+          <a:xfrm>
+            <a:off x="336600" y="204171"/>
+            <a:ext cx="1223260" cy="618490"/>
+          </a:xfrm>
+        </p:spPr>
+        <p:txBody>
+          <a:bodyPr>
+            <a:normAutofit/>
+          </a:bodyPr>
+          <a:lstStyle/>
+          <a:p>
+            <a:r>
+              <a:rPr lang="zh-CN" altLang="en-US" dirty="0"/>
+              <a:t>小说</a:t>
+            </a:r>
+          </a:p>
+        </p:txBody>
+      </p:sp>
+      <p:sp>
+        <p:nvSpPr>
+          <p:cNvPr id="10" name="文本框 9">
+            <a:hlinkClick r:id="rId2"/>
+            <a:extLst>
+              <a:ext uri="{FF2B5EF4-FFF2-40B4-BE49-F238E27FC236}">
+                <a16:creationId xmlns:a16="http://schemas.microsoft.com/office/drawing/2014/main" id="{FFB1D901-FB8A-EFC5-2381-1AA7E9DD7EB1}"/>
+              </a:ext>
+            </a:extLst>
+          </p:cNvPr>
+          <p:cNvSpPr txBox="1"/>
+          <p:nvPr/>
+        </p:nvSpPr>
+        <p:spPr>
+          <a:xfrm>
+            <a:off x="1278255" y="1377315"/>
+            <a:ext cx="2890333" cy="369332"/>
+          </a:xfrm>
+          <a:prstGeom prst="rect">
+            <a:avLst/>
+          </a:prstGeom>
+          <a:noFill/>
+        </p:spPr>
+        <p:txBody>
+          <a:bodyPr wrap="square" rtlCol="0">
+            <a:spAutoFit/>
+          </a:bodyPr>
+          <a:lstStyle/>
+          <a:p>
+            <a:r>
+              <a:rPr lang="en-US" altLang="zh-CN" dirty="0"/>
+              <a:t>《</a:t>
+            </a:r>
+            <a:r>
+              <a:rPr lang="zh-CN" altLang="en-US" dirty="0"/>
+              <a:t>规则怪谈：我即怪谈</a:t>
+            </a:r>
+            <a:r>
+              <a:rPr lang="en-US" altLang="zh-CN" dirty="0"/>
+              <a:t>》</a:t>
+            </a:r>
+          </a:p>
+        </p:txBody>
+      </p:sp>
+      <p:sp>
+        <p:nvSpPr>
+          <p:cNvPr id="2" name="文本框 1">
+            <a:hlinkClick r:id="rId3"/>
+            <a:extLst>
+              <a:ext uri="{FF2B5EF4-FFF2-40B4-BE49-F238E27FC236}">
+                <a16:creationId xmlns:a16="http://schemas.microsoft.com/office/drawing/2014/main" id="{CAC7D0B7-D8EB-54FC-4341-BFB8ABEA4CD6}"/>
+              </a:ext>
+            </a:extLst>
+          </p:cNvPr>
+          <p:cNvSpPr txBox="1"/>
+          <p:nvPr/>
+        </p:nvSpPr>
+        <p:spPr>
+          <a:xfrm>
+            <a:off x="1278255" y="2116635"/>
+            <a:ext cx="2890333" cy="369332"/>
+          </a:xfrm>
+          <a:prstGeom prst="rect">
+            <a:avLst/>
+          </a:prstGeom>
+          <a:noFill/>
+        </p:spPr>
+        <p:txBody>
+          <a:bodyPr wrap="square" rtlCol="0">
+            <a:spAutoFit/>
+          </a:bodyPr>
+          <a:lstStyle/>
+          <a:p>
+            <a:r>
+              <a:rPr lang="en-US" altLang="zh-CN" dirty="0"/>
+              <a:t>《</a:t>
+            </a:r>
+            <a:r>
+              <a:rPr lang="zh-CN" altLang="en-US" dirty="0"/>
+              <a:t>重生之我真没想当渣男</a:t>
+            </a:r>
+            <a:r>
+              <a:rPr lang="en-US" altLang="zh-CN" dirty="0"/>
+              <a:t>》</a:t>
+            </a:r>
+          </a:p>
+        </p:txBody>
+      </p:sp>
+    </p:spTree>
+    <p:extLst>
+      <p:ext uri="{BB962C8B-B14F-4D97-AF65-F5344CB8AC3E}">
+        <p14:creationId xmlns:p14="http://schemas.microsoft.com/office/powerpoint/2010/main" val="2426126051"/>
+      </p:ext>
+    </p:extLst>
+  </p:cSld>
+  <p:clrMapOvr>
+    <a:masterClrMapping/>
+  </p:clrMapOvr>
+</p:sld>
+</file>
+
+<file path=ppt/slides/slide8.xml><?xml version="1.0" encoding="utf-8"?>
+<p:sld xmlns:a="http://schemas.openxmlformats.org/drawingml/2006/main" xmlns:r="http://schemas.openxmlformats.org/officeDocument/2006/relationships" xmlns:p="http://schemas.openxmlformats.org/presentationml/2006/main">
+  <p:cSld>
+    <p:spTree>
+      <p:nvGrpSpPr>
+        <p:cNvPr id="1" name=""/>
+        <p:cNvGrpSpPr/>
+        <p:nvPr/>
+      </p:nvGrpSpPr>
+      <p:grpSpPr>
+        <a:xfrm>
+          <a:off x="0" y="0"/>
+          <a:ext cx="0" cy="0"/>
+          <a:chOff x="0" y="0"/>
+          <a:chExt cx="0" cy="0"/>
+        </a:xfrm>
+      </p:grpSpPr>
+      <p:sp>
+        <p:nvSpPr>
           <p:cNvPr id="5" name="文本框 4">
             <a:hlinkClick r:id="rId2"/>
           </p:cNvPr>
@@ -8967,7 +9657,7 @@
 </p:sld>
 </file>
 
-<file path=ppt/slides/slide8.xml><?xml version="1.0" encoding="utf-8"?>
+<file path=ppt/slides/slide9.xml><?xml version="1.0" encoding="utf-8"?>
 <p:sld xmlns:a="http://schemas.openxmlformats.org/drawingml/2006/main" xmlns:r="http://schemas.openxmlformats.org/officeDocument/2006/relationships" xmlns:p="http://schemas.openxmlformats.org/presentationml/2006/main">
   <p:cSld>
     <p:spTree>
@@ -10058,349 +10748,6 @@
           </p:txBody>
         </p:sp>
       </p:grpSp>
-    </p:spTree>
-  </p:cSld>
-  <p:clrMapOvr>
-    <a:masterClrMapping/>
-  </p:clrMapOvr>
-</p:sld>
-</file>
-
-<file path=ppt/slides/slide9.xml><?xml version="1.0" encoding="utf-8"?>
-<p:sld xmlns:a="http://schemas.openxmlformats.org/drawingml/2006/main" xmlns:r="http://schemas.openxmlformats.org/officeDocument/2006/relationships" xmlns:p="http://schemas.openxmlformats.org/presentationml/2006/main">
-  <p:cSld>
-    <p:spTree>
-      <p:nvGrpSpPr>
-        <p:cNvPr id="1" name=""/>
-        <p:cNvGrpSpPr/>
-        <p:nvPr/>
-      </p:nvGrpSpPr>
-      <p:grpSpPr>
-        <a:xfrm>
-          <a:off x="0" y="0"/>
-          <a:ext cx="0" cy="0"/>
-          <a:chOff x="0" y="0"/>
-          <a:chExt cx="0" cy="0"/>
-        </a:xfrm>
-      </p:grpSpPr>
-      <p:sp>
-        <p:nvSpPr>
-          <p:cNvPr id="4" name="文本框 3"/>
-          <p:cNvSpPr txBox="1"/>
-          <p:nvPr/>
-        </p:nvSpPr>
-        <p:spPr>
-          <a:xfrm>
-            <a:off x="433928" y="372227"/>
-            <a:ext cx="601447" cy="369332"/>
-          </a:xfrm>
-          <a:prstGeom prst="rect">
-            <a:avLst/>
-          </a:prstGeom>
-          <a:noFill/>
-        </p:spPr>
-        <p:txBody>
-          <a:bodyPr wrap="none" rtlCol="0">
-            <a:spAutoFit/>
-          </a:bodyPr>
-          <a:lstStyle/>
-          <a:p>
-            <a:r>
-              <a:rPr lang="en-US" altLang="zh-CN" dirty="0"/>
-              <a:t>Java</a:t>
-            </a:r>
-            <a:endParaRPr lang="zh-CN" altLang="en-US" dirty="0"/>
-          </a:p>
-        </p:txBody>
-      </p:sp>
-      <p:sp>
-        <p:nvSpPr>
-          <p:cNvPr id="9" name="文本框 8">
-            <a:hlinkClick r:id="rId2"/>
-          </p:cNvPr>
-          <p:cNvSpPr txBox="1"/>
-          <p:nvPr/>
-        </p:nvSpPr>
-        <p:spPr>
-          <a:xfrm>
-            <a:off x="534670" y="1030605"/>
-            <a:ext cx="1943735" cy="368300"/>
-          </a:xfrm>
-          <a:prstGeom prst="rect">
-            <a:avLst/>
-          </a:prstGeom>
-          <a:noFill/>
-        </p:spPr>
-        <p:txBody>
-          <a:bodyPr wrap="square">
-            <a:noAutofit/>
-          </a:bodyPr>
-          <a:lstStyle/>
-          <a:p>
-            <a:r>
-              <a:rPr lang="en-US" altLang="zh-CN" dirty="0"/>
-              <a:t>21Java1</a:t>
-            </a:r>
-            <a:endParaRPr lang="zh-CN" altLang="en-US" dirty="0"/>
-          </a:p>
-        </p:txBody>
-      </p:sp>
-      <p:sp>
-        <p:nvSpPr>
-          <p:cNvPr id="18" name="文本框 17">
-            <a:hlinkClick r:id="rId3"/>
-          </p:cNvPr>
-          <p:cNvSpPr txBox="1"/>
-          <p:nvPr/>
-        </p:nvSpPr>
-        <p:spPr>
-          <a:xfrm>
-            <a:off x="534670" y="1687830"/>
-            <a:ext cx="1943735" cy="368300"/>
-          </a:xfrm>
-          <a:prstGeom prst="rect">
-            <a:avLst/>
-          </a:prstGeom>
-          <a:noFill/>
-        </p:spPr>
-        <p:txBody>
-          <a:bodyPr wrap="square">
-            <a:noAutofit/>
-          </a:bodyPr>
-          <a:lstStyle/>
-          <a:p>
-            <a:r>
-              <a:rPr lang="en-US" altLang="zh-CN" dirty="0"/>
-              <a:t>21Java2</a:t>
-            </a:r>
-            <a:endParaRPr lang="zh-CN" altLang="en-US" dirty="0"/>
-          </a:p>
-        </p:txBody>
-      </p:sp>
-      <p:sp>
-        <p:nvSpPr>
-          <p:cNvPr id="19" name="文本框 18">
-            <a:hlinkClick r:id="rId4"/>
-          </p:cNvPr>
-          <p:cNvSpPr txBox="1"/>
-          <p:nvPr/>
-        </p:nvSpPr>
-        <p:spPr>
-          <a:xfrm>
-            <a:off x="534670" y="2345690"/>
-            <a:ext cx="1943735" cy="368300"/>
-          </a:xfrm>
-          <a:prstGeom prst="rect">
-            <a:avLst/>
-          </a:prstGeom>
-          <a:noFill/>
-        </p:spPr>
-        <p:txBody>
-          <a:bodyPr wrap="square">
-            <a:noAutofit/>
-          </a:bodyPr>
-          <a:lstStyle/>
-          <a:p>
-            <a:r>
-              <a:rPr lang="en-US" altLang="zh-CN" dirty="0"/>
-              <a:t>21Java3</a:t>
-            </a:r>
-            <a:endParaRPr lang="zh-CN" altLang="en-US" dirty="0"/>
-          </a:p>
-        </p:txBody>
-      </p:sp>
-      <p:sp>
-        <p:nvSpPr>
-          <p:cNvPr id="23" name="文本框 22">
-            <a:hlinkClick r:id="rId5" action="ppaction://hlinkfile"/>
-          </p:cNvPr>
-          <p:cNvSpPr txBox="1"/>
-          <p:nvPr/>
-        </p:nvSpPr>
-        <p:spPr>
-          <a:xfrm>
-            <a:off x="534670" y="3002915"/>
-            <a:ext cx="1943735" cy="368300"/>
-          </a:xfrm>
-          <a:prstGeom prst="rect">
-            <a:avLst/>
-          </a:prstGeom>
-          <a:noFill/>
-        </p:spPr>
-        <p:txBody>
-          <a:bodyPr wrap="square">
-            <a:noAutofit/>
-          </a:bodyPr>
-          <a:lstStyle/>
-          <a:p>
-            <a:r>
-              <a:rPr lang="en-US" altLang="zh-CN" dirty="0"/>
-              <a:t>EffectiveJava1</a:t>
-            </a:r>
-            <a:endParaRPr lang="zh-CN" altLang="en-US" dirty="0"/>
-          </a:p>
-        </p:txBody>
-      </p:sp>
-      <p:sp>
-        <p:nvSpPr>
-          <p:cNvPr id="24" name="文本框 23">
-            <a:hlinkClick r:id="rId6" action="ppaction://hlinkfile"/>
-          </p:cNvPr>
-          <p:cNvSpPr txBox="1"/>
-          <p:nvPr/>
-        </p:nvSpPr>
-        <p:spPr>
-          <a:xfrm>
-            <a:off x="534670" y="3660775"/>
-            <a:ext cx="1943735" cy="368300"/>
-          </a:xfrm>
-          <a:prstGeom prst="rect">
-            <a:avLst/>
-          </a:prstGeom>
-          <a:noFill/>
-        </p:spPr>
-        <p:txBody>
-          <a:bodyPr wrap="square">
-            <a:noAutofit/>
-          </a:bodyPr>
-          <a:lstStyle/>
-          <a:p>
-            <a:r>
-              <a:rPr lang="en-US" altLang="zh-CN" dirty="0"/>
-              <a:t>EffectiveJava2</a:t>
-            </a:r>
-            <a:endParaRPr lang="zh-CN" altLang="en-US" dirty="0"/>
-          </a:p>
-        </p:txBody>
-      </p:sp>
-      <p:sp>
-        <p:nvSpPr>
-          <p:cNvPr id="25" name="文本框 24">
-            <a:hlinkClick r:id="rId7" action="ppaction://hlinkfile"/>
-          </p:cNvPr>
-          <p:cNvSpPr txBox="1"/>
-          <p:nvPr/>
-        </p:nvSpPr>
-        <p:spPr>
-          <a:xfrm>
-            <a:off x="534670" y="4318000"/>
-            <a:ext cx="1943735" cy="368300"/>
-          </a:xfrm>
-          <a:prstGeom prst="rect">
-            <a:avLst/>
-          </a:prstGeom>
-          <a:noFill/>
-        </p:spPr>
-        <p:txBody>
-          <a:bodyPr wrap="square">
-            <a:noAutofit/>
-          </a:bodyPr>
-          <a:lstStyle/>
-          <a:p>
-            <a:r>
-              <a:rPr lang="en-US" altLang="zh-CN" dirty="0"/>
-              <a:t>EffectiveJava3</a:t>
-            </a:r>
-            <a:endParaRPr lang="zh-CN" altLang="en-US" dirty="0"/>
-          </a:p>
-        </p:txBody>
-      </p:sp>
-      <p:sp>
-        <p:nvSpPr>
-          <p:cNvPr id="30" name="文本框 29">
-            <a:hlinkClick r:id="rId8" action="ppaction://hlinkfile"/>
-          </p:cNvPr>
-          <p:cNvSpPr txBox="1"/>
-          <p:nvPr/>
-        </p:nvSpPr>
-        <p:spPr>
-          <a:xfrm>
-            <a:off x="4507580" y="1030605"/>
-            <a:ext cx="1943735" cy="368300"/>
-          </a:xfrm>
-          <a:prstGeom prst="rect">
-            <a:avLst/>
-          </a:prstGeom>
-          <a:noFill/>
-        </p:spPr>
-        <p:txBody>
-          <a:bodyPr wrap="square">
-            <a:noAutofit/>
-          </a:bodyPr>
-          <a:lstStyle/>
-          <a:p>
-            <a:r>
-              <a:rPr lang="en-US" altLang="zh-CN" dirty="0"/>
-              <a:t>HeadFirstJava1</a:t>
-            </a:r>
-            <a:endParaRPr lang="zh-CN" altLang="en-US" dirty="0"/>
-          </a:p>
-        </p:txBody>
-      </p:sp>
-      <p:sp>
-        <p:nvSpPr>
-          <p:cNvPr id="31" name="文本框 30">
-            <a:hlinkClick r:id="rId9" action="ppaction://hlinkfile"/>
-          </p:cNvPr>
-          <p:cNvSpPr txBox="1"/>
-          <p:nvPr/>
-        </p:nvSpPr>
-        <p:spPr>
-          <a:xfrm>
-            <a:off x="4507580" y="1687830"/>
-            <a:ext cx="1943735" cy="368300"/>
-          </a:xfrm>
-          <a:prstGeom prst="rect">
-            <a:avLst/>
-          </a:prstGeom>
-          <a:noFill/>
-        </p:spPr>
-        <p:txBody>
-          <a:bodyPr wrap="square">
-            <a:noAutofit/>
-          </a:bodyPr>
-          <a:lstStyle/>
-          <a:p>
-            <a:r>
-              <a:rPr lang="en-US" altLang="zh-CN" dirty="0"/>
-              <a:t>HeadFirstJava2</a:t>
-            </a:r>
-            <a:endParaRPr lang="zh-CN" altLang="en-US" dirty="0"/>
-          </a:p>
-        </p:txBody>
-      </p:sp>
-      <p:sp>
-        <p:nvSpPr>
-          <p:cNvPr id="32" name="文本框 31">
-            <a:hlinkClick r:id="rId10" action="ppaction://hlinkfile"/>
-          </p:cNvPr>
-          <p:cNvSpPr txBox="1"/>
-          <p:nvPr/>
-        </p:nvSpPr>
-        <p:spPr>
-          <a:xfrm>
-            <a:off x="4507580" y="2345690"/>
-            <a:ext cx="1943735" cy="368300"/>
-          </a:xfrm>
-          <a:prstGeom prst="rect">
-            <a:avLst/>
-          </a:prstGeom>
-          <a:noFill/>
-        </p:spPr>
-        <p:txBody>
-          <a:bodyPr wrap="square">
-            <a:noAutofit/>
-          </a:bodyPr>
-          <a:lstStyle/>
-          <a:p>
-            <a:r>
-              <a:rPr lang="en-US" altLang="zh-CN" dirty="0"/>
-              <a:t>HeadFirstJava3</a:t>
-            </a:r>
-            <a:endParaRPr lang="zh-CN" altLang="en-US" dirty="0"/>
-          </a:p>
-        </p:txBody>
-      </p:sp>
     </p:spTree>
   </p:cSld>
   <p:clrMapOvr>

--- a/livefile/livepowerpoint.pptx
+++ b/livefile/livepowerpoint.pptx
@@ -6856,20 +6856,10 @@
           </a:p>
           <a:p>
             <a:r>
-              <a:rPr lang="en-US" altLang="zh-CN" dirty="0" err="1"/>
-              <a:t>i</a:t>
-            </a:r>
-            <a:r>
-              <a:rPr lang="en-US" altLang="zh-CN" dirty="0" err="1">
-                <a:hlinkClick r:id="rId2"/>
-              </a:rPr>
-              <a:t>Issues</a:t>
-            </a:r>
-            <a:r>
               <a:rPr lang="en-US" altLang="zh-CN" dirty="0">
                 <a:hlinkClick r:id="rId2"/>
               </a:rPr>
-              <a:t> · Bukehi/BukehiWeb (github.com)</a:t>
+              <a:t>Issues · Bukehi/BukehiWeb (github.com)</a:t>
             </a:r>
             <a:r>
               <a:rPr lang="zh-CN" altLang="en-US" dirty="0"/>
@@ -6909,10 +6899,10 @@
           <a:p>
             <a:r>
               <a:rPr lang="zh-CN" altLang="en-US" sz="3200" dirty="0"/>
-              <a:t>本内容有</a:t>
-            </a:r>
-            <a:r>
-              <a:rPr lang="en-US" altLang="zh-CN" sz="4800" dirty="0"/>
+              <a:t>本内容由</a:t>
+            </a:r>
+            <a:r>
+              <a:rPr lang="en-US" altLang="zh-CN" sz="4800" dirty="0" err="1"/>
               <a:t>Bukehi</a:t>
             </a:r>
             <a:r>
@@ -8590,914 +8580,315 @@
           <a:chExt cx="0" cy="0"/>
         </a:xfrm>
       </p:grpSpPr>
-      <p:sp>
-        <p:nvSpPr>
-          <p:cNvPr id="5" name="文本框 4">
-            <a:hlinkClick r:id="rId2"/>
+      <p:grpSp>
+        <p:nvGrpSpPr>
+          <p:cNvPr id="36" name="组合 35">
+            <a:extLst>
+              <a:ext uri="{FF2B5EF4-FFF2-40B4-BE49-F238E27FC236}">
+                <a16:creationId xmlns:a16="http://schemas.microsoft.com/office/drawing/2014/main" id="{2C1025FC-7DEB-A5BC-5A0B-A656CEF160ED}"/>
+              </a:ext>
+            </a:extLst>
           </p:cNvPr>
-          <p:cNvSpPr txBox="1"/>
+          <p:cNvGrpSpPr/>
           <p:nvPr/>
-        </p:nvSpPr>
-        <p:spPr>
+        </p:nvGrpSpPr>
+        <p:grpSpPr>
           <a:xfrm>
             <a:off x="1312565" y="1417123"/>
-            <a:ext cx="551754" cy="369332"/>
-          </a:xfrm>
-          <a:prstGeom prst="rect">
-            <a:avLst/>
-          </a:prstGeom>
-          <a:noFill/>
-        </p:spPr>
-        <p:txBody>
-          <a:bodyPr wrap="none" rtlCol="0">
-            <a:spAutoFit/>
-          </a:bodyPr>
-          <a:lstStyle/>
-          <a:p>
-            <a:r>
-              <a:rPr lang="en-US" altLang="zh-CN" dirty="0"/>
-              <a:t>en1</a:t>
-            </a:r>
-            <a:endParaRPr lang="zh-CN" altLang="en-US" dirty="0"/>
-          </a:p>
-        </p:txBody>
-      </p:sp>
-      <p:sp>
-        <p:nvSpPr>
-          <p:cNvPr id="6" name="文本框 5">
-            <a:hlinkClick r:id="rId3" action="ppaction://hlinkfile"/>
-          </p:cNvPr>
-          <p:cNvSpPr txBox="1"/>
-          <p:nvPr/>
-        </p:nvSpPr>
-        <p:spPr>
-          <a:xfrm>
-            <a:off x="1312565" y="1965564"/>
-            <a:ext cx="551754" cy="369332"/>
-          </a:xfrm>
-          <a:prstGeom prst="rect">
-            <a:avLst/>
-          </a:prstGeom>
-          <a:noFill/>
-        </p:spPr>
-        <p:txBody>
-          <a:bodyPr wrap="none" rtlCol="0">
-            <a:spAutoFit/>
-          </a:bodyPr>
-          <a:lstStyle/>
-          <a:p>
-            <a:r>
-              <a:rPr lang="en-US" altLang="zh-CN" dirty="0"/>
-              <a:t>en2</a:t>
-            </a:r>
-            <a:endParaRPr lang="zh-CN" altLang="en-US" dirty="0"/>
-          </a:p>
-        </p:txBody>
-      </p:sp>
-      <p:sp>
-        <p:nvSpPr>
-          <p:cNvPr id="7" name="文本框 6">
-            <a:hlinkClick r:id="rId4" action="ppaction://hlinkfile"/>
-          </p:cNvPr>
-          <p:cNvSpPr txBox="1"/>
-          <p:nvPr/>
-        </p:nvSpPr>
-        <p:spPr>
-          <a:xfrm>
-            <a:off x="1312565" y="2514005"/>
-            <a:ext cx="551754" cy="369332"/>
-          </a:xfrm>
-          <a:prstGeom prst="rect">
-            <a:avLst/>
-          </a:prstGeom>
-          <a:noFill/>
-        </p:spPr>
-        <p:txBody>
-          <a:bodyPr wrap="none" rtlCol="0">
-            <a:spAutoFit/>
-          </a:bodyPr>
-          <a:lstStyle/>
-          <a:p>
-            <a:r>
-              <a:rPr lang="en-US" altLang="zh-CN" dirty="0"/>
-              <a:t>en3</a:t>
-            </a:r>
-            <a:endParaRPr lang="zh-CN" altLang="en-US" dirty="0"/>
-          </a:p>
-        </p:txBody>
-      </p:sp>
-      <p:sp>
-        <p:nvSpPr>
-          <p:cNvPr id="8" name="文本框 7">
-            <a:hlinkClick r:id="rId5" action="ppaction://hlinkfile"/>
-          </p:cNvPr>
-          <p:cNvSpPr txBox="1"/>
-          <p:nvPr/>
-        </p:nvSpPr>
-        <p:spPr>
-          <a:xfrm>
-            <a:off x="1312565" y="3062446"/>
-            <a:ext cx="1010574" cy="369332"/>
-          </a:xfrm>
-          <a:prstGeom prst="rect">
-            <a:avLst/>
-          </a:prstGeom>
-          <a:noFill/>
-        </p:spPr>
-        <p:txBody>
-          <a:bodyPr wrap="square" rtlCol="0">
-            <a:spAutoFit/>
-          </a:bodyPr>
-          <a:lstStyle/>
-          <a:p>
-            <a:r>
-              <a:rPr lang="en-US" altLang="zh-CN" dirty="0"/>
-              <a:t>zh1</a:t>
-            </a:r>
-            <a:endParaRPr lang="zh-CN" altLang="en-US" dirty="0"/>
-          </a:p>
-        </p:txBody>
-      </p:sp>
-      <p:sp>
-        <p:nvSpPr>
-          <p:cNvPr id="9" name="文本框 8">
-            <a:hlinkClick r:id="rId6" action="ppaction://hlinkfile"/>
-          </p:cNvPr>
-          <p:cNvSpPr txBox="1"/>
-          <p:nvPr/>
-        </p:nvSpPr>
-        <p:spPr>
-          <a:xfrm>
-            <a:off x="1312565" y="3610887"/>
-            <a:ext cx="1010574" cy="369332"/>
-          </a:xfrm>
-          <a:prstGeom prst="rect">
-            <a:avLst/>
-          </a:prstGeom>
-          <a:noFill/>
-        </p:spPr>
-        <p:txBody>
-          <a:bodyPr wrap="square" rtlCol="0">
-            <a:spAutoFit/>
-          </a:bodyPr>
-          <a:lstStyle/>
-          <a:p>
-            <a:r>
-              <a:rPr lang="en-US" altLang="zh-CN" dirty="0"/>
-              <a:t>zh2</a:t>
-            </a:r>
-            <a:endParaRPr lang="zh-CN" altLang="en-US" dirty="0"/>
-          </a:p>
-        </p:txBody>
-      </p:sp>
-      <p:sp>
-        <p:nvSpPr>
-          <p:cNvPr id="10" name="文本框 9">
-            <a:hlinkClick r:id="rId7" action="ppaction://hlinkfile"/>
-          </p:cNvPr>
-          <p:cNvSpPr txBox="1"/>
-          <p:nvPr/>
-        </p:nvSpPr>
-        <p:spPr>
-          <a:xfrm>
-            <a:off x="1312565" y="4159328"/>
-            <a:ext cx="1010574" cy="369332"/>
-          </a:xfrm>
-          <a:prstGeom prst="rect">
-            <a:avLst/>
-          </a:prstGeom>
-          <a:noFill/>
-        </p:spPr>
-        <p:txBody>
-          <a:bodyPr wrap="square" rtlCol="0">
-            <a:spAutoFit/>
-          </a:bodyPr>
-          <a:lstStyle/>
-          <a:p>
-            <a:r>
-              <a:rPr lang="en-US" altLang="zh-CN" dirty="0"/>
-              <a:t>zh3</a:t>
-            </a:r>
-            <a:endParaRPr lang="zh-CN" altLang="en-US" dirty="0"/>
-          </a:p>
-        </p:txBody>
-      </p:sp>
-      <p:sp>
-        <p:nvSpPr>
-          <p:cNvPr id="11" name="文本框 10">
-            <a:hlinkClick r:id="rId8" action="ppaction://hlinkfile"/>
-          </p:cNvPr>
-          <p:cNvSpPr txBox="1"/>
-          <p:nvPr/>
-        </p:nvSpPr>
-        <p:spPr>
-          <a:xfrm>
-            <a:off x="1312565" y="4707769"/>
-            <a:ext cx="1010574" cy="369332"/>
-          </a:xfrm>
-          <a:prstGeom prst="rect">
-            <a:avLst/>
-          </a:prstGeom>
-          <a:noFill/>
-        </p:spPr>
-        <p:txBody>
-          <a:bodyPr wrap="square" rtlCol="0">
-            <a:spAutoFit/>
-          </a:bodyPr>
-          <a:lstStyle/>
-          <a:p>
-            <a:r>
-              <a:rPr lang="en-US" altLang="zh-CN" dirty="0"/>
-              <a:t>ex1</a:t>
-            </a:r>
-            <a:endParaRPr lang="zh-CN" altLang="en-US" dirty="0"/>
-          </a:p>
-        </p:txBody>
-      </p:sp>
-      <p:sp>
-        <p:nvSpPr>
-          <p:cNvPr id="12" name="文本框 11">
-            <a:hlinkClick r:id="rId9" action="ppaction://hlinkfile"/>
-          </p:cNvPr>
-          <p:cNvSpPr txBox="1"/>
-          <p:nvPr/>
-        </p:nvSpPr>
-        <p:spPr>
-          <a:xfrm>
-            <a:off x="1312565" y="5256210"/>
-            <a:ext cx="1010574" cy="369332"/>
-          </a:xfrm>
-          <a:prstGeom prst="rect">
-            <a:avLst/>
-          </a:prstGeom>
-          <a:noFill/>
-        </p:spPr>
-        <p:txBody>
-          <a:bodyPr wrap="square" rtlCol="0">
-            <a:spAutoFit/>
-          </a:bodyPr>
-          <a:lstStyle/>
-          <a:p>
-            <a:r>
-              <a:rPr lang="en-US" altLang="zh-CN" dirty="0"/>
-              <a:t>ex2</a:t>
-            </a:r>
-            <a:endParaRPr lang="zh-CN" altLang="en-US" dirty="0"/>
-          </a:p>
-        </p:txBody>
-      </p:sp>
-      <p:sp>
-        <p:nvSpPr>
-          <p:cNvPr id="13" name="文本框 12">
-            <a:hlinkClick r:id="rId10" action="ppaction://hlinkfile"/>
-          </p:cNvPr>
-          <p:cNvSpPr txBox="1"/>
-          <p:nvPr/>
-        </p:nvSpPr>
-        <p:spPr>
-          <a:xfrm>
-            <a:off x="1312565" y="5804652"/>
-            <a:ext cx="1010574" cy="369332"/>
-          </a:xfrm>
-          <a:prstGeom prst="rect">
-            <a:avLst/>
-          </a:prstGeom>
-          <a:noFill/>
-        </p:spPr>
-        <p:txBody>
-          <a:bodyPr wrap="square" rtlCol="0">
-            <a:spAutoFit/>
-          </a:bodyPr>
-          <a:lstStyle/>
-          <a:p>
-            <a:r>
-              <a:rPr lang="en-US" altLang="zh-CN" dirty="0"/>
-              <a:t>ex3</a:t>
-            </a:r>
-            <a:endParaRPr lang="zh-CN" altLang="en-US" dirty="0"/>
-          </a:p>
-        </p:txBody>
-      </p:sp>
-      <p:sp>
-        <p:nvSpPr>
-          <p:cNvPr id="2" name="文本框 1">
-            <a:hlinkClick r:id="rId11" action="ppaction://hlinkfile"/>
-          </p:cNvPr>
-          <p:cNvSpPr txBox="1"/>
-          <p:nvPr/>
-        </p:nvSpPr>
-        <p:spPr>
-          <a:xfrm>
-            <a:off x="2973651" y="1441321"/>
-            <a:ext cx="699770" cy="368300"/>
-          </a:xfrm>
-          <a:prstGeom prst="rect">
-            <a:avLst/>
-          </a:prstGeom>
-          <a:noFill/>
-        </p:spPr>
-        <p:txBody>
-          <a:bodyPr wrap="square" rtlCol="0">
-            <a:spAutoFit/>
-          </a:bodyPr>
-          <a:lstStyle/>
-          <a:p>
-            <a:r>
-              <a:rPr lang="en-US" altLang="zh-CN" dirty="0"/>
-              <a:t>xc1</a:t>
-            </a:r>
-          </a:p>
-        </p:txBody>
-      </p:sp>
-      <p:sp>
-        <p:nvSpPr>
-          <p:cNvPr id="3" name="文本框 2">
-            <a:hlinkClick r:id="rId12" action="ppaction://hlinkfile"/>
-          </p:cNvPr>
-          <p:cNvSpPr txBox="1"/>
-          <p:nvPr/>
-        </p:nvSpPr>
-        <p:spPr>
-          <a:xfrm>
-            <a:off x="2973651" y="2073247"/>
-            <a:ext cx="700405" cy="368300"/>
-          </a:xfrm>
-          <a:prstGeom prst="rect">
-            <a:avLst/>
-          </a:prstGeom>
-          <a:noFill/>
-        </p:spPr>
-        <p:txBody>
-          <a:bodyPr wrap="square" rtlCol="0">
-            <a:spAutoFit/>
-          </a:bodyPr>
-          <a:lstStyle/>
-          <a:p>
-            <a:r>
-              <a:rPr lang="en-US" altLang="zh-CN"/>
-              <a:t>xc2</a:t>
-            </a:r>
-          </a:p>
-        </p:txBody>
-      </p:sp>
-      <p:sp>
-        <p:nvSpPr>
-          <p:cNvPr id="14" name="文本框 13">
-            <a:hlinkClick r:id="rId13" action="ppaction://hlinkfile"/>
-          </p:cNvPr>
-          <p:cNvSpPr txBox="1"/>
-          <p:nvPr/>
-        </p:nvSpPr>
-        <p:spPr>
-          <a:xfrm>
-            <a:off x="2973651" y="2705173"/>
-            <a:ext cx="795655" cy="368300"/>
-          </a:xfrm>
-          <a:prstGeom prst="rect">
-            <a:avLst/>
-          </a:prstGeom>
-          <a:noFill/>
-        </p:spPr>
-        <p:txBody>
-          <a:bodyPr wrap="square" rtlCol="0">
-            <a:spAutoFit/>
-          </a:bodyPr>
-          <a:lstStyle/>
-          <a:p>
-            <a:r>
-              <a:rPr lang="en-US" altLang="zh-CN"/>
-              <a:t>bs1</a:t>
-            </a:r>
-          </a:p>
-        </p:txBody>
-      </p:sp>
-      <p:sp>
-        <p:nvSpPr>
-          <p:cNvPr id="15" name="文本框 14">
-            <a:hlinkClick r:id="rId14" action="ppaction://hlinkfile"/>
-          </p:cNvPr>
-          <p:cNvSpPr txBox="1"/>
-          <p:nvPr/>
-        </p:nvSpPr>
-        <p:spPr>
-          <a:xfrm>
-            <a:off x="2973651" y="3337099"/>
-            <a:ext cx="795655" cy="368300"/>
-          </a:xfrm>
-          <a:prstGeom prst="rect">
-            <a:avLst/>
-          </a:prstGeom>
-          <a:noFill/>
-        </p:spPr>
-        <p:txBody>
-          <a:bodyPr wrap="square" rtlCol="0">
-            <a:spAutoFit/>
-          </a:bodyPr>
-          <a:lstStyle/>
-          <a:p>
-            <a:r>
-              <a:rPr lang="en-US" altLang="zh-CN"/>
-              <a:t>bs2</a:t>
-            </a:r>
-          </a:p>
-        </p:txBody>
-      </p:sp>
-      <p:sp>
-        <p:nvSpPr>
-          <p:cNvPr id="16" name="文本框 15">
-            <a:hlinkClick r:id="rId15" action="ppaction://hlinkfile"/>
-          </p:cNvPr>
-          <p:cNvSpPr txBox="1"/>
-          <p:nvPr/>
-        </p:nvSpPr>
-        <p:spPr>
-          <a:xfrm>
-            <a:off x="2973651" y="3969025"/>
-            <a:ext cx="795655" cy="368300"/>
-          </a:xfrm>
-          <a:prstGeom prst="rect">
-            <a:avLst/>
-          </a:prstGeom>
-          <a:noFill/>
-        </p:spPr>
-        <p:txBody>
-          <a:bodyPr wrap="square" rtlCol="0">
-            <a:spAutoFit/>
-          </a:bodyPr>
-          <a:lstStyle/>
-          <a:p>
-            <a:r>
-              <a:rPr lang="en-US" altLang="zh-CN"/>
-              <a:t>cl</a:t>
-            </a:r>
-          </a:p>
-        </p:txBody>
-      </p:sp>
-      <p:sp>
-        <p:nvSpPr>
-          <p:cNvPr id="18" name="文本框 17">
-            <a:hlinkClick r:id="rId16" action="ppaction://hlinkfile"/>
-          </p:cNvPr>
-          <p:cNvSpPr txBox="1"/>
-          <p:nvPr/>
-        </p:nvSpPr>
-        <p:spPr>
-          <a:xfrm>
-            <a:off x="6552869" y="1417123"/>
-            <a:ext cx="700405" cy="368300"/>
-          </a:xfrm>
-          <a:prstGeom prst="rect">
-            <a:avLst/>
-          </a:prstGeom>
-          <a:noFill/>
-        </p:spPr>
-        <p:txBody>
-          <a:bodyPr wrap="square" rtlCol="0">
-            <a:spAutoFit/>
-          </a:bodyPr>
-          <a:lstStyle/>
-          <a:p>
-            <a:r>
-              <a:rPr lang="en-US" altLang="zh-CN" dirty="0"/>
-              <a:t>hy3</a:t>
-            </a:r>
-          </a:p>
-        </p:txBody>
-      </p:sp>
-      <p:sp>
-        <p:nvSpPr>
-          <p:cNvPr id="19" name="文本框 18">
-            <a:hlinkClick r:id="rId17" action="ppaction://hlinkfile"/>
-          </p:cNvPr>
-          <p:cNvSpPr txBox="1"/>
-          <p:nvPr/>
-        </p:nvSpPr>
-        <p:spPr>
-          <a:xfrm>
-            <a:off x="4695136" y="2043872"/>
-            <a:ext cx="700405" cy="368300"/>
-          </a:xfrm>
-          <a:prstGeom prst="rect">
-            <a:avLst/>
-          </a:prstGeom>
-          <a:noFill/>
-        </p:spPr>
-        <p:txBody>
-          <a:bodyPr wrap="square" rtlCol="0">
-            <a:spAutoFit/>
-          </a:bodyPr>
-          <a:lstStyle/>
-          <a:p>
-            <a:r>
-              <a:rPr lang="en-US" altLang="zh-CN" dirty="0"/>
-              <a:t>hy2</a:t>
-            </a:r>
-          </a:p>
-        </p:txBody>
-      </p:sp>
-      <p:sp>
-        <p:nvSpPr>
-          <p:cNvPr id="20" name="文本框 19">
-            <a:hlinkClick r:id="rId18" action="ppaction://hlinkfile"/>
-          </p:cNvPr>
-          <p:cNvSpPr txBox="1"/>
-          <p:nvPr/>
-        </p:nvSpPr>
-        <p:spPr>
-          <a:xfrm>
-            <a:off x="4695136" y="1442591"/>
-            <a:ext cx="700405" cy="368300"/>
-          </a:xfrm>
-          <a:prstGeom prst="rect">
-            <a:avLst/>
-          </a:prstGeom>
-          <a:noFill/>
-        </p:spPr>
-        <p:txBody>
-          <a:bodyPr wrap="square" rtlCol="0">
-            <a:spAutoFit/>
-          </a:bodyPr>
-          <a:lstStyle/>
-          <a:p>
-            <a:r>
-              <a:rPr lang="en-US" altLang="zh-CN" dirty="0"/>
-              <a:t>hy1</a:t>
-            </a:r>
-          </a:p>
-        </p:txBody>
-      </p:sp>
-      <p:sp>
-        <p:nvSpPr>
-          <p:cNvPr id="17" name="文本框 16">
-            <a:hlinkClick r:id="rId19" action="ppaction://hlinkfile"/>
-          </p:cNvPr>
-          <p:cNvSpPr txBox="1"/>
-          <p:nvPr/>
-        </p:nvSpPr>
-        <p:spPr>
-          <a:xfrm>
-            <a:off x="4695136" y="2645153"/>
-            <a:ext cx="795655" cy="368300"/>
-          </a:xfrm>
-          <a:prstGeom prst="rect">
-            <a:avLst/>
-          </a:prstGeom>
-          <a:noFill/>
-        </p:spPr>
-        <p:txBody>
-          <a:bodyPr wrap="square" rtlCol="0">
-            <a:spAutoFit/>
-          </a:bodyPr>
-          <a:lstStyle/>
-          <a:p>
-            <a:r>
-              <a:rPr lang="en-US" altLang="zh-CN"/>
-              <a:t>sr</a:t>
-            </a:r>
-          </a:p>
-        </p:txBody>
-      </p:sp>
-      <p:sp>
-        <p:nvSpPr>
-          <p:cNvPr id="21" name="文本框 20">
-            <a:hlinkClick r:id="rId20" action="ppaction://hlinkfile"/>
-          </p:cNvPr>
-          <p:cNvSpPr txBox="1"/>
-          <p:nvPr/>
-        </p:nvSpPr>
-        <p:spPr>
-          <a:xfrm>
-            <a:off x="4695136" y="3246434"/>
-            <a:ext cx="795655" cy="368300"/>
-          </a:xfrm>
-          <a:prstGeom prst="rect">
-            <a:avLst/>
-          </a:prstGeom>
-          <a:noFill/>
-        </p:spPr>
-        <p:txBody>
-          <a:bodyPr wrap="square" rtlCol="0">
-            <a:spAutoFit/>
-          </a:bodyPr>
-          <a:lstStyle/>
-          <a:p>
-            <a:r>
-              <a:rPr lang="en-US" altLang="zh-CN"/>
-              <a:t>sr1</a:t>
-            </a:r>
-          </a:p>
-        </p:txBody>
-      </p:sp>
-      <p:sp>
-        <p:nvSpPr>
-          <p:cNvPr id="22" name="文本框 21">
-            <a:hlinkClick r:id="rId21" action="ppaction://hlinkfile"/>
-          </p:cNvPr>
-          <p:cNvSpPr txBox="1"/>
-          <p:nvPr/>
-        </p:nvSpPr>
-        <p:spPr>
-          <a:xfrm>
-            <a:off x="4695136" y="3847715"/>
-            <a:ext cx="795655" cy="368300"/>
-          </a:xfrm>
-          <a:prstGeom prst="rect">
-            <a:avLst/>
-          </a:prstGeom>
-          <a:noFill/>
-        </p:spPr>
-        <p:txBody>
-          <a:bodyPr wrap="square" rtlCol="0">
-            <a:spAutoFit/>
-          </a:bodyPr>
-          <a:lstStyle/>
-          <a:p>
-            <a:r>
-              <a:rPr lang="en-US" altLang="zh-CN"/>
-              <a:t>sr2</a:t>
-            </a:r>
-          </a:p>
-        </p:txBody>
-      </p:sp>
-      <p:sp>
-        <p:nvSpPr>
-          <p:cNvPr id="23" name="文本框 22">
-            <a:hlinkClick r:id="rId22" action="ppaction://hlinkfile"/>
-          </p:cNvPr>
-          <p:cNvSpPr txBox="1"/>
-          <p:nvPr/>
-        </p:nvSpPr>
-        <p:spPr>
-          <a:xfrm>
-            <a:off x="4695136" y="4448996"/>
-            <a:ext cx="795655" cy="368300"/>
-          </a:xfrm>
-          <a:prstGeom prst="rect">
-            <a:avLst/>
-          </a:prstGeom>
-          <a:noFill/>
-        </p:spPr>
-        <p:txBody>
-          <a:bodyPr wrap="square" rtlCol="0">
-            <a:spAutoFit/>
-          </a:bodyPr>
-          <a:lstStyle/>
-          <a:p>
-            <a:r>
-              <a:rPr lang="en-US" altLang="zh-CN" dirty="0"/>
-              <a:t>sr3</a:t>
-            </a:r>
-          </a:p>
-        </p:txBody>
-      </p:sp>
-      <p:sp>
-        <p:nvSpPr>
-          <p:cNvPr id="24" name="文本框 23">
-            <a:hlinkClick r:id="rId23" action="ppaction://hlinkfile"/>
-          </p:cNvPr>
-          <p:cNvSpPr txBox="1"/>
-          <p:nvPr/>
-        </p:nvSpPr>
-        <p:spPr>
-          <a:xfrm>
-            <a:off x="4695136" y="5050277"/>
-            <a:ext cx="795655" cy="368300"/>
-          </a:xfrm>
-          <a:prstGeom prst="rect">
-            <a:avLst/>
-          </a:prstGeom>
-          <a:noFill/>
-        </p:spPr>
-        <p:txBody>
-          <a:bodyPr wrap="square" rtlCol="0">
-            <a:spAutoFit/>
-          </a:bodyPr>
-          <a:lstStyle/>
-          <a:p>
-            <a:r>
-              <a:rPr lang="en-US" altLang="zh-CN"/>
-              <a:t>sr4</a:t>
-            </a:r>
-          </a:p>
-        </p:txBody>
-      </p:sp>
-      <p:sp>
-        <p:nvSpPr>
-          <p:cNvPr id="26" name="文本框 25">
-            <a:hlinkClick r:id="rId24" action="ppaction://hlinkfile"/>
-          </p:cNvPr>
-          <p:cNvSpPr txBox="1"/>
-          <p:nvPr/>
-        </p:nvSpPr>
-        <p:spPr>
-          <a:xfrm>
-            <a:off x="6552869" y="2048121"/>
-            <a:ext cx="700405" cy="368300"/>
-          </a:xfrm>
-          <a:prstGeom prst="rect">
-            <a:avLst/>
-          </a:prstGeom>
-          <a:noFill/>
-        </p:spPr>
-        <p:txBody>
-          <a:bodyPr wrap="square" rtlCol="0">
-            <a:spAutoFit/>
-          </a:bodyPr>
-          <a:lstStyle/>
-          <a:p>
-            <a:r>
-              <a:rPr lang="en-US" altLang="zh-CN"/>
-              <a:t>hy4</a:t>
-            </a:r>
-          </a:p>
-        </p:txBody>
-      </p:sp>
-      <p:sp>
-        <p:nvSpPr>
-          <p:cNvPr id="27" name="文本框 26">
-            <a:hlinkClick r:id="rId25" action="ppaction://hlinkfile"/>
-          </p:cNvPr>
-          <p:cNvSpPr txBox="1"/>
-          <p:nvPr/>
-        </p:nvSpPr>
-        <p:spPr>
-          <a:xfrm>
-            <a:off x="6552869" y="2679119"/>
-            <a:ext cx="700405" cy="368300"/>
-          </a:xfrm>
-          <a:prstGeom prst="rect">
-            <a:avLst/>
-          </a:prstGeom>
-          <a:noFill/>
-        </p:spPr>
-        <p:txBody>
-          <a:bodyPr wrap="square" rtlCol="0">
-            <a:spAutoFit/>
-          </a:bodyPr>
-          <a:lstStyle/>
-          <a:p>
-            <a:r>
-              <a:rPr lang="en-US" altLang="zh-CN"/>
-              <a:t>hy5</a:t>
-            </a:r>
-          </a:p>
-        </p:txBody>
-      </p:sp>
-      <p:sp>
-        <p:nvSpPr>
-          <p:cNvPr id="28" name="文本框 27">
-            <a:hlinkClick r:id="rId26" action="ppaction://hlinkfile"/>
-          </p:cNvPr>
-          <p:cNvSpPr txBox="1"/>
-          <p:nvPr/>
-        </p:nvSpPr>
-        <p:spPr>
-          <a:xfrm>
-            <a:off x="3021275" y="4671853"/>
-            <a:ext cx="700405" cy="368300"/>
-          </a:xfrm>
-          <a:prstGeom prst="rect">
-            <a:avLst/>
-          </a:prstGeom>
-          <a:noFill/>
-        </p:spPr>
-        <p:txBody>
-          <a:bodyPr wrap="square" rtlCol="0">
-            <a:spAutoFit/>
-          </a:bodyPr>
-          <a:lstStyle/>
-          <a:p>
-            <a:r>
-              <a:rPr lang="en-US" altLang="zh-CN"/>
-              <a:t>cl2</a:t>
-            </a:r>
-          </a:p>
-        </p:txBody>
-      </p:sp>
-      <p:sp>
-        <p:nvSpPr>
-          <p:cNvPr id="29" name="文本框 28">
-            <a:hlinkClick r:id="rId27" action="ppaction://hlinkfile"/>
-          </p:cNvPr>
-          <p:cNvSpPr txBox="1"/>
-          <p:nvPr/>
-        </p:nvSpPr>
-        <p:spPr>
-          <a:xfrm>
-            <a:off x="6552869" y="3941115"/>
-            <a:ext cx="700405" cy="368300"/>
-          </a:xfrm>
-          <a:prstGeom prst="rect">
-            <a:avLst/>
-          </a:prstGeom>
-          <a:noFill/>
-        </p:spPr>
-        <p:txBody>
-          <a:bodyPr wrap="square" rtlCol="0">
-            <a:spAutoFit/>
-          </a:bodyPr>
-          <a:lstStyle/>
-          <a:p>
-            <a:r>
-              <a:rPr lang="en-US" altLang="zh-CN" dirty="0"/>
-              <a:t>xxsh</a:t>
-            </a:r>
-          </a:p>
-        </p:txBody>
-      </p:sp>
-      <p:sp>
-        <p:nvSpPr>
-          <p:cNvPr id="31" name="文本框 30">
-            <a:hlinkClick r:id="rId28"/>
-          </p:cNvPr>
-          <p:cNvSpPr txBox="1"/>
-          <p:nvPr/>
-        </p:nvSpPr>
-        <p:spPr>
-          <a:xfrm>
-            <a:off x="6552869" y="4572113"/>
-            <a:ext cx="700405" cy="368300"/>
-          </a:xfrm>
-          <a:prstGeom prst="rect">
-            <a:avLst/>
-          </a:prstGeom>
-          <a:noFill/>
-        </p:spPr>
-        <p:txBody>
-          <a:bodyPr wrap="square" rtlCol="0">
-            <a:spAutoFit/>
-          </a:bodyPr>
-          <a:lstStyle/>
-          <a:p>
-            <a:r>
-              <a:rPr lang="en-US" altLang="zh-CN" dirty="0"/>
-              <a:t>cd</a:t>
-            </a:r>
-          </a:p>
-        </p:txBody>
-      </p:sp>
-      <p:sp>
-        <p:nvSpPr>
-          <p:cNvPr id="32" name="文本框 31">
-            <a:hlinkClick r:id="rId29"/>
-          </p:cNvPr>
-          <p:cNvSpPr txBox="1"/>
-          <p:nvPr/>
-        </p:nvSpPr>
-        <p:spPr>
-          <a:xfrm>
-            <a:off x="6552869" y="5203111"/>
-            <a:ext cx="700405" cy="368300"/>
-          </a:xfrm>
-          <a:prstGeom prst="rect">
-            <a:avLst/>
-          </a:prstGeom>
-          <a:noFill/>
-        </p:spPr>
-        <p:txBody>
-          <a:bodyPr wrap="square" rtlCol="0">
-            <a:spAutoFit/>
-          </a:bodyPr>
-          <a:lstStyle/>
-          <a:p>
-            <a:r>
-              <a:rPr lang="en-US" altLang="zh-CN" dirty="0"/>
-              <a:t>mi</a:t>
-            </a:r>
-          </a:p>
-        </p:txBody>
-      </p:sp>
-      <p:sp>
-        <p:nvSpPr>
-          <p:cNvPr id="25" name="文本框 24">
-            <a:hlinkClick r:id="rId30"/>
-          </p:cNvPr>
-          <p:cNvSpPr txBox="1"/>
-          <p:nvPr/>
-        </p:nvSpPr>
-        <p:spPr>
-          <a:xfrm>
-            <a:off x="6552869" y="5834106"/>
-            <a:ext cx="597051" cy="369332"/>
-          </a:xfrm>
-          <a:prstGeom prst="rect">
-            <a:avLst/>
-          </a:prstGeom>
-          <a:noFill/>
-        </p:spPr>
-        <p:txBody>
-          <a:bodyPr wrap="square" rtlCol="0">
-            <a:spAutoFit/>
-          </a:bodyPr>
-          <a:lstStyle/>
-          <a:p>
-            <a:r>
-              <a:rPr lang="en-US" altLang="zh-CN" dirty="0"/>
-              <a:t>mi2</a:t>
-            </a:r>
-          </a:p>
-        </p:txBody>
-      </p:sp>
+            <a:ext cx="1010574" cy="4756861"/>
+            <a:chOff x="1312565" y="1417123"/>
+            <a:chExt cx="1010574" cy="4756861"/>
+          </a:xfrm>
+        </p:grpSpPr>
+        <p:sp>
+          <p:nvSpPr>
+            <p:cNvPr id="5" name="文本框 4">
+              <a:hlinkClick r:id="rId2"/>
+            </p:cNvPr>
+            <p:cNvSpPr txBox="1"/>
+            <p:nvPr/>
+          </p:nvSpPr>
+          <p:spPr>
+            <a:xfrm>
+              <a:off x="1312565" y="1417123"/>
+              <a:ext cx="551754" cy="369332"/>
+            </a:xfrm>
+            <a:prstGeom prst="rect">
+              <a:avLst/>
+            </a:prstGeom>
+            <a:noFill/>
+          </p:spPr>
+          <p:txBody>
+            <a:bodyPr wrap="none" rtlCol="0">
+              <a:spAutoFit/>
+            </a:bodyPr>
+            <a:lstStyle/>
+            <a:p>
+              <a:r>
+                <a:rPr lang="en-US" altLang="zh-CN" dirty="0"/>
+                <a:t>en1</a:t>
+              </a:r>
+              <a:endParaRPr lang="zh-CN" altLang="en-US" dirty="0"/>
+            </a:p>
+          </p:txBody>
+        </p:sp>
+        <p:sp>
+          <p:nvSpPr>
+            <p:cNvPr id="6" name="文本框 5">
+              <a:hlinkClick r:id="rId3" action="ppaction://hlinkfile"/>
+            </p:cNvPr>
+            <p:cNvSpPr txBox="1"/>
+            <p:nvPr/>
+          </p:nvSpPr>
+          <p:spPr>
+            <a:xfrm>
+              <a:off x="1312565" y="1965564"/>
+              <a:ext cx="551754" cy="369332"/>
+            </a:xfrm>
+            <a:prstGeom prst="rect">
+              <a:avLst/>
+            </a:prstGeom>
+            <a:noFill/>
+          </p:spPr>
+          <p:txBody>
+            <a:bodyPr wrap="none" rtlCol="0">
+              <a:spAutoFit/>
+            </a:bodyPr>
+            <a:lstStyle/>
+            <a:p>
+              <a:r>
+                <a:rPr lang="en-US" altLang="zh-CN" dirty="0"/>
+                <a:t>en2</a:t>
+              </a:r>
+              <a:endParaRPr lang="zh-CN" altLang="en-US" dirty="0"/>
+            </a:p>
+          </p:txBody>
+        </p:sp>
+        <p:sp>
+          <p:nvSpPr>
+            <p:cNvPr id="7" name="文本框 6">
+              <a:hlinkClick r:id="rId4" action="ppaction://hlinkfile"/>
+            </p:cNvPr>
+            <p:cNvSpPr txBox="1"/>
+            <p:nvPr/>
+          </p:nvSpPr>
+          <p:spPr>
+            <a:xfrm>
+              <a:off x="1312565" y="2514005"/>
+              <a:ext cx="551754" cy="369332"/>
+            </a:xfrm>
+            <a:prstGeom prst="rect">
+              <a:avLst/>
+            </a:prstGeom>
+            <a:noFill/>
+          </p:spPr>
+          <p:txBody>
+            <a:bodyPr wrap="none" rtlCol="0">
+              <a:spAutoFit/>
+            </a:bodyPr>
+            <a:lstStyle/>
+            <a:p>
+              <a:r>
+                <a:rPr lang="en-US" altLang="zh-CN" dirty="0"/>
+                <a:t>en3</a:t>
+              </a:r>
+              <a:endParaRPr lang="zh-CN" altLang="en-US" dirty="0"/>
+            </a:p>
+          </p:txBody>
+        </p:sp>
+        <p:sp>
+          <p:nvSpPr>
+            <p:cNvPr id="8" name="文本框 7">
+              <a:hlinkClick r:id="rId5" action="ppaction://hlinkfile"/>
+            </p:cNvPr>
+            <p:cNvSpPr txBox="1"/>
+            <p:nvPr/>
+          </p:nvSpPr>
+          <p:spPr>
+            <a:xfrm>
+              <a:off x="1312565" y="3062446"/>
+              <a:ext cx="1010574" cy="369332"/>
+            </a:xfrm>
+            <a:prstGeom prst="rect">
+              <a:avLst/>
+            </a:prstGeom>
+            <a:noFill/>
+          </p:spPr>
+          <p:txBody>
+            <a:bodyPr wrap="square" rtlCol="0">
+              <a:spAutoFit/>
+            </a:bodyPr>
+            <a:lstStyle/>
+            <a:p>
+              <a:r>
+                <a:rPr lang="en-US" altLang="zh-CN" dirty="0"/>
+                <a:t>zh1</a:t>
+              </a:r>
+              <a:endParaRPr lang="zh-CN" altLang="en-US" dirty="0"/>
+            </a:p>
+          </p:txBody>
+        </p:sp>
+        <p:sp>
+          <p:nvSpPr>
+            <p:cNvPr id="9" name="文本框 8">
+              <a:hlinkClick r:id="rId6" action="ppaction://hlinkfile"/>
+            </p:cNvPr>
+            <p:cNvSpPr txBox="1"/>
+            <p:nvPr/>
+          </p:nvSpPr>
+          <p:spPr>
+            <a:xfrm>
+              <a:off x="1312565" y="3610887"/>
+              <a:ext cx="1010574" cy="369332"/>
+            </a:xfrm>
+            <a:prstGeom prst="rect">
+              <a:avLst/>
+            </a:prstGeom>
+            <a:noFill/>
+          </p:spPr>
+          <p:txBody>
+            <a:bodyPr wrap="square" rtlCol="0">
+              <a:spAutoFit/>
+            </a:bodyPr>
+            <a:lstStyle/>
+            <a:p>
+              <a:r>
+                <a:rPr lang="en-US" altLang="zh-CN" dirty="0"/>
+                <a:t>zh2</a:t>
+              </a:r>
+              <a:endParaRPr lang="zh-CN" altLang="en-US" dirty="0"/>
+            </a:p>
+          </p:txBody>
+        </p:sp>
+        <p:sp>
+          <p:nvSpPr>
+            <p:cNvPr id="10" name="文本框 9">
+              <a:hlinkClick r:id="rId7" action="ppaction://hlinkfile"/>
+            </p:cNvPr>
+            <p:cNvSpPr txBox="1"/>
+            <p:nvPr/>
+          </p:nvSpPr>
+          <p:spPr>
+            <a:xfrm>
+              <a:off x="1312565" y="4159328"/>
+              <a:ext cx="1010574" cy="369332"/>
+            </a:xfrm>
+            <a:prstGeom prst="rect">
+              <a:avLst/>
+            </a:prstGeom>
+            <a:noFill/>
+          </p:spPr>
+          <p:txBody>
+            <a:bodyPr wrap="square" rtlCol="0">
+              <a:spAutoFit/>
+            </a:bodyPr>
+            <a:lstStyle/>
+            <a:p>
+              <a:r>
+                <a:rPr lang="en-US" altLang="zh-CN" dirty="0"/>
+                <a:t>zh3</a:t>
+              </a:r>
+              <a:endParaRPr lang="zh-CN" altLang="en-US" dirty="0"/>
+            </a:p>
+          </p:txBody>
+        </p:sp>
+        <p:sp>
+          <p:nvSpPr>
+            <p:cNvPr id="11" name="文本框 10">
+              <a:hlinkClick r:id="rId8" action="ppaction://hlinkfile"/>
+            </p:cNvPr>
+            <p:cNvSpPr txBox="1"/>
+            <p:nvPr/>
+          </p:nvSpPr>
+          <p:spPr>
+            <a:xfrm>
+              <a:off x="1312565" y="4707769"/>
+              <a:ext cx="1010574" cy="369332"/>
+            </a:xfrm>
+            <a:prstGeom prst="rect">
+              <a:avLst/>
+            </a:prstGeom>
+            <a:noFill/>
+          </p:spPr>
+          <p:txBody>
+            <a:bodyPr wrap="square" rtlCol="0">
+              <a:spAutoFit/>
+            </a:bodyPr>
+            <a:lstStyle/>
+            <a:p>
+              <a:r>
+                <a:rPr lang="en-US" altLang="zh-CN" dirty="0"/>
+                <a:t>ex1</a:t>
+              </a:r>
+              <a:endParaRPr lang="zh-CN" altLang="en-US" dirty="0"/>
+            </a:p>
+          </p:txBody>
+        </p:sp>
+        <p:sp>
+          <p:nvSpPr>
+            <p:cNvPr id="12" name="文本框 11">
+              <a:hlinkClick r:id="rId9" action="ppaction://hlinkfile"/>
+            </p:cNvPr>
+            <p:cNvSpPr txBox="1"/>
+            <p:nvPr/>
+          </p:nvSpPr>
+          <p:spPr>
+            <a:xfrm>
+              <a:off x="1312565" y="5256210"/>
+              <a:ext cx="1010574" cy="369332"/>
+            </a:xfrm>
+            <a:prstGeom prst="rect">
+              <a:avLst/>
+            </a:prstGeom>
+            <a:noFill/>
+          </p:spPr>
+          <p:txBody>
+            <a:bodyPr wrap="square" rtlCol="0">
+              <a:spAutoFit/>
+            </a:bodyPr>
+            <a:lstStyle/>
+            <a:p>
+              <a:r>
+                <a:rPr lang="en-US" altLang="zh-CN" dirty="0"/>
+                <a:t>ex2</a:t>
+              </a:r>
+              <a:endParaRPr lang="zh-CN" altLang="en-US" dirty="0"/>
+            </a:p>
+          </p:txBody>
+        </p:sp>
+        <p:sp>
+          <p:nvSpPr>
+            <p:cNvPr id="13" name="文本框 12">
+              <a:hlinkClick r:id="rId10" action="ppaction://hlinkfile"/>
+            </p:cNvPr>
+            <p:cNvSpPr txBox="1"/>
+            <p:nvPr/>
+          </p:nvSpPr>
+          <p:spPr>
+            <a:xfrm>
+              <a:off x="1312565" y="5804652"/>
+              <a:ext cx="1010574" cy="369332"/>
+            </a:xfrm>
+            <a:prstGeom prst="rect">
+              <a:avLst/>
+            </a:prstGeom>
+            <a:noFill/>
+          </p:spPr>
+          <p:txBody>
+            <a:bodyPr wrap="square" rtlCol="0">
+              <a:spAutoFit/>
+            </a:bodyPr>
+            <a:lstStyle/>
+            <a:p>
+              <a:r>
+                <a:rPr lang="en-US" altLang="zh-CN" dirty="0"/>
+                <a:t>ex3</a:t>
+              </a:r>
+              <a:endParaRPr lang="zh-CN" altLang="en-US" dirty="0"/>
+            </a:p>
+          </p:txBody>
+        </p:sp>
+      </p:grpSp>
       <p:sp>
         <p:nvSpPr>
           <p:cNvPr id="4" name="标题 3">
@@ -9541,114 +8932,833 @@
           </a:p>
         </p:txBody>
       </p:sp>
-      <p:sp>
-        <p:nvSpPr>
-          <p:cNvPr id="30" name="文本框 29">
-            <a:hlinkClick r:id="rId31"/>
+      <p:grpSp>
+        <p:nvGrpSpPr>
+          <p:cNvPr id="39" name="组合 38">
             <a:extLst>
               <a:ext uri="{FF2B5EF4-FFF2-40B4-BE49-F238E27FC236}">
-                <a16:creationId xmlns:a16="http://schemas.microsoft.com/office/drawing/2014/main" id="{75105841-626C-2D1E-D830-C480664E005E}"/>
+                <a16:creationId xmlns:a16="http://schemas.microsoft.com/office/drawing/2014/main" id="{61A0F1BF-8A0F-7E9A-11A2-F28384F340DA}"/>
               </a:ext>
             </a:extLst>
           </p:cNvPr>
-          <p:cNvSpPr txBox="1"/>
+          <p:cNvGrpSpPr/>
           <p:nvPr/>
-        </p:nvSpPr>
-        <p:spPr>
-          <a:xfrm>
-            <a:off x="6536518" y="3337099"/>
-            <a:ext cx="872863" cy="369056"/>
-          </a:xfrm>
-          <a:prstGeom prst="rect">
-            <a:avLst/>
-          </a:prstGeom>
-          <a:noFill/>
-        </p:spPr>
-        <p:txBody>
-          <a:bodyPr wrap="square" rtlCol="0">
-            <a:spAutoFit/>
-          </a:bodyPr>
-          <a:lstStyle/>
-          <a:p>
-            <a:r>
-              <a:rPr lang="en-US" altLang="zh-CN" dirty="0"/>
-              <a:t>cl3</a:t>
-            </a:r>
-          </a:p>
-        </p:txBody>
-      </p:sp>
-      <p:sp>
-        <p:nvSpPr>
-          <p:cNvPr id="33" name="文本框 32">
-            <a:hlinkClick r:id="rId32"/>
+        </p:nvGrpSpPr>
+        <p:grpSpPr>
+          <a:xfrm>
+            <a:off x="7421572" y="1417123"/>
+            <a:ext cx="872863" cy="4786315"/>
+            <a:chOff x="6536518" y="1417123"/>
+            <a:chExt cx="872863" cy="4786315"/>
+          </a:xfrm>
+        </p:grpSpPr>
+        <p:sp>
+          <p:nvSpPr>
+            <p:cNvPr id="18" name="文本框 17">
+              <a:hlinkClick r:id="rId11" action="ppaction://hlinkfile"/>
+            </p:cNvPr>
+            <p:cNvSpPr txBox="1"/>
+            <p:nvPr/>
+          </p:nvSpPr>
+          <p:spPr>
+            <a:xfrm>
+              <a:off x="6552869" y="1417123"/>
+              <a:ext cx="700405" cy="368300"/>
+            </a:xfrm>
+            <a:prstGeom prst="rect">
+              <a:avLst/>
+            </a:prstGeom>
+            <a:noFill/>
+          </p:spPr>
+          <p:txBody>
+            <a:bodyPr wrap="square" rtlCol="0">
+              <a:spAutoFit/>
+            </a:bodyPr>
+            <a:lstStyle/>
+            <a:p>
+              <a:r>
+                <a:rPr lang="en-US" altLang="zh-CN" dirty="0"/>
+                <a:t>hy3</a:t>
+              </a:r>
+            </a:p>
+          </p:txBody>
+        </p:sp>
+        <p:sp>
+          <p:nvSpPr>
+            <p:cNvPr id="26" name="文本框 25">
+              <a:hlinkClick r:id="rId12" action="ppaction://hlinkfile"/>
+            </p:cNvPr>
+            <p:cNvSpPr txBox="1"/>
+            <p:nvPr/>
+          </p:nvSpPr>
+          <p:spPr>
+            <a:xfrm>
+              <a:off x="6552869" y="2048121"/>
+              <a:ext cx="700405" cy="368300"/>
+            </a:xfrm>
+            <a:prstGeom prst="rect">
+              <a:avLst/>
+            </a:prstGeom>
+            <a:noFill/>
+          </p:spPr>
+          <p:txBody>
+            <a:bodyPr wrap="square" rtlCol="0">
+              <a:spAutoFit/>
+            </a:bodyPr>
+            <a:lstStyle/>
+            <a:p>
+              <a:r>
+                <a:rPr lang="en-US" altLang="zh-CN"/>
+                <a:t>hy4</a:t>
+              </a:r>
+            </a:p>
+          </p:txBody>
+        </p:sp>
+        <p:sp>
+          <p:nvSpPr>
+            <p:cNvPr id="27" name="文本框 26">
+              <a:hlinkClick r:id="rId13" action="ppaction://hlinkfile"/>
+            </p:cNvPr>
+            <p:cNvSpPr txBox="1"/>
+            <p:nvPr/>
+          </p:nvSpPr>
+          <p:spPr>
+            <a:xfrm>
+              <a:off x="6552869" y="2679119"/>
+              <a:ext cx="700405" cy="368300"/>
+            </a:xfrm>
+            <a:prstGeom prst="rect">
+              <a:avLst/>
+            </a:prstGeom>
+            <a:noFill/>
+          </p:spPr>
+          <p:txBody>
+            <a:bodyPr wrap="square" rtlCol="0">
+              <a:spAutoFit/>
+            </a:bodyPr>
+            <a:lstStyle/>
+            <a:p>
+              <a:r>
+                <a:rPr lang="en-US" altLang="zh-CN"/>
+                <a:t>hy5</a:t>
+              </a:r>
+            </a:p>
+          </p:txBody>
+        </p:sp>
+        <p:sp>
+          <p:nvSpPr>
+            <p:cNvPr id="29" name="文本框 28">
+              <a:hlinkClick r:id="rId14" action="ppaction://hlinkfile"/>
+            </p:cNvPr>
+            <p:cNvSpPr txBox="1"/>
+            <p:nvPr/>
+          </p:nvSpPr>
+          <p:spPr>
+            <a:xfrm>
+              <a:off x="6552869" y="3941115"/>
+              <a:ext cx="700405" cy="368300"/>
+            </a:xfrm>
+            <a:prstGeom prst="rect">
+              <a:avLst/>
+            </a:prstGeom>
+            <a:noFill/>
+          </p:spPr>
+          <p:txBody>
+            <a:bodyPr wrap="square" rtlCol="0">
+              <a:spAutoFit/>
+            </a:bodyPr>
+            <a:lstStyle/>
+            <a:p>
+              <a:r>
+                <a:rPr lang="en-US" altLang="zh-CN" dirty="0"/>
+                <a:t>xxsh</a:t>
+              </a:r>
+            </a:p>
+          </p:txBody>
+        </p:sp>
+        <p:sp>
+          <p:nvSpPr>
+            <p:cNvPr id="31" name="文本框 30">
+              <a:hlinkClick r:id="rId15"/>
+            </p:cNvPr>
+            <p:cNvSpPr txBox="1"/>
+            <p:nvPr/>
+          </p:nvSpPr>
+          <p:spPr>
+            <a:xfrm>
+              <a:off x="6552869" y="4572113"/>
+              <a:ext cx="700405" cy="368300"/>
+            </a:xfrm>
+            <a:prstGeom prst="rect">
+              <a:avLst/>
+            </a:prstGeom>
+            <a:noFill/>
+          </p:spPr>
+          <p:txBody>
+            <a:bodyPr wrap="square" rtlCol="0">
+              <a:spAutoFit/>
+            </a:bodyPr>
+            <a:lstStyle/>
+            <a:p>
+              <a:r>
+                <a:rPr lang="en-US" altLang="zh-CN" dirty="0"/>
+                <a:t>cd</a:t>
+              </a:r>
+            </a:p>
+          </p:txBody>
+        </p:sp>
+        <p:sp>
+          <p:nvSpPr>
+            <p:cNvPr id="32" name="文本框 31">
+              <a:hlinkClick r:id="rId16"/>
+            </p:cNvPr>
+            <p:cNvSpPr txBox="1"/>
+            <p:nvPr/>
+          </p:nvSpPr>
+          <p:spPr>
+            <a:xfrm>
+              <a:off x="6552869" y="5203111"/>
+              <a:ext cx="700405" cy="368300"/>
+            </a:xfrm>
+            <a:prstGeom prst="rect">
+              <a:avLst/>
+            </a:prstGeom>
+            <a:noFill/>
+          </p:spPr>
+          <p:txBody>
+            <a:bodyPr wrap="square" rtlCol="0">
+              <a:spAutoFit/>
+            </a:bodyPr>
+            <a:lstStyle/>
+            <a:p>
+              <a:r>
+                <a:rPr lang="en-US" altLang="zh-CN" dirty="0"/>
+                <a:t>mi</a:t>
+              </a:r>
+            </a:p>
+          </p:txBody>
+        </p:sp>
+        <p:sp>
+          <p:nvSpPr>
+            <p:cNvPr id="25" name="文本框 24">
+              <a:hlinkClick r:id="rId17"/>
+            </p:cNvPr>
+            <p:cNvSpPr txBox="1"/>
+            <p:nvPr/>
+          </p:nvSpPr>
+          <p:spPr>
+            <a:xfrm>
+              <a:off x="6552869" y="5834106"/>
+              <a:ext cx="597051" cy="369332"/>
+            </a:xfrm>
+            <a:prstGeom prst="rect">
+              <a:avLst/>
+            </a:prstGeom>
+            <a:noFill/>
+          </p:spPr>
+          <p:txBody>
+            <a:bodyPr wrap="square" rtlCol="0">
+              <a:spAutoFit/>
+            </a:bodyPr>
+            <a:lstStyle/>
+            <a:p>
+              <a:r>
+                <a:rPr lang="en-US" altLang="zh-CN" dirty="0"/>
+                <a:t>mi2</a:t>
+              </a:r>
+            </a:p>
+          </p:txBody>
+        </p:sp>
+        <p:sp>
+          <p:nvSpPr>
+            <p:cNvPr id="30" name="文本框 29">
+              <a:hlinkClick r:id="rId18"/>
+              <a:extLst>
+                <a:ext uri="{FF2B5EF4-FFF2-40B4-BE49-F238E27FC236}">
+                  <a16:creationId xmlns:a16="http://schemas.microsoft.com/office/drawing/2014/main" id="{75105841-626C-2D1E-D830-C480664E005E}"/>
+                </a:ext>
+              </a:extLst>
+            </p:cNvPr>
+            <p:cNvSpPr txBox="1"/>
+            <p:nvPr/>
+          </p:nvSpPr>
+          <p:spPr>
+            <a:xfrm>
+              <a:off x="6536518" y="3337099"/>
+              <a:ext cx="872863" cy="369056"/>
+            </a:xfrm>
+            <a:prstGeom prst="rect">
+              <a:avLst/>
+            </a:prstGeom>
+            <a:noFill/>
+          </p:spPr>
+          <p:txBody>
+            <a:bodyPr wrap="square" rtlCol="0">
+              <a:spAutoFit/>
+            </a:bodyPr>
+            <a:lstStyle/>
+            <a:p>
+              <a:r>
+                <a:rPr lang="en-US" altLang="zh-CN" dirty="0"/>
+                <a:t>cl3</a:t>
+              </a:r>
+            </a:p>
+          </p:txBody>
+        </p:sp>
+      </p:grpSp>
+      <p:grpSp>
+        <p:nvGrpSpPr>
+          <p:cNvPr id="38" name="组合 37">
             <a:extLst>
               <a:ext uri="{FF2B5EF4-FFF2-40B4-BE49-F238E27FC236}">
-                <a16:creationId xmlns:a16="http://schemas.microsoft.com/office/drawing/2014/main" id="{72D6D9FF-B051-3EC8-2D2C-07F76954C89A}"/>
+                <a16:creationId xmlns:a16="http://schemas.microsoft.com/office/drawing/2014/main" id="{E7D3DDF8-2EEA-598C-ACAA-711E0481880F}"/>
               </a:ext>
             </a:extLst>
           </p:cNvPr>
-          <p:cNvSpPr txBox="1"/>
+          <p:cNvGrpSpPr/>
           <p:nvPr/>
-        </p:nvSpPr>
-        <p:spPr>
-          <a:xfrm>
-            <a:off x="2973651" y="5804652"/>
-            <a:ext cx="795655" cy="369332"/>
-          </a:xfrm>
-          <a:prstGeom prst="rect">
-            <a:avLst/>
-          </a:prstGeom>
-          <a:noFill/>
-        </p:spPr>
-        <p:txBody>
-          <a:bodyPr wrap="square" rtlCol="0">
-            <a:spAutoFit/>
-          </a:bodyPr>
-          <a:lstStyle/>
-          <a:p>
-            <a:r>
-              <a:rPr lang="en-US" altLang="zh-CN" dirty="0"/>
-              <a:t>nszx2</a:t>
-            </a:r>
-          </a:p>
-        </p:txBody>
-      </p:sp>
-      <p:sp>
-        <p:nvSpPr>
-          <p:cNvPr id="34" name="文本框 33">
-            <a:hlinkClick r:id="rId33"/>
+        </p:nvGrpSpPr>
+        <p:grpSpPr>
+          <a:xfrm>
+            <a:off x="5456876" y="1417123"/>
+            <a:ext cx="795655" cy="4577268"/>
+            <a:chOff x="4695136" y="1442591"/>
+            <a:chExt cx="795655" cy="4577268"/>
+          </a:xfrm>
+        </p:grpSpPr>
+        <p:sp>
+          <p:nvSpPr>
+            <p:cNvPr id="19" name="文本框 18">
+              <a:hlinkClick r:id="rId19" action="ppaction://hlinkfile"/>
+            </p:cNvPr>
+            <p:cNvSpPr txBox="1"/>
+            <p:nvPr/>
+          </p:nvSpPr>
+          <p:spPr>
+            <a:xfrm>
+              <a:off x="4695136" y="2043872"/>
+              <a:ext cx="700405" cy="368300"/>
+            </a:xfrm>
+            <a:prstGeom prst="rect">
+              <a:avLst/>
+            </a:prstGeom>
+            <a:noFill/>
+          </p:spPr>
+          <p:txBody>
+            <a:bodyPr wrap="square" rtlCol="0">
+              <a:spAutoFit/>
+            </a:bodyPr>
+            <a:lstStyle/>
+            <a:p>
+              <a:r>
+                <a:rPr lang="en-US" altLang="zh-CN" dirty="0"/>
+                <a:t>hy2</a:t>
+              </a:r>
+            </a:p>
+          </p:txBody>
+        </p:sp>
+        <p:sp>
+          <p:nvSpPr>
+            <p:cNvPr id="20" name="文本框 19">
+              <a:hlinkClick r:id="rId20" action="ppaction://hlinkfile"/>
+            </p:cNvPr>
+            <p:cNvSpPr txBox="1"/>
+            <p:nvPr/>
+          </p:nvSpPr>
+          <p:spPr>
+            <a:xfrm>
+              <a:off x="4695136" y="1442591"/>
+              <a:ext cx="700405" cy="368300"/>
+            </a:xfrm>
+            <a:prstGeom prst="rect">
+              <a:avLst/>
+            </a:prstGeom>
+            <a:noFill/>
+          </p:spPr>
+          <p:txBody>
+            <a:bodyPr wrap="square" rtlCol="0">
+              <a:spAutoFit/>
+            </a:bodyPr>
+            <a:lstStyle/>
+            <a:p>
+              <a:r>
+                <a:rPr lang="en-US" altLang="zh-CN" dirty="0"/>
+                <a:t>hy1</a:t>
+              </a:r>
+            </a:p>
+          </p:txBody>
+        </p:sp>
+        <p:sp>
+          <p:nvSpPr>
+            <p:cNvPr id="17" name="文本框 16">
+              <a:hlinkClick r:id="rId21" action="ppaction://hlinkfile"/>
+            </p:cNvPr>
+            <p:cNvSpPr txBox="1"/>
+            <p:nvPr/>
+          </p:nvSpPr>
+          <p:spPr>
+            <a:xfrm>
+              <a:off x="4695136" y="2645153"/>
+              <a:ext cx="795655" cy="368300"/>
+            </a:xfrm>
+            <a:prstGeom prst="rect">
+              <a:avLst/>
+            </a:prstGeom>
+            <a:noFill/>
+          </p:spPr>
+          <p:txBody>
+            <a:bodyPr wrap="square" rtlCol="0">
+              <a:spAutoFit/>
+            </a:bodyPr>
+            <a:lstStyle/>
+            <a:p>
+              <a:r>
+                <a:rPr lang="en-US" altLang="zh-CN"/>
+                <a:t>sr</a:t>
+              </a:r>
+            </a:p>
+          </p:txBody>
+        </p:sp>
+        <p:sp>
+          <p:nvSpPr>
+            <p:cNvPr id="21" name="文本框 20">
+              <a:hlinkClick r:id="rId22" action="ppaction://hlinkfile"/>
+            </p:cNvPr>
+            <p:cNvSpPr txBox="1"/>
+            <p:nvPr/>
+          </p:nvSpPr>
+          <p:spPr>
+            <a:xfrm>
+              <a:off x="4695136" y="3246434"/>
+              <a:ext cx="795655" cy="368300"/>
+            </a:xfrm>
+            <a:prstGeom prst="rect">
+              <a:avLst/>
+            </a:prstGeom>
+            <a:noFill/>
+          </p:spPr>
+          <p:txBody>
+            <a:bodyPr wrap="square" rtlCol="0">
+              <a:spAutoFit/>
+            </a:bodyPr>
+            <a:lstStyle/>
+            <a:p>
+              <a:r>
+                <a:rPr lang="en-US" altLang="zh-CN"/>
+                <a:t>sr1</a:t>
+              </a:r>
+            </a:p>
+          </p:txBody>
+        </p:sp>
+        <p:sp>
+          <p:nvSpPr>
+            <p:cNvPr id="22" name="文本框 21">
+              <a:hlinkClick r:id="rId23" action="ppaction://hlinkfile"/>
+            </p:cNvPr>
+            <p:cNvSpPr txBox="1"/>
+            <p:nvPr/>
+          </p:nvSpPr>
+          <p:spPr>
+            <a:xfrm>
+              <a:off x="4695136" y="3847715"/>
+              <a:ext cx="795655" cy="368300"/>
+            </a:xfrm>
+            <a:prstGeom prst="rect">
+              <a:avLst/>
+            </a:prstGeom>
+            <a:noFill/>
+          </p:spPr>
+          <p:txBody>
+            <a:bodyPr wrap="square" rtlCol="0">
+              <a:spAutoFit/>
+            </a:bodyPr>
+            <a:lstStyle/>
+            <a:p>
+              <a:r>
+                <a:rPr lang="en-US" altLang="zh-CN"/>
+                <a:t>sr2</a:t>
+              </a:r>
+            </a:p>
+          </p:txBody>
+        </p:sp>
+        <p:sp>
+          <p:nvSpPr>
+            <p:cNvPr id="23" name="文本框 22">
+              <a:hlinkClick r:id="rId24" action="ppaction://hlinkfile"/>
+            </p:cNvPr>
+            <p:cNvSpPr txBox="1"/>
+            <p:nvPr/>
+          </p:nvSpPr>
+          <p:spPr>
+            <a:xfrm>
+              <a:off x="4695136" y="4448996"/>
+              <a:ext cx="795655" cy="368300"/>
+            </a:xfrm>
+            <a:prstGeom prst="rect">
+              <a:avLst/>
+            </a:prstGeom>
+            <a:noFill/>
+          </p:spPr>
+          <p:txBody>
+            <a:bodyPr wrap="square" rtlCol="0">
+              <a:spAutoFit/>
+            </a:bodyPr>
+            <a:lstStyle/>
+            <a:p>
+              <a:r>
+                <a:rPr lang="en-US" altLang="zh-CN" dirty="0"/>
+                <a:t>sr3</a:t>
+              </a:r>
+            </a:p>
+          </p:txBody>
+        </p:sp>
+        <p:sp>
+          <p:nvSpPr>
+            <p:cNvPr id="24" name="文本框 23">
+              <a:hlinkClick r:id="rId25" action="ppaction://hlinkfile"/>
+            </p:cNvPr>
+            <p:cNvSpPr txBox="1"/>
+            <p:nvPr/>
+          </p:nvSpPr>
+          <p:spPr>
+            <a:xfrm>
+              <a:off x="4695136" y="5050277"/>
+              <a:ext cx="795655" cy="368300"/>
+            </a:xfrm>
+            <a:prstGeom prst="rect">
+              <a:avLst/>
+            </a:prstGeom>
+            <a:noFill/>
+          </p:spPr>
+          <p:txBody>
+            <a:bodyPr wrap="square" rtlCol="0">
+              <a:spAutoFit/>
+            </a:bodyPr>
+            <a:lstStyle/>
+            <a:p>
+              <a:r>
+                <a:rPr lang="en-US" altLang="zh-CN"/>
+                <a:t>sr4</a:t>
+              </a:r>
+            </a:p>
+          </p:txBody>
+        </p:sp>
+        <p:sp>
+          <p:nvSpPr>
+            <p:cNvPr id="34" name="文本框 33">
+              <a:hlinkClick r:id="rId26"/>
+              <a:extLst>
+                <a:ext uri="{FF2B5EF4-FFF2-40B4-BE49-F238E27FC236}">
+                  <a16:creationId xmlns:a16="http://schemas.microsoft.com/office/drawing/2014/main" id="{293EE393-C83E-BB5C-E809-5F53D26986E6}"/>
+                </a:ext>
+              </a:extLst>
+            </p:cNvPr>
+            <p:cNvSpPr txBox="1"/>
+            <p:nvPr/>
+          </p:nvSpPr>
+          <p:spPr>
+            <a:xfrm>
+              <a:off x="4695136" y="5651559"/>
+              <a:ext cx="795655" cy="368300"/>
+            </a:xfrm>
+            <a:prstGeom prst="rect">
+              <a:avLst/>
+            </a:prstGeom>
+            <a:noFill/>
+          </p:spPr>
+          <p:txBody>
+            <a:bodyPr wrap="square" rtlCol="0">
+              <a:spAutoFit/>
+            </a:bodyPr>
+            <a:lstStyle/>
+            <a:p>
+              <a:r>
+                <a:rPr lang="en-US" altLang="zh-CN" dirty="0"/>
+                <a:t>sr5</a:t>
+              </a:r>
+            </a:p>
+          </p:txBody>
+        </p:sp>
+      </p:grpSp>
+      <p:grpSp>
+        <p:nvGrpSpPr>
+          <p:cNvPr id="37" name="组合 36">
             <a:extLst>
               <a:ext uri="{FF2B5EF4-FFF2-40B4-BE49-F238E27FC236}">
-                <a16:creationId xmlns:a16="http://schemas.microsoft.com/office/drawing/2014/main" id="{293EE393-C83E-BB5C-E809-5F53D26986E6}"/>
+                <a16:creationId xmlns:a16="http://schemas.microsoft.com/office/drawing/2014/main" id="{00FF15E1-596E-5A56-80B4-4A1A92C2CB88}"/>
               </a:ext>
             </a:extLst>
           </p:cNvPr>
-          <p:cNvSpPr txBox="1"/>
+          <p:cNvGrpSpPr/>
           <p:nvPr/>
-        </p:nvSpPr>
-        <p:spPr>
-          <a:xfrm>
-            <a:off x="4695136" y="5651559"/>
-            <a:ext cx="795655" cy="368300"/>
-          </a:xfrm>
-          <a:prstGeom prst="rect">
-            <a:avLst/>
-          </a:prstGeom>
-          <a:noFill/>
-        </p:spPr>
-        <p:txBody>
-          <a:bodyPr wrap="square" rtlCol="0">
-            <a:spAutoFit/>
-          </a:bodyPr>
-          <a:lstStyle/>
-          <a:p>
-            <a:r>
-              <a:rPr lang="en-US" altLang="zh-CN" dirty="0"/>
-              <a:t>sr5</a:t>
-            </a:r>
-          </a:p>
-        </p:txBody>
-      </p:sp>
+        </p:nvGrpSpPr>
+        <p:grpSpPr>
+          <a:xfrm>
+            <a:off x="3492180" y="1417123"/>
+            <a:ext cx="795655" cy="4732663"/>
+            <a:chOff x="2973651" y="1441321"/>
+            <a:chExt cx="795655" cy="4732663"/>
+          </a:xfrm>
+        </p:grpSpPr>
+        <p:sp>
+          <p:nvSpPr>
+            <p:cNvPr id="2" name="文本框 1">
+              <a:hlinkClick r:id="rId27" action="ppaction://hlinkfile"/>
+            </p:cNvPr>
+            <p:cNvSpPr txBox="1"/>
+            <p:nvPr/>
+          </p:nvSpPr>
+          <p:spPr>
+            <a:xfrm>
+              <a:off x="2973651" y="1441321"/>
+              <a:ext cx="699770" cy="368300"/>
+            </a:xfrm>
+            <a:prstGeom prst="rect">
+              <a:avLst/>
+            </a:prstGeom>
+            <a:noFill/>
+          </p:spPr>
+          <p:txBody>
+            <a:bodyPr wrap="square" rtlCol="0">
+              <a:spAutoFit/>
+            </a:bodyPr>
+            <a:lstStyle/>
+            <a:p>
+              <a:r>
+                <a:rPr lang="en-US" altLang="zh-CN" dirty="0"/>
+                <a:t>xc1</a:t>
+              </a:r>
+            </a:p>
+          </p:txBody>
+        </p:sp>
+        <p:sp>
+          <p:nvSpPr>
+            <p:cNvPr id="3" name="文本框 2">
+              <a:hlinkClick r:id="rId28" action="ppaction://hlinkfile"/>
+            </p:cNvPr>
+            <p:cNvSpPr txBox="1"/>
+            <p:nvPr/>
+          </p:nvSpPr>
+          <p:spPr>
+            <a:xfrm>
+              <a:off x="2973651" y="2064507"/>
+              <a:ext cx="700405" cy="368300"/>
+            </a:xfrm>
+            <a:prstGeom prst="rect">
+              <a:avLst/>
+            </a:prstGeom>
+            <a:noFill/>
+          </p:spPr>
+          <p:txBody>
+            <a:bodyPr wrap="square" rtlCol="0">
+              <a:spAutoFit/>
+            </a:bodyPr>
+            <a:lstStyle/>
+            <a:p>
+              <a:r>
+                <a:rPr lang="en-US" altLang="zh-CN"/>
+                <a:t>xc2</a:t>
+              </a:r>
+            </a:p>
+          </p:txBody>
+        </p:sp>
+        <p:sp>
+          <p:nvSpPr>
+            <p:cNvPr id="14" name="文本框 13">
+              <a:hlinkClick r:id="rId29" action="ppaction://hlinkfile"/>
+            </p:cNvPr>
+            <p:cNvSpPr txBox="1"/>
+            <p:nvPr/>
+          </p:nvSpPr>
+          <p:spPr>
+            <a:xfrm>
+              <a:off x="2973651" y="2687693"/>
+              <a:ext cx="795655" cy="368300"/>
+            </a:xfrm>
+            <a:prstGeom prst="rect">
+              <a:avLst/>
+            </a:prstGeom>
+            <a:noFill/>
+          </p:spPr>
+          <p:txBody>
+            <a:bodyPr wrap="square" rtlCol="0">
+              <a:spAutoFit/>
+            </a:bodyPr>
+            <a:lstStyle/>
+            <a:p>
+              <a:r>
+                <a:rPr lang="en-US" altLang="zh-CN"/>
+                <a:t>bs1</a:t>
+              </a:r>
+            </a:p>
+          </p:txBody>
+        </p:sp>
+        <p:sp>
+          <p:nvSpPr>
+            <p:cNvPr id="15" name="文本框 14">
+              <a:hlinkClick r:id="rId30" action="ppaction://hlinkfile"/>
+            </p:cNvPr>
+            <p:cNvSpPr txBox="1"/>
+            <p:nvPr/>
+          </p:nvSpPr>
+          <p:spPr>
+            <a:xfrm>
+              <a:off x="2973651" y="3310879"/>
+              <a:ext cx="795655" cy="368300"/>
+            </a:xfrm>
+            <a:prstGeom prst="rect">
+              <a:avLst/>
+            </a:prstGeom>
+            <a:noFill/>
+          </p:spPr>
+          <p:txBody>
+            <a:bodyPr wrap="square" rtlCol="0">
+              <a:spAutoFit/>
+            </a:bodyPr>
+            <a:lstStyle/>
+            <a:p>
+              <a:r>
+                <a:rPr lang="en-US" altLang="zh-CN"/>
+                <a:t>bs2</a:t>
+              </a:r>
+            </a:p>
+          </p:txBody>
+        </p:sp>
+        <p:sp>
+          <p:nvSpPr>
+            <p:cNvPr id="16" name="文本框 15">
+              <a:hlinkClick r:id="rId31" action="ppaction://hlinkfile"/>
+            </p:cNvPr>
+            <p:cNvSpPr txBox="1"/>
+            <p:nvPr/>
+          </p:nvSpPr>
+          <p:spPr>
+            <a:xfrm>
+              <a:off x="2973651" y="3934065"/>
+              <a:ext cx="795655" cy="368300"/>
+            </a:xfrm>
+            <a:prstGeom prst="rect">
+              <a:avLst/>
+            </a:prstGeom>
+            <a:noFill/>
+          </p:spPr>
+          <p:txBody>
+            <a:bodyPr wrap="square" rtlCol="0">
+              <a:spAutoFit/>
+            </a:bodyPr>
+            <a:lstStyle/>
+            <a:p>
+              <a:r>
+                <a:rPr lang="en-US" altLang="zh-CN"/>
+                <a:t>cl</a:t>
+              </a:r>
+            </a:p>
+          </p:txBody>
+        </p:sp>
+        <p:sp>
+          <p:nvSpPr>
+            <p:cNvPr id="28" name="文本框 27">
+              <a:hlinkClick r:id="rId32" action="ppaction://hlinkfile"/>
+            </p:cNvPr>
+            <p:cNvSpPr txBox="1"/>
+            <p:nvPr/>
+          </p:nvSpPr>
+          <p:spPr>
+            <a:xfrm>
+              <a:off x="2973651" y="4557251"/>
+              <a:ext cx="700405" cy="368300"/>
+            </a:xfrm>
+            <a:prstGeom prst="rect">
+              <a:avLst/>
+            </a:prstGeom>
+            <a:noFill/>
+          </p:spPr>
+          <p:txBody>
+            <a:bodyPr wrap="square" rtlCol="0">
+              <a:spAutoFit/>
+            </a:bodyPr>
+            <a:lstStyle/>
+            <a:p>
+              <a:r>
+                <a:rPr lang="en-US" altLang="zh-CN"/>
+                <a:t>cl2</a:t>
+              </a:r>
+            </a:p>
+          </p:txBody>
+        </p:sp>
+        <p:sp>
+          <p:nvSpPr>
+            <p:cNvPr id="33" name="文本框 32">
+              <a:hlinkClick r:id="rId33"/>
+              <a:extLst>
+                <a:ext uri="{FF2B5EF4-FFF2-40B4-BE49-F238E27FC236}">
+                  <a16:creationId xmlns:a16="http://schemas.microsoft.com/office/drawing/2014/main" id="{72D6D9FF-B051-3EC8-2D2C-07F76954C89A}"/>
+                </a:ext>
+              </a:extLst>
+            </p:cNvPr>
+            <p:cNvSpPr txBox="1"/>
+            <p:nvPr/>
+          </p:nvSpPr>
+          <p:spPr>
+            <a:xfrm>
+              <a:off x="2973651" y="5804652"/>
+              <a:ext cx="795655" cy="369332"/>
+            </a:xfrm>
+            <a:prstGeom prst="rect">
+              <a:avLst/>
+            </a:prstGeom>
+            <a:noFill/>
+          </p:spPr>
+          <p:txBody>
+            <a:bodyPr wrap="square" rtlCol="0">
+              <a:spAutoFit/>
+            </a:bodyPr>
+            <a:lstStyle/>
+            <a:p>
+              <a:r>
+                <a:rPr lang="en-US" altLang="zh-CN" dirty="0"/>
+                <a:t>nszx2</a:t>
+              </a:r>
+            </a:p>
+          </p:txBody>
+        </p:sp>
+        <p:sp>
+          <p:nvSpPr>
+            <p:cNvPr id="35" name="文本框 34">
+              <a:hlinkClick r:id="rId34"/>
+              <a:extLst>
+                <a:ext uri="{FF2B5EF4-FFF2-40B4-BE49-F238E27FC236}">
+                  <a16:creationId xmlns:a16="http://schemas.microsoft.com/office/drawing/2014/main" id="{0AC25D09-E113-8C36-9F2C-B12A92D23BC2}"/>
+                </a:ext>
+              </a:extLst>
+            </p:cNvPr>
+            <p:cNvSpPr txBox="1"/>
+            <p:nvPr/>
+          </p:nvSpPr>
+          <p:spPr>
+            <a:xfrm>
+              <a:off x="2973651" y="5180437"/>
+              <a:ext cx="795655" cy="369332"/>
+            </a:xfrm>
+            <a:prstGeom prst="rect">
+              <a:avLst/>
+            </a:prstGeom>
+            <a:noFill/>
+          </p:spPr>
+          <p:txBody>
+            <a:bodyPr wrap="square" rtlCol="0">
+              <a:spAutoFit/>
+            </a:bodyPr>
+            <a:lstStyle/>
+            <a:p>
+              <a:r>
+                <a:rPr lang="en-US" altLang="zh-CN" dirty="0"/>
+                <a:t>nszx1</a:t>
+              </a:r>
+            </a:p>
+          </p:txBody>
+        </p:sp>
+      </p:grpSp>
     </p:spTree>
   </p:cSld>
   <p:clrMapOvr>

--- a/livefile/livepowerpoint.pptx
+++ b/livefile/livepowerpoint.pptx
@@ -8934,10 +8934,10 @@
       </p:sp>
       <p:grpSp>
         <p:nvGrpSpPr>
-          <p:cNvPr id="39" name="组合 38">
+          <p:cNvPr id="41" name="组合 40">
             <a:extLst>
               <a:ext uri="{FF2B5EF4-FFF2-40B4-BE49-F238E27FC236}">
-                <a16:creationId xmlns:a16="http://schemas.microsoft.com/office/drawing/2014/main" id="{61A0F1BF-8A0F-7E9A-11A2-F28384F340DA}"/>
+                <a16:creationId xmlns:a16="http://schemas.microsoft.com/office/drawing/2014/main" id="{9492130E-D0B6-6BC3-683F-BA315D5A6523}"/>
               </a:ext>
             </a:extLst>
           </p:cNvPr>
@@ -8946,9 +8946,9 @@
         </p:nvGrpSpPr>
         <p:grpSpPr>
           <a:xfrm>
-            <a:off x="7421572" y="1417123"/>
+            <a:off x="7242835" y="1417123"/>
             <a:ext cx="872863" cy="4786315"/>
-            <a:chOff x="6536518" y="1417123"/>
+            <a:chOff x="7421572" y="1417123"/>
             <a:chExt cx="872863" cy="4786315"/>
           </a:xfrm>
         </p:grpSpPr>
@@ -8962,7 +8962,7 @@
           </p:nvSpPr>
           <p:spPr>
             <a:xfrm>
-              <a:off x="6552869" y="1417123"/>
+              <a:off x="7437923" y="1417123"/>
               <a:ext cx="700405" cy="368300"/>
             </a:xfrm>
             <a:prstGeom prst="rect">
@@ -8993,7 +8993,7 @@
           </p:nvSpPr>
           <p:spPr>
             <a:xfrm>
-              <a:off x="6552869" y="2048121"/>
+              <a:off x="7437923" y="2048121"/>
               <a:ext cx="700405" cy="368300"/>
             </a:xfrm>
             <a:prstGeom prst="rect">
@@ -9024,7 +9024,7 @@
           </p:nvSpPr>
           <p:spPr>
             <a:xfrm>
-              <a:off x="6552869" y="2679119"/>
+              <a:off x="7437923" y="2679119"/>
               <a:ext cx="700405" cy="368300"/>
             </a:xfrm>
             <a:prstGeom prst="rect">
@@ -9055,7 +9055,7 @@
           </p:nvSpPr>
           <p:spPr>
             <a:xfrm>
-              <a:off x="6552869" y="3941115"/>
+              <a:off x="7437923" y="3941115"/>
               <a:ext cx="700405" cy="368300"/>
             </a:xfrm>
             <a:prstGeom prst="rect">
@@ -9086,7 +9086,7 @@
           </p:nvSpPr>
           <p:spPr>
             <a:xfrm>
-              <a:off x="6552869" y="4572113"/>
+              <a:off x="7437923" y="4572113"/>
               <a:ext cx="700405" cy="368300"/>
             </a:xfrm>
             <a:prstGeom prst="rect">
@@ -9117,7 +9117,7 @@
           </p:nvSpPr>
           <p:spPr>
             <a:xfrm>
-              <a:off x="6552869" y="5203111"/>
+              <a:off x="7437923" y="5203111"/>
               <a:ext cx="700405" cy="368300"/>
             </a:xfrm>
             <a:prstGeom prst="rect">
@@ -9148,7 +9148,7 @@
           </p:nvSpPr>
           <p:spPr>
             <a:xfrm>
-              <a:off x="6552869" y="5834106"/>
+              <a:off x="7437923" y="5834106"/>
               <a:ext cx="597051" cy="369332"/>
             </a:xfrm>
             <a:prstGeom prst="rect">
@@ -9184,7 +9184,7 @@
           </p:nvSpPr>
           <p:spPr>
             <a:xfrm>
-              <a:off x="6536518" y="3337099"/>
+              <a:off x="7421572" y="3337099"/>
               <a:ext cx="872863" cy="369056"/>
             </a:xfrm>
             <a:prstGeom prst="rect">
@@ -9206,6 +9206,42 @@
           </p:txBody>
         </p:sp>
       </p:grpSp>
+      <p:sp>
+        <p:nvSpPr>
+          <p:cNvPr id="40" name="文本框 39">
+            <a:hlinkClick r:id="rId19"/>
+            <a:extLst>
+              <a:ext uri="{FF2B5EF4-FFF2-40B4-BE49-F238E27FC236}">
+                <a16:creationId xmlns:a16="http://schemas.microsoft.com/office/drawing/2014/main" id="{BF08BC39-15C9-FF16-D730-1F9F65B532EA}"/>
+              </a:ext>
+            </a:extLst>
+          </p:cNvPr>
+          <p:cNvSpPr txBox="1"/>
+          <p:nvPr/>
+        </p:nvSpPr>
+        <p:spPr>
+          <a:xfrm>
+            <a:off x="9225159" y="1417123"/>
+            <a:ext cx="916368" cy="369332"/>
+          </a:xfrm>
+          <a:prstGeom prst="rect">
+            <a:avLst/>
+          </a:prstGeom>
+          <a:noFill/>
+        </p:spPr>
+        <p:txBody>
+          <a:bodyPr wrap="square" rtlCol="0">
+            <a:spAutoFit/>
+          </a:bodyPr>
+          <a:lstStyle/>
+          <a:p>
+            <a:r>
+              <a:rPr lang="en-US" altLang="zh-CN" dirty="0"/>
+              <a:t>xxsh1</a:t>
+            </a:r>
+          </a:p>
+        </p:txBody>
+      </p:sp>
       <p:grpSp>
         <p:nvGrpSpPr>
           <p:cNvPr id="38" name="组合 37">
@@ -9220,7 +9256,7 @@
         </p:nvGrpSpPr>
         <p:grpSpPr>
           <a:xfrm>
-            <a:off x="5456876" y="1417123"/>
+            <a:off x="5337718" y="1417123"/>
             <a:ext cx="795655" cy="4577268"/>
             <a:chOff x="4695136" y="1442591"/>
             <a:chExt cx="795655" cy="4577268"/>
@@ -9229,7 +9265,7 @@
         <p:sp>
           <p:nvSpPr>
             <p:cNvPr id="19" name="文本框 18">
-              <a:hlinkClick r:id="rId19" action="ppaction://hlinkfile"/>
+              <a:hlinkClick r:id="rId20" action="ppaction://hlinkfile"/>
             </p:cNvPr>
             <p:cNvSpPr txBox="1"/>
             <p:nvPr/>
@@ -9260,7 +9296,7 @@
         <p:sp>
           <p:nvSpPr>
             <p:cNvPr id="20" name="文本框 19">
-              <a:hlinkClick r:id="rId20" action="ppaction://hlinkfile"/>
+              <a:hlinkClick r:id="rId21" action="ppaction://hlinkfile"/>
             </p:cNvPr>
             <p:cNvSpPr txBox="1"/>
             <p:nvPr/>
@@ -9291,7 +9327,7 @@
         <p:sp>
           <p:nvSpPr>
             <p:cNvPr id="17" name="文本框 16">
-              <a:hlinkClick r:id="rId21" action="ppaction://hlinkfile"/>
+              <a:hlinkClick r:id="rId22" action="ppaction://hlinkfile"/>
             </p:cNvPr>
             <p:cNvSpPr txBox="1"/>
             <p:nvPr/>
@@ -9322,7 +9358,7 @@
         <p:sp>
           <p:nvSpPr>
             <p:cNvPr id="21" name="文本框 20">
-              <a:hlinkClick r:id="rId22" action="ppaction://hlinkfile"/>
+              <a:hlinkClick r:id="rId23" action="ppaction://hlinkfile"/>
             </p:cNvPr>
             <p:cNvSpPr txBox="1"/>
             <p:nvPr/>
@@ -9353,7 +9389,7 @@
         <p:sp>
           <p:nvSpPr>
             <p:cNvPr id="22" name="文本框 21">
-              <a:hlinkClick r:id="rId23" action="ppaction://hlinkfile"/>
+              <a:hlinkClick r:id="rId24" action="ppaction://hlinkfile"/>
             </p:cNvPr>
             <p:cNvSpPr txBox="1"/>
             <p:nvPr/>
@@ -9384,7 +9420,7 @@
         <p:sp>
           <p:nvSpPr>
             <p:cNvPr id="23" name="文本框 22">
-              <a:hlinkClick r:id="rId24" action="ppaction://hlinkfile"/>
+              <a:hlinkClick r:id="rId25" action="ppaction://hlinkfile"/>
             </p:cNvPr>
             <p:cNvSpPr txBox="1"/>
             <p:nvPr/>
@@ -9415,7 +9451,7 @@
         <p:sp>
           <p:nvSpPr>
             <p:cNvPr id="24" name="文本框 23">
-              <a:hlinkClick r:id="rId25" action="ppaction://hlinkfile"/>
+              <a:hlinkClick r:id="rId26" action="ppaction://hlinkfile"/>
             </p:cNvPr>
             <p:cNvSpPr txBox="1"/>
             <p:nvPr/>
@@ -9446,7 +9482,7 @@
         <p:sp>
           <p:nvSpPr>
             <p:cNvPr id="34" name="文本框 33">
-              <a:hlinkClick r:id="rId26"/>
+              <a:hlinkClick r:id="rId27"/>
               <a:extLst>
                 <a:ext uri="{FF2B5EF4-FFF2-40B4-BE49-F238E27FC236}">
                   <a16:creationId xmlns:a16="http://schemas.microsoft.com/office/drawing/2014/main" id="{293EE393-C83E-BB5C-E809-5F53D26986E6}"/>
@@ -9494,7 +9530,7 @@
         </p:nvGrpSpPr>
         <p:grpSpPr>
           <a:xfrm>
-            <a:off x="3492180" y="1417123"/>
+            <a:off x="3432601" y="1417123"/>
             <a:ext cx="795655" cy="4732663"/>
             <a:chOff x="2973651" y="1441321"/>
             <a:chExt cx="795655" cy="4732663"/>
@@ -9503,7 +9539,7 @@
         <p:sp>
           <p:nvSpPr>
             <p:cNvPr id="2" name="文本框 1">
-              <a:hlinkClick r:id="rId27" action="ppaction://hlinkfile"/>
+              <a:hlinkClick r:id="rId28" action="ppaction://hlinkfile"/>
             </p:cNvPr>
             <p:cNvSpPr txBox="1"/>
             <p:nvPr/>
@@ -9534,7 +9570,7 @@
         <p:sp>
           <p:nvSpPr>
             <p:cNvPr id="3" name="文本框 2">
-              <a:hlinkClick r:id="rId28" action="ppaction://hlinkfile"/>
+              <a:hlinkClick r:id="rId29" action="ppaction://hlinkfile"/>
             </p:cNvPr>
             <p:cNvSpPr txBox="1"/>
             <p:nvPr/>
@@ -9565,7 +9601,7 @@
         <p:sp>
           <p:nvSpPr>
             <p:cNvPr id="14" name="文本框 13">
-              <a:hlinkClick r:id="rId29" action="ppaction://hlinkfile"/>
+              <a:hlinkClick r:id="rId30" action="ppaction://hlinkfile"/>
             </p:cNvPr>
             <p:cNvSpPr txBox="1"/>
             <p:nvPr/>
@@ -9596,7 +9632,7 @@
         <p:sp>
           <p:nvSpPr>
             <p:cNvPr id="15" name="文本框 14">
-              <a:hlinkClick r:id="rId30" action="ppaction://hlinkfile"/>
+              <a:hlinkClick r:id="rId31" action="ppaction://hlinkfile"/>
             </p:cNvPr>
             <p:cNvSpPr txBox="1"/>
             <p:nvPr/>
@@ -9627,7 +9663,7 @@
         <p:sp>
           <p:nvSpPr>
             <p:cNvPr id="16" name="文本框 15">
-              <a:hlinkClick r:id="rId31" action="ppaction://hlinkfile"/>
+              <a:hlinkClick r:id="rId32" action="ppaction://hlinkfile"/>
             </p:cNvPr>
             <p:cNvSpPr txBox="1"/>
             <p:nvPr/>
@@ -9658,7 +9694,7 @@
         <p:sp>
           <p:nvSpPr>
             <p:cNvPr id="28" name="文本框 27">
-              <a:hlinkClick r:id="rId32" action="ppaction://hlinkfile"/>
+              <a:hlinkClick r:id="rId33" action="ppaction://hlinkfile"/>
             </p:cNvPr>
             <p:cNvSpPr txBox="1"/>
             <p:nvPr/>
@@ -9689,7 +9725,7 @@
         <p:sp>
           <p:nvSpPr>
             <p:cNvPr id="33" name="文本框 32">
-              <a:hlinkClick r:id="rId33"/>
+              <a:hlinkClick r:id="rId34"/>
               <a:extLst>
                 <a:ext uri="{FF2B5EF4-FFF2-40B4-BE49-F238E27FC236}">
                   <a16:creationId xmlns:a16="http://schemas.microsoft.com/office/drawing/2014/main" id="{72D6D9FF-B051-3EC8-2D2C-07F76954C89A}"/>
@@ -9725,7 +9761,7 @@
         <p:sp>
           <p:nvSpPr>
             <p:cNvPr id="35" name="文本框 34">
-              <a:hlinkClick r:id="rId34"/>
+              <a:hlinkClick r:id="rId35"/>
               <a:extLst>
                 <a:ext uri="{FF2B5EF4-FFF2-40B4-BE49-F238E27FC236}">
                   <a16:creationId xmlns:a16="http://schemas.microsoft.com/office/drawing/2014/main" id="{0AC25D09-E113-8C36-9F2C-B12A92D23BC2}"/>
@@ -10328,10 +10364,10 @@
         </p:nvGrpSpPr>
         <p:grpSpPr>
           <a:xfrm>
-            <a:off x="7148194" y="1431632"/>
-            <a:ext cx="700405" cy="4637418"/>
-            <a:chOff x="7148194" y="1431632"/>
-            <a:chExt cx="700405" cy="4637418"/>
+            <a:off x="3337130" y="1431632"/>
+            <a:ext cx="4511469" cy="4637418"/>
+            <a:chOff x="3337130" y="1431632"/>
+            <a:chExt cx="4511469" cy="4637418"/>
           </a:xfrm>
         </p:grpSpPr>
         <p:sp>
@@ -10437,7 +10473,7 @@
           </p:nvSpPr>
           <p:spPr>
             <a:xfrm>
-              <a:off x="7148194" y="3260813"/>
+              <a:off x="3337130" y="4662179"/>
               <a:ext cx="700405" cy="368300"/>
             </a:xfrm>
             <a:prstGeom prst="rect">

--- a/livefile/livepowerpoint.pptx
+++ b/livefile/livepowerpoint.pptx
@@ -209,7 +209,7 @@
           <a:p>
             <a:fld id="{16A2333F-9A84-48D5-897E-B51363C09104}" type="datetimeFigureOut">
               <a:rPr lang="zh-CN" altLang="en-US" smtClean="0"/>
-              <a:t>2024/3/21</a:t>
+              <a:t>2024/3/22</a:t>
             </a:fld>
             <a:endParaRPr lang="zh-CN" altLang="en-US"/>
           </a:p>
@@ -865,7 +865,7 @@
             </a:pPr>
             <a:fld id="{8D7D9A98-2B42-4142-BB4A-011734DDEA85}" type="datetimeFigureOut">
               <a:rPr lang="zh-CN" altLang="en-US"/>
-              <a:t>2024/3/21</a:t>
+              <a:t>2024/3/22</a:t>
             </a:fld>
             <a:endParaRPr lang="zh-CN" altLang="en-US"/>
           </a:p>
@@ -1014,7 +1014,7 @@
             </a:pPr>
             <a:fld id="{12F3D532-36F8-4FDA-B03A-4B8348962AD1}" type="datetime1">
               <a:rPr lang="zh-CN" altLang="en-US"/>
-              <a:t>2024/3/21</a:t>
+              <a:t>2024/3/22</a:t>
             </a:fld>
             <a:endParaRPr lang="zh-CN" altLang="en-US"/>
           </a:p>
@@ -1123,7 +1123,7 @@
           <a:p>
             <a:fld id="{F487EE23-058C-4F57-8869-2B6561E3103C}" type="datetimeFigureOut">
               <a:rPr lang="zh-CN" altLang="en-US" smtClean="0"/>
-              <a:t>2024/3/21</a:t>
+              <a:t>2024/3/22</a:t>
             </a:fld>
             <a:endParaRPr lang="zh-CN" altLang="en-US"/>
           </a:p>
@@ -1379,7 +1379,7 @@
           <a:p>
             <a:fld id="{F487EE23-058C-4F57-8869-2B6561E3103C}" type="datetimeFigureOut">
               <a:rPr lang="zh-CN" altLang="en-US" smtClean="0"/>
-              <a:t>2024/3/21</a:t>
+              <a:t>2024/3/22</a:t>
             </a:fld>
             <a:endParaRPr lang="zh-CN" altLang="en-US"/>
           </a:p>
@@ -1601,7 +1601,7 @@
             </a:pPr>
             <a:fld id="{A293AA06-7DE4-4BE9-9894-758112E5DCC1}" type="datetime1">
               <a:rPr lang="zh-CN" altLang="en-US"/>
-              <a:t>2024/3/21</a:t>
+              <a:t>2024/3/22</a:t>
             </a:fld>
             <a:endParaRPr lang="zh-CN" altLang="en-US"/>
           </a:p>
@@ -1915,7 +1915,7 @@
           <a:p>
             <a:fld id="{F487EE23-058C-4F57-8869-2B6561E3103C}" type="datetimeFigureOut">
               <a:rPr lang="zh-CN" altLang="en-US" smtClean="0"/>
-              <a:t>2024/3/21</a:t>
+              <a:t>2024/3/22</a:t>
             </a:fld>
             <a:endParaRPr lang="zh-CN" altLang="en-US"/>
           </a:p>
@@ -2166,7 +2166,7 @@
             </a:pPr>
             <a:fld id="{BEDED714-68C8-44B6-9732-DDF7DD97772E}" type="datetime1">
               <a:rPr lang="zh-CN" altLang="en-US"/>
-              <a:t>2024/3/21</a:t>
+              <a:t>2024/3/22</a:t>
             </a:fld>
             <a:endParaRPr lang="zh-CN" altLang="en-US"/>
           </a:p>
@@ -2548,7 +2548,7 @@
             </a:pPr>
             <a:fld id="{27A77D59-FE09-433D-B821-9B2BE50A514A}" type="datetime1">
               <a:rPr lang="zh-CN" altLang="en-US"/>
-              <a:t>2024/3/21</a:t>
+              <a:t>2024/3/22</a:t>
             </a:fld>
             <a:endParaRPr lang="zh-CN" altLang="en-US"/>
           </a:p>
@@ -2857,7 +2857,7 @@
             </a:pPr>
             <a:fld id="{E11AF4AC-5AFC-4379-B912-FCE9AB7477D3}" type="datetime1">
               <a:rPr lang="zh-CN" altLang="en-US"/>
-              <a:t>2024/3/21</a:t>
+              <a:t>2024/3/22</a:t>
             </a:fld>
             <a:endParaRPr lang="zh-CN" altLang="en-US"/>
           </a:p>
@@ -3585,7 +3585,7 @@
             </a:pPr>
             <a:fld id="{D2392E56-C887-40A0-B45B-7A180C992FB2}" type="datetime1">
               <a:rPr lang="zh-CN" altLang="en-US"/>
-              <a:t>2024/3/21</a:t>
+              <a:t>2024/3/22</a:t>
             </a:fld>
             <a:endParaRPr lang="zh-CN" altLang="en-US"/>
           </a:p>
@@ -4028,7 +4028,7 @@
             </a:pPr>
             <a:fld id="{614AAE4D-FD61-4E21-A39B-A3D833986EBE}" type="datetime1">
               <a:rPr lang="zh-CN" altLang="en-US"/>
-              <a:t>2024/3/21</a:t>
+              <a:t>2024/3/22</a:t>
             </a:fld>
             <a:endParaRPr lang="zh-CN" altLang="en-US"/>
           </a:p>
@@ -4390,7 +4390,7 @@
           <a:p>
             <a:fld id="{F487EE23-058C-4F57-8869-2B6561E3103C}" type="datetimeFigureOut">
               <a:rPr lang="zh-CN" altLang="en-US" smtClean="0"/>
-              <a:t>2024/3/21</a:t>
+              <a:t>2024/3/22</a:t>
             </a:fld>
             <a:endParaRPr lang="zh-CN" altLang="en-US"/>
           </a:p>
@@ -4876,7 +4876,7 @@
           <a:p>
             <a:fld id="{F487EE23-058C-4F57-8869-2B6561E3103C}" type="datetimeFigureOut">
               <a:rPr lang="zh-CN" altLang="en-US" smtClean="0"/>
-              <a:t>2024/3/21</a:t>
+              <a:t>2024/3/22</a:t>
             </a:fld>
             <a:endParaRPr lang="zh-CN" altLang="en-US"/>
           </a:p>
@@ -5149,7 +5149,7 @@
           <a:p>
             <a:fld id="{F487EE23-058C-4F57-8869-2B6561E3103C}" type="datetimeFigureOut">
               <a:rPr lang="zh-CN" altLang="en-US" smtClean="0"/>
-              <a:t>2024/3/21</a:t>
+              <a:t>2024/3/22</a:t>
             </a:fld>
             <a:endParaRPr lang="zh-CN" altLang="en-US"/>
           </a:p>

--- a/livefile/livepowerpoint.pptx
+++ b/livefile/livepowerpoint.pptx
@@ -209,7 +209,7 @@
           <a:p>
             <a:fld id="{16A2333F-9A84-48D5-897E-B51363C09104}" type="datetimeFigureOut">
               <a:rPr lang="zh-CN" altLang="en-US" smtClean="0"/>
-              <a:t>2024/3/22</a:t>
+              <a:t>2024/3/23</a:t>
             </a:fld>
             <a:endParaRPr lang="zh-CN" altLang="en-US"/>
           </a:p>
@@ -472,6 +472,90 @@
 </file>
 
 <file path=ppt/notesSlides/notesSlide1.xml><?xml version="1.0" encoding="utf-8"?>
+<p:notes xmlns:a="http://schemas.openxmlformats.org/drawingml/2006/main" xmlns:r="http://schemas.openxmlformats.org/officeDocument/2006/relationships" xmlns:p="http://schemas.openxmlformats.org/presentationml/2006/main">
+  <p:cSld>
+    <p:spTree>
+      <p:nvGrpSpPr>
+        <p:cNvPr id="1" name=""/>
+        <p:cNvGrpSpPr/>
+        <p:nvPr/>
+      </p:nvGrpSpPr>
+      <p:grpSpPr>
+        <a:xfrm>
+          <a:off x="0" y="0"/>
+          <a:ext cx="0" cy="0"/>
+          <a:chOff x="0" y="0"/>
+          <a:chExt cx="0" cy="0"/>
+        </a:xfrm>
+      </p:grpSpPr>
+      <p:sp>
+        <p:nvSpPr>
+          <p:cNvPr id="2" name="幻灯片图像占位符 1"/>
+          <p:cNvSpPr>
+            <a:spLocks noGrp="1" noRot="1" noChangeAspect="1"/>
+          </p:cNvSpPr>
+          <p:nvPr>
+            <p:ph type="sldImg"/>
+          </p:nvPr>
+        </p:nvSpPr>
+        <p:spPr/>
+      </p:sp>
+      <p:sp>
+        <p:nvSpPr>
+          <p:cNvPr id="3" name="备注占位符 2"/>
+          <p:cNvSpPr>
+            <a:spLocks noGrp="1"/>
+          </p:cNvSpPr>
+          <p:nvPr>
+            <p:ph type="body" idx="1"/>
+          </p:nvPr>
+        </p:nvSpPr>
+        <p:spPr/>
+        <p:txBody>
+          <a:bodyPr/>
+          <a:lstStyle/>
+          <a:p>
+            <a:endParaRPr lang="zh-CN" altLang="en-US" dirty="0"/>
+          </a:p>
+        </p:txBody>
+      </p:sp>
+      <p:sp>
+        <p:nvSpPr>
+          <p:cNvPr id="4" name="灯片编号占位符 3"/>
+          <p:cNvSpPr>
+            <a:spLocks noGrp="1"/>
+          </p:cNvSpPr>
+          <p:nvPr>
+            <p:ph type="sldNum" sz="quarter" idx="5"/>
+          </p:nvPr>
+        </p:nvSpPr>
+        <p:spPr/>
+        <p:txBody>
+          <a:bodyPr/>
+          <a:lstStyle/>
+          <a:p>
+            <a:fld id="{5EF15249-D9FD-41E0-944D-0CA148925727}" type="slidenum">
+              <a:rPr lang="zh-CN" altLang="en-US" smtClean="0"/>
+              <a:t>6</a:t>
+            </a:fld>
+            <a:endParaRPr lang="zh-CN" altLang="en-US"/>
+          </a:p>
+        </p:txBody>
+      </p:sp>
+    </p:spTree>
+    <p:extLst>
+      <p:ext uri="{BB962C8B-B14F-4D97-AF65-F5344CB8AC3E}">
+        <p14:creationId xmlns:p14="http://schemas.microsoft.com/office/powerpoint/2010/main" val="1037144964"/>
+      </p:ext>
+    </p:extLst>
+  </p:cSld>
+  <p:clrMapOvr>
+    <a:masterClrMapping/>
+  </p:clrMapOvr>
+</p:notes>
+</file>
+
+<file path=ppt/notesSlides/notesSlide2.xml><?xml version="1.0" encoding="utf-8"?>
 <p:notes xmlns:a="http://schemas.openxmlformats.org/drawingml/2006/main" xmlns:r="http://schemas.openxmlformats.org/officeDocument/2006/relationships" xmlns:p="http://schemas.openxmlformats.org/presentationml/2006/main">
   <p:cSld>
     <p:spTree>
@@ -865,7 +949,7 @@
             </a:pPr>
             <a:fld id="{8D7D9A98-2B42-4142-BB4A-011734DDEA85}" type="datetimeFigureOut">
               <a:rPr lang="zh-CN" altLang="en-US"/>
-              <a:t>2024/3/22</a:t>
+              <a:t>2024/3/23</a:t>
             </a:fld>
             <a:endParaRPr lang="zh-CN" altLang="en-US"/>
           </a:p>
@@ -1014,7 +1098,7 @@
             </a:pPr>
             <a:fld id="{12F3D532-36F8-4FDA-B03A-4B8348962AD1}" type="datetime1">
               <a:rPr lang="zh-CN" altLang="en-US"/>
-              <a:t>2024/3/22</a:t>
+              <a:t>2024/3/23</a:t>
             </a:fld>
             <a:endParaRPr lang="zh-CN" altLang="en-US"/>
           </a:p>
@@ -1123,7 +1207,7 @@
           <a:p>
             <a:fld id="{F487EE23-058C-4F57-8869-2B6561E3103C}" type="datetimeFigureOut">
               <a:rPr lang="zh-CN" altLang="en-US" smtClean="0"/>
-              <a:t>2024/3/22</a:t>
+              <a:t>2024/3/23</a:t>
             </a:fld>
             <a:endParaRPr lang="zh-CN" altLang="en-US"/>
           </a:p>
@@ -1379,7 +1463,7 @@
           <a:p>
             <a:fld id="{F487EE23-058C-4F57-8869-2B6561E3103C}" type="datetimeFigureOut">
               <a:rPr lang="zh-CN" altLang="en-US" smtClean="0"/>
-              <a:t>2024/3/22</a:t>
+              <a:t>2024/3/23</a:t>
             </a:fld>
             <a:endParaRPr lang="zh-CN" altLang="en-US"/>
           </a:p>
@@ -1601,7 +1685,7 @@
             </a:pPr>
             <a:fld id="{A293AA06-7DE4-4BE9-9894-758112E5DCC1}" type="datetime1">
               <a:rPr lang="zh-CN" altLang="en-US"/>
-              <a:t>2024/3/22</a:t>
+              <a:t>2024/3/23</a:t>
             </a:fld>
             <a:endParaRPr lang="zh-CN" altLang="en-US"/>
           </a:p>
@@ -1915,7 +1999,7 @@
           <a:p>
             <a:fld id="{F487EE23-058C-4F57-8869-2B6561E3103C}" type="datetimeFigureOut">
               <a:rPr lang="zh-CN" altLang="en-US" smtClean="0"/>
-              <a:t>2024/3/22</a:t>
+              <a:t>2024/3/23</a:t>
             </a:fld>
             <a:endParaRPr lang="zh-CN" altLang="en-US"/>
           </a:p>
@@ -2166,7 +2250,7 @@
             </a:pPr>
             <a:fld id="{BEDED714-68C8-44B6-9732-DDF7DD97772E}" type="datetime1">
               <a:rPr lang="zh-CN" altLang="en-US"/>
-              <a:t>2024/3/22</a:t>
+              <a:t>2024/3/23</a:t>
             </a:fld>
             <a:endParaRPr lang="zh-CN" altLang="en-US"/>
           </a:p>
@@ -2548,7 +2632,7 @@
             </a:pPr>
             <a:fld id="{27A77D59-FE09-433D-B821-9B2BE50A514A}" type="datetime1">
               <a:rPr lang="zh-CN" altLang="en-US"/>
-              <a:t>2024/3/22</a:t>
+              <a:t>2024/3/23</a:t>
             </a:fld>
             <a:endParaRPr lang="zh-CN" altLang="en-US"/>
           </a:p>
@@ -2857,7 +2941,7 @@
             </a:pPr>
             <a:fld id="{E11AF4AC-5AFC-4379-B912-FCE9AB7477D3}" type="datetime1">
               <a:rPr lang="zh-CN" altLang="en-US"/>
-              <a:t>2024/3/22</a:t>
+              <a:t>2024/3/23</a:t>
             </a:fld>
             <a:endParaRPr lang="zh-CN" altLang="en-US"/>
           </a:p>
@@ -3585,7 +3669,7 @@
             </a:pPr>
             <a:fld id="{D2392E56-C887-40A0-B45B-7A180C992FB2}" type="datetime1">
               <a:rPr lang="zh-CN" altLang="en-US"/>
-              <a:t>2024/3/22</a:t>
+              <a:t>2024/3/23</a:t>
             </a:fld>
             <a:endParaRPr lang="zh-CN" altLang="en-US"/>
           </a:p>
@@ -4028,7 +4112,7 @@
             </a:pPr>
             <a:fld id="{614AAE4D-FD61-4E21-A39B-A3D833986EBE}" type="datetime1">
               <a:rPr lang="zh-CN" altLang="en-US"/>
-              <a:t>2024/3/22</a:t>
+              <a:t>2024/3/23</a:t>
             </a:fld>
             <a:endParaRPr lang="zh-CN" altLang="en-US"/>
           </a:p>
@@ -4390,7 +4474,7 @@
           <a:p>
             <a:fld id="{F487EE23-058C-4F57-8869-2B6561E3103C}" type="datetimeFigureOut">
               <a:rPr lang="zh-CN" altLang="en-US" smtClean="0"/>
-              <a:t>2024/3/22</a:t>
+              <a:t>2024/3/23</a:t>
             </a:fld>
             <a:endParaRPr lang="zh-CN" altLang="en-US"/>
           </a:p>
@@ -4876,7 +4960,7 @@
           <a:p>
             <a:fld id="{F487EE23-058C-4F57-8869-2B6561E3103C}" type="datetimeFigureOut">
               <a:rPr lang="zh-CN" altLang="en-US" smtClean="0"/>
-              <a:t>2024/3/22</a:t>
+              <a:t>2024/3/23</a:t>
             </a:fld>
             <a:endParaRPr lang="zh-CN" altLang="en-US"/>
           </a:p>
@@ -5149,7 +5233,7 @@
           <a:p>
             <a:fld id="{F487EE23-058C-4F57-8869-2B6561E3103C}" type="datetimeFigureOut">
               <a:rPr lang="zh-CN" altLang="en-US" smtClean="0"/>
-              <a:t>2024/3/22</a:t>
+              <a:t>2024/3/23</a:t>
             </a:fld>
             <a:endParaRPr lang="zh-CN" altLang="en-US"/>
           </a:p>
@@ -7797,7 +7881,7 @@
       <p:sp>
         <p:nvSpPr>
           <p:cNvPr id="5" name="文本框 4">
-            <a:hlinkClick r:id="rId2"/>
+            <a:hlinkClick r:id="rId3"/>
           </p:cNvPr>
           <p:cNvSpPr txBox="1"/>
           <p:nvPr/>
@@ -7836,7 +7920,7 @@
       <p:sp>
         <p:nvSpPr>
           <p:cNvPr id="12" name="文本框 11">
-            <a:hlinkClick r:id="rId3"/>
+            <a:hlinkClick r:id="rId4"/>
           </p:cNvPr>
           <p:cNvSpPr txBox="1"/>
           <p:nvPr/>
@@ -7875,7 +7959,7 @@
       <p:sp>
         <p:nvSpPr>
           <p:cNvPr id="14" name="文本框 13">
-            <a:hlinkClick r:id="rId4"/>
+            <a:hlinkClick r:id="rId5"/>
           </p:cNvPr>
           <p:cNvSpPr txBox="1"/>
           <p:nvPr/>
@@ -7914,7 +7998,7 @@
       <p:sp>
         <p:nvSpPr>
           <p:cNvPr id="18" name="文本框 17">
-            <a:hlinkClick r:id="rId5"/>
+            <a:hlinkClick r:id="rId6"/>
           </p:cNvPr>
           <p:cNvSpPr txBox="1"/>
           <p:nvPr/>
@@ -7954,7 +8038,7 @@
       <p:sp>
         <p:nvSpPr>
           <p:cNvPr id="20" name="文本框 19">
-            <a:hlinkClick r:id="rId6"/>
+            <a:hlinkClick r:id="rId7"/>
           </p:cNvPr>
           <p:cNvSpPr txBox="1"/>
           <p:nvPr/>
@@ -7994,7 +8078,7 @@
       <p:sp>
         <p:nvSpPr>
           <p:cNvPr id="2" name="文本框 1">
-            <a:hlinkClick r:id="rId7" action="ppaction://hlinkfile"/>
+            <a:hlinkClick r:id="rId8" action="ppaction://hlinkfile"/>
           </p:cNvPr>
           <p:cNvSpPr txBox="1"/>
           <p:nvPr/>
@@ -8025,7 +8109,7 @@
       <p:sp>
         <p:nvSpPr>
           <p:cNvPr id="3" name="文本框 2">
-            <a:hlinkClick r:id="rId8" action="ppaction://hlinkfile"/>
+            <a:hlinkClick r:id="rId9" action="ppaction://hlinkfile"/>
           </p:cNvPr>
           <p:cNvSpPr txBox="1"/>
           <p:nvPr/>
@@ -8056,7 +8140,7 @@
       <p:sp>
         <p:nvSpPr>
           <p:cNvPr id="6" name="文本框 5">
-            <a:hlinkClick r:id="rId9"/>
+            <a:hlinkClick r:id="rId10"/>
             <a:extLst>
               <a:ext uri="{FF2B5EF4-FFF2-40B4-BE49-F238E27FC236}">
                 <a16:creationId xmlns:a16="http://schemas.microsoft.com/office/drawing/2014/main" id="{F4FF3375-1005-18D2-8304-774F6BDCCC15}"/>
@@ -8100,7 +8184,7 @@
       <p:sp>
         <p:nvSpPr>
           <p:cNvPr id="9" name="文本框 8">
-            <a:hlinkClick r:id="rId10"/>
+            <a:hlinkClick r:id="rId11"/>
             <a:extLst>
               <a:ext uri="{FF2B5EF4-FFF2-40B4-BE49-F238E27FC236}">
                 <a16:creationId xmlns:a16="http://schemas.microsoft.com/office/drawing/2014/main" id="{228052F6-87BB-782A-D720-7AC2231B507C}"/>
@@ -8145,7 +8229,7 @@
       <p:sp>
         <p:nvSpPr>
           <p:cNvPr id="7" name="文本框 6">
-            <a:hlinkClick r:id="rId11"/>
+            <a:hlinkClick r:id="rId12"/>
             <a:extLst>
               <a:ext uri="{FF2B5EF4-FFF2-40B4-BE49-F238E27FC236}">
                 <a16:creationId xmlns:a16="http://schemas.microsoft.com/office/drawing/2014/main" id="{48947CAC-90CF-38F9-68E9-05B3CC70F0B8}"/>
@@ -8190,7 +8274,7 @@
       <p:sp>
         <p:nvSpPr>
           <p:cNvPr id="8" name="文本框 7">
-            <a:hlinkClick r:id="rId12"/>
+            <a:hlinkClick r:id="rId13"/>
             <a:extLst>
               <a:ext uri="{FF2B5EF4-FFF2-40B4-BE49-F238E27FC236}">
                 <a16:creationId xmlns:a16="http://schemas.microsoft.com/office/drawing/2014/main" id="{4E0BB707-368A-1CA4-14EB-9E21A10CC738}"/>
@@ -8235,7 +8319,7 @@
       <p:sp>
         <p:nvSpPr>
           <p:cNvPr id="10" name="文本框 9">
-            <a:hlinkClick r:id="rId13"/>
+            <a:hlinkClick r:id="rId14"/>
             <a:extLst>
               <a:ext uri="{FF2B5EF4-FFF2-40B4-BE49-F238E27FC236}">
                 <a16:creationId xmlns:a16="http://schemas.microsoft.com/office/drawing/2014/main" id="{1B7A347A-0A36-4A5F-68A1-B513D14424E7}"/>
@@ -8280,7 +8364,7 @@
       <p:sp>
         <p:nvSpPr>
           <p:cNvPr id="11" name="文本框 10">
-            <a:hlinkClick r:id="rId14"/>
+            <a:hlinkClick r:id="rId15"/>
             <a:extLst>
               <a:ext uri="{FF2B5EF4-FFF2-40B4-BE49-F238E27FC236}">
                 <a16:creationId xmlns:a16="http://schemas.microsoft.com/office/drawing/2014/main" id="{06C97A59-3170-BF31-A1AF-D31B3B65F5BD}"/>
@@ -8325,7 +8409,7 @@
       <p:sp>
         <p:nvSpPr>
           <p:cNvPr id="13" name="文本框 12">
-            <a:hlinkClick r:id="rId15"/>
+            <a:hlinkClick r:id="rId16"/>
             <a:extLst>
               <a:ext uri="{FF2B5EF4-FFF2-40B4-BE49-F238E27FC236}">
                 <a16:creationId xmlns:a16="http://schemas.microsoft.com/office/drawing/2014/main" id="{C13A42D9-6684-BF35-552A-BDAE009DEEE4}"/>

--- a/livefile/livepowerpoint.pptx
+++ b/livefile/livepowerpoint.pptx
@@ -8626,6 +8626,94 @@
             <a:r>
               <a:rPr lang="zh-CN" altLang="en-US" dirty="0"/>
               <a:t>重生之我真没想当渣男</a:t>
+            </a:r>
+            <a:r>
+              <a:rPr lang="en-US" altLang="zh-CN" dirty="0"/>
+              <a:t>》</a:t>
+            </a:r>
+          </a:p>
+        </p:txBody>
+      </p:sp>
+      <p:sp>
+        <p:nvSpPr>
+          <p:cNvPr id="3" name="文本框 2">
+            <a:hlinkClick r:id="rId4"/>
+            <a:extLst>
+              <a:ext uri="{FF2B5EF4-FFF2-40B4-BE49-F238E27FC236}">
+                <a16:creationId xmlns:a16="http://schemas.microsoft.com/office/drawing/2014/main" id="{5ACC85E7-F2C7-0481-20DA-84888340C19A}"/>
+              </a:ext>
+            </a:extLst>
+          </p:cNvPr>
+          <p:cNvSpPr txBox="1"/>
+          <p:nvPr/>
+        </p:nvSpPr>
+        <p:spPr>
+          <a:xfrm>
+            <a:off x="1278255" y="2855955"/>
+            <a:ext cx="1574673" cy="369332"/>
+          </a:xfrm>
+          <a:prstGeom prst="rect">
+            <a:avLst/>
+          </a:prstGeom>
+          <a:noFill/>
+        </p:spPr>
+        <p:txBody>
+          <a:bodyPr wrap="square" rtlCol="0">
+            <a:spAutoFit/>
+          </a:bodyPr>
+          <a:lstStyle/>
+          <a:p>
+            <a:r>
+              <a:rPr lang="en-US" altLang="zh-CN" dirty="0"/>
+              <a:t>《</a:t>
+            </a:r>
+            <a:r>
+              <a:rPr lang="zh-CN" altLang="en-US" dirty="0"/>
+              <a:t>白鹿原</a:t>
+            </a:r>
+            <a:r>
+              <a:rPr lang="en-US" altLang="zh-CN" dirty="0"/>
+              <a:t>》</a:t>
+            </a:r>
+          </a:p>
+        </p:txBody>
+      </p:sp>
+      <p:sp>
+        <p:nvSpPr>
+          <p:cNvPr id="4" name="文本框 3">
+            <a:hlinkClick r:id="rId5"/>
+            <a:extLst>
+              <a:ext uri="{FF2B5EF4-FFF2-40B4-BE49-F238E27FC236}">
+                <a16:creationId xmlns:a16="http://schemas.microsoft.com/office/drawing/2014/main" id="{E7FE1A91-DFFD-13D1-C0C1-A1DFD3BD9CD5}"/>
+              </a:ext>
+            </a:extLst>
+          </p:cNvPr>
+          <p:cNvSpPr txBox="1"/>
+          <p:nvPr/>
+        </p:nvSpPr>
+        <p:spPr>
+          <a:xfrm>
+            <a:off x="1278255" y="3632714"/>
+            <a:ext cx="1574673" cy="369332"/>
+          </a:xfrm>
+          <a:prstGeom prst="rect">
+            <a:avLst/>
+          </a:prstGeom>
+          <a:noFill/>
+        </p:spPr>
+        <p:txBody>
+          <a:bodyPr wrap="square" rtlCol="0">
+            <a:spAutoFit/>
+          </a:bodyPr>
+          <a:lstStyle/>
+          <a:p>
+            <a:r>
+              <a:rPr lang="en-US" altLang="zh-CN" dirty="0"/>
+              <a:t>《</a:t>
+            </a:r>
+            <a:r>
+              <a:rPr lang="zh-CN" altLang="en-US" dirty="0"/>
+              <a:t>从红月开始</a:t>
             </a:r>
             <a:r>
               <a:rPr lang="en-US" altLang="zh-CN" dirty="0"/>

--- a/livefile/livepowerpoint.pptx
+++ b/livefile/livepowerpoint.pptx
@@ -8694,7 +8694,7 @@
         <p:spPr>
           <a:xfrm>
             <a:off x="1278255" y="3632714"/>
-            <a:ext cx="1574673" cy="369332"/>
+            <a:ext cx="1950720" cy="369332"/>
           </a:xfrm>
           <a:prstGeom prst="rect">
             <a:avLst/>
@@ -8718,6 +8718,102 @@
             <a:r>
               <a:rPr lang="en-US" altLang="zh-CN" dirty="0"/>
               <a:t>》</a:t>
+            </a:r>
+          </a:p>
+        </p:txBody>
+      </p:sp>
+      <p:sp>
+        <p:nvSpPr>
+          <p:cNvPr id="5" name="文本框 4">
+            <a:hlinkClick r:id="rId6"/>
+            <a:extLst>
+              <a:ext uri="{FF2B5EF4-FFF2-40B4-BE49-F238E27FC236}">
+                <a16:creationId xmlns:a16="http://schemas.microsoft.com/office/drawing/2014/main" id="{A3D6CA9A-7540-A717-D709-123F09FDA417}"/>
+              </a:ext>
+            </a:extLst>
+          </p:cNvPr>
+          <p:cNvSpPr txBox="1"/>
+          <p:nvPr/>
+        </p:nvSpPr>
+        <p:spPr>
+          <a:xfrm>
+            <a:off x="1278255" y="4372034"/>
+            <a:ext cx="2890332" cy="369333"/>
+          </a:xfrm>
+          <a:prstGeom prst="rect">
+            <a:avLst/>
+          </a:prstGeom>
+          <a:noFill/>
+        </p:spPr>
+        <p:txBody>
+          <a:bodyPr wrap="square" rtlCol="0">
+            <a:spAutoFit/>
+          </a:bodyPr>
+          <a:lstStyle/>
+          <a:p>
+            <a:r>
+              <a:rPr lang="en-US" altLang="zh-CN" dirty="0"/>
+              <a:t>《</a:t>
+            </a:r>
+            <a:r>
+              <a:rPr lang="zh-CN" altLang="en-US" dirty="0"/>
+              <a:t>穿成摄政王的侍爱逃妻</a:t>
+            </a:r>
+            <a:r>
+              <a:rPr lang="en-US" altLang="zh-CN" dirty="0"/>
+              <a:t>》</a:t>
+            </a:r>
+          </a:p>
+        </p:txBody>
+      </p:sp>
+      <p:sp>
+        <p:nvSpPr>
+          <p:cNvPr id="6" name="文本框 5">
+            <a:hlinkClick r:id="rId7"/>
+            <a:extLst>
+              <a:ext uri="{FF2B5EF4-FFF2-40B4-BE49-F238E27FC236}">
+                <a16:creationId xmlns:a16="http://schemas.microsoft.com/office/drawing/2014/main" id="{B41276D7-D3C2-B2E0-E40A-1373AC5CB9BA}"/>
+              </a:ext>
+            </a:extLst>
+          </p:cNvPr>
+          <p:cNvSpPr txBox="1"/>
+          <p:nvPr/>
+        </p:nvSpPr>
+        <p:spPr>
+          <a:xfrm>
+            <a:off x="1278255" y="5111354"/>
+            <a:ext cx="2890332" cy="369333"/>
+          </a:xfrm>
+          <a:prstGeom prst="rect">
+            <a:avLst/>
+          </a:prstGeom>
+          <a:noFill/>
+        </p:spPr>
+        <p:txBody>
+          <a:bodyPr wrap="square" rtlCol="0">
+            <a:spAutoFit/>
+          </a:bodyPr>
+          <a:lstStyle/>
+          <a:p>
+            <a:r>
+              <a:rPr lang="en-US" altLang="zh-CN" dirty="0"/>
+              <a:t>《</a:t>
+            </a:r>
+            <a:r>
+              <a:rPr lang="zh-CN" altLang="en-US" dirty="0"/>
+              <a:t>听说我很穷</a:t>
+            </a:r>
+            <a:r>
+              <a:rPr lang="en-US" altLang="zh-CN" dirty="0"/>
+              <a:t>[</a:t>
+            </a:r>
+            <a:r>
+              <a:rPr lang="zh-CN" altLang="en-US" dirty="0"/>
+              <a:t>娱乐圈</a:t>
+            </a:r>
+            <a:r>
+              <a:rPr lang="en-US" altLang="zh-CN" dirty="0"/>
+              <a:t>]》</a:t>
             </a:r>
           </a:p>
         </p:txBody>

--- a/livefile/livepowerpoint.pptx
+++ b/livefile/livepowerpoint.pptx
@@ -209,7 +209,7 @@
           <a:p>
             <a:fld id="{16A2333F-9A84-48D5-897E-B51363C09104}" type="datetimeFigureOut">
               <a:rPr lang="zh-CN" altLang="en-US" smtClean="0"/>
-              <a:t>2024/3/23</a:t>
+              <a:t>2024/3/25</a:t>
             </a:fld>
             <a:endParaRPr lang="zh-CN" altLang="en-US"/>
           </a:p>
@@ -949,7 +949,7 @@
             </a:pPr>
             <a:fld id="{8D7D9A98-2B42-4142-BB4A-011734DDEA85}" type="datetimeFigureOut">
               <a:rPr lang="zh-CN" altLang="en-US"/>
-              <a:t>2024/3/23</a:t>
+              <a:t>2024/3/25</a:t>
             </a:fld>
             <a:endParaRPr lang="zh-CN" altLang="en-US"/>
           </a:p>
@@ -1098,7 +1098,7 @@
             </a:pPr>
             <a:fld id="{12F3D532-36F8-4FDA-B03A-4B8348962AD1}" type="datetime1">
               <a:rPr lang="zh-CN" altLang="en-US"/>
-              <a:t>2024/3/23</a:t>
+              <a:t>2024/3/25</a:t>
             </a:fld>
             <a:endParaRPr lang="zh-CN" altLang="en-US"/>
           </a:p>
@@ -1207,7 +1207,7 @@
           <a:p>
             <a:fld id="{F487EE23-058C-4F57-8869-2B6561E3103C}" type="datetimeFigureOut">
               <a:rPr lang="zh-CN" altLang="en-US" smtClean="0"/>
-              <a:t>2024/3/23</a:t>
+              <a:t>2024/3/25</a:t>
             </a:fld>
             <a:endParaRPr lang="zh-CN" altLang="en-US"/>
           </a:p>
@@ -1463,7 +1463,7 @@
           <a:p>
             <a:fld id="{F487EE23-058C-4F57-8869-2B6561E3103C}" type="datetimeFigureOut">
               <a:rPr lang="zh-CN" altLang="en-US" smtClean="0"/>
-              <a:t>2024/3/23</a:t>
+              <a:t>2024/3/25</a:t>
             </a:fld>
             <a:endParaRPr lang="zh-CN" altLang="en-US"/>
           </a:p>
@@ -1685,7 +1685,7 @@
             </a:pPr>
             <a:fld id="{A293AA06-7DE4-4BE9-9894-758112E5DCC1}" type="datetime1">
               <a:rPr lang="zh-CN" altLang="en-US"/>
-              <a:t>2024/3/23</a:t>
+              <a:t>2024/3/25</a:t>
             </a:fld>
             <a:endParaRPr lang="zh-CN" altLang="en-US"/>
           </a:p>
@@ -1999,7 +1999,7 @@
           <a:p>
             <a:fld id="{F487EE23-058C-4F57-8869-2B6561E3103C}" type="datetimeFigureOut">
               <a:rPr lang="zh-CN" altLang="en-US" smtClean="0"/>
-              <a:t>2024/3/23</a:t>
+              <a:t>2024/3/25</a:t>
             </a:fld>
             <a:endParaRPr lang="zh-CN" altLang="en-US"/>
           </a:p>
@@ -2250,7 +2250,7 @@
             </a:pPr>
             <a:fld id="{BEDED714-68C8-44B6-9732-DDF7DD97772E}" type="datetime1">
               <a:rPr lang="zh-CN" altLang="en-US"/>
-              <a:t>2024/3/23</a:t>
+              <a:t>2024/3/25</a:t>
             </a:fld>
             <a:endParaRPr lang="zh-CN" altLang="en-US"/>
           </a:p>
@@ -2632,7 +2632,7 @@
             </a:pPr>
             <a:fld id="{27A77D59-FE09-433D-B821-9B2BE50A514A}" type="datetime1">
               <a:rPr lang="zh-CN" altLang="en-US"/>
-              <a:t>2024/3/23</a:t>
+              <a:t>2024/3/25</a:t>
             </a:fld>
             <a:endParaRPr lang="zh-CN" altLang="en-US"/>
           </a:p>
@@ -2941,7 +2941,7 @@
             </a:pPr>
             <a:fld id="{E11AF4AC-5AFC-4379-B912-FCE9AB7477D3}" type="datetime1">
               <a:rPr lang="zh-CN" altLang="en-US"/>
-              <a:t>2024/3/23</a:t>
+              <a:t>2024/3/25</a:t>
             </a:fld>
             <a:endParaRPr lang="zh-CN" altLang="en-US"/>
           </a:p>
@@ -3669,7 +3669,7 @@
             </a:pPr>
             <a:fld id="{D2392E56-C887-40A0-B45B-7A180C992FB2}" type="datetime1">
               <a:rPr lang="zh-CN" altLang="en-US"/>
-              <a:t>2024/3/23</a:t>
+              <a:t>2024/3/25</a:t>
             </a:fld>
             <a:endParaRPr lang="zh-CN" altLang="en-US"/>
           </a:p>
@@ -4112,7 +4112,7 @@
             </a:pPr>
             <a:fld id="{614AAE4D-FD61-4E21-A39B-A3D833986EBE}" type="datetime1">
               <a:rPr lang="zh-CN" altLang="en-US"/>
-              <a:t>2024/3/23</a:t>
+              <a:t>2024/3/25</a:t>
             </a:fld>
             <a:endParaRPr lang="zh-CN" altLang="en-US"/>
           </a:p>
@@ -4474,7 +4474,7 @@
           <a:p>
             <a:fld id="{F487EE23-058C-4F57-8869-2B6561E3103C}" type="datetimeFigureOut">
               <a:rPr lang="zh-CN" altLang="en-US" smtClean="0"/>
-              <a:t>2024/3/23</a:t>
+              <a:t>2024/3/25</a:t>
             </a:fld>
             <a:endParaRPr lang="zh-CN" altLang="en-US"/>
           </a:p>
@@ -4960,7 +4960,7 @@
           <a:p>
             <a:fld id="{F487EE23-058C-4F57-8869-2B6561E3103C}" type="datetimeFigureOut">
               <a:rPr lang="zh-CN" altLang="en-US" smtClean="0"/>
-              <a:t>2024/3/23</a:t>
+              <a:t>2024/3/25</a:t>
             </a:fld>
             <a:endParaRPr lang="zh-CN" altLang="en-US"/>
           </a:p>
@@ -5233,7 +5233,7 @@
           <a:p>
             <a:fld id="{F487EE23-058C-4F57-8869-2B6561E3103C}" type="datetimeFigureOut">
               <a:rPr lang="zh-CN" altLang="en-US" smtClean="0"/>
-              <a:t>2024/3/23</a:t>
+              <a:t>2024/3/25</a:t>
             </a:fld>
             <a:endParaRPr lang="zh-CN" altLang="en-US"/>
           </a:p>
@@ -10442,182 +10442,161 @@
           </p:txBody>
         </p:sp>
       </p:grpSp>
-      <p:grpSp>
-        <p:nvGrpSpPr>
-          <p:cNvPr id="36" name="组合 35">
-            <a:extLst>
-              <a:ext uri="{FF2B5EF4-FFF2-40B4-BE49-F238E27FC236}">
-                <a16:creationId xmlns:a16="http://schemas.microsoft.com/office/drawing/2014/main" id="{F9C3BB25-F2E0-776E-079B-FEAB95EAC7DF}"/>
-              </a:ext>
-            </a:extLst>
+      <p:sp>
+        <p:nvSpPr>
+          <p:cNvPr id="2" name="文本框 1">
+            <a:hlinkClick r:id="rId12"/>
           </p:cNvPr>
-          <p:cNvGrpSpPr/>
+          <p:cNvSpPr txBox="1"/>
           <p:nvPr/>
-        </p:nvGrpSpPr>
-        <p:grpSpPr>
+        </p:nvSpPr>
+        <p:spPr>
           <a:xfrm>
             <a:off x="3337131" y="1402556"/>
-            <a:ext cx="795655" cy="3112135"/>
-            <a:chOff x="3039746" y="1402556"/>
-            <a:chExt cx="795655" cy="3112135"/>
-          </a:xfrm>
-        </p:grpSpPr>
-        <p:sp>
-          <p:nvSpPr>
-            <p:cNvPr id="2" name="文本框 1">
-              <a:hlinkClick r:id="rId12"/>
-            </p:cNvPr>
-            <p:cNvSpPr txBox="1"/>
-            <p:nvPr/>
-          </p:nvSpPr>
-          <p:spPr>
-            <a:xfrm>
-              <a:off x="3039746" y="1402556"/>
-              <a:ext cx="699770" cy="368300"/>
-            </a:xfrm>
-            <a:prstGeom prst="rect">
-              <a:avLst/>
-            </a:prstGeom>
-            <a:noFill/>
-          </p:spPr>
-          <p:txBody>
-            <a:bodyPr wrap="square" rtlCol="0">
-              <a:spAutoFit/>
-            </a:bodyPr>
-            <a:lstStyle/>
-            <a:p>
-              <a:r>
-                <a:rPr lang="en-US" altLang="zh-CN" dirty="0"/>
-                <a:t>xc1</a:t>
-              </a:r>
-            </a:p>
-          </p:txBody>
-        </p:sp>
-        <p:sp>
-          <p:nvSpPr>
-            <p:cNvPr id="3" name="文本框 2">
-              <a:hlinkClick r:id="rId13"/>
-            </p:cNvPr>
-            <p:cNvSpPr txBox="1"/>
-            <p:nvPr/>
-          </p:nvSpPr>
-          <p:spPr>
-            <a:xfrm>
-              <a:off x="3039746" y="2088515"/>
-              <a:ext cx="700405" cy="368300"/>
-            </a:xfrm>
-            <a:prstGeom prst="rect">
-              <a:avLst/>
-            </a:prstGeom>
-            <a:noFill/>
-          </p:spPr>
-          <p:txBody>
-            <a:bodyPr wrap="square" rtlCol="0">
-              <a:spAutoFit/>
-            </a:bodyPr>
-            <a:lstStyle/>
-            <a:p>
-              <a:r>
-                <a:rPr lang="en-US" altLang="zh-CN" dirty="0"/>
-                <a:t>xc2</a:t>
-              </a:r>
-            </a:p>
-          </p:txBody>
-        </p:sp>
-        <p:sp>
-          <p:nvSpPr>
-            <p:cNvPr id="14" name="文本框 13">
-              <a:hlinkClick r:id="rId14"/>
-            </p:cNvPr>
-            <p:cNvSpPr txBox="1"/>
-            <p:nvPr/>
-          </p:nvSpPr>
-          <p:spPr>
-            <a:xfrm>
-              <a:off x="3039746" y="2774474"/>
-              <a:ext cx="795655" cy="368300"/>
-            </a:xfrm>
-            <a:prstGeom prst="rect">
-              <a:avLst/>
-            </a:prstGeom>
-            <a:noFill/>
-          </p:spPr>
-          <p:txBody>
-            <a:bodyPr wrap="square" rtlCol="0">
-              <a:spAutoFit/>
-            </a:bodyPr>
-            <a:lstStyle/>
-            <a:p>
-              <a:r>
-                <a:rPr lang="en-US" altLang="zh-CN" dirty="0"/>
-                <a:t>bs1</a:t>
-              </a:r>
-            </a:p>
-          </p:txBody>
-        </p:sp>
-        <p:sp>
-          <p:nvSpPr>
-            <p:cNvPr id="15" name="文本框 14">
-              <a:hlinkClick r:id="rId15"/>
-            </p:cNvPr>
-            <p:cNvSpPr txBox="1"/>
-            <p:nvPr/>
-          </p:nvSpPr>
-          <p:spPr>
-            <a:xfrm>
-              <a:off x="3039746" y="3460433"/>
-              <a:ext cx="795655" cy="368300"/>
-            </a:xfrm>
-            <a:prstGeom prst="rect">
-              <a:avLst/>
-            </a:prstGeom>
-            <a:noFill/>
-          </p:spPr>
-          <p:txBody>
-            <a:bodyPr wrap="square" rtlCol="0">
-              <a:spAutoFit/>
-            </a:bodyPr>
-            <a:lstStyle/>
-            <a:p>
-              <a:r>
-                <a:rPr lang="en-US" altLang="zh-CN" dirty="0"/>
-                <a:t>bs2</a:t>
-              </a:r>
-            </a:p>
-          </p:txBody>
-        </p:sp>
-        <p:sp>
-          <p:nvSpPr>
-            <p:cNvPr id="16" name="文本框 15">
-              <a:hlinkClick r:id="rId16"/>
-            </p:cNvPr>
-            <p:cNvSpPr txBox="1"/>
-            <p:nvPr/>
-          </p:nvSpPr>
-          <p:spPr>
-            <a:xfrm>
-              <a:off x="3039746" y="4146391"/>
-              <a:ext cx="795655" cy="368300"/>
-            </a:xfrm>
-            <a:prstGeom prst="rect">
-              <a:avLst/>
-            </a:prstGeom>
-            <a:noFill/>
-          </p:spPr>
-          <p:txBody>
-            <a:bodyPr wrap="square" rtlCol="0">
-              <a:spAutoFit/>
-            </a:bodyPr>
-            <a:lstStyle/>
-            <a:p>
-              <a:r>
-                <a:rPr lang="en-US" altLang="zh-CN" dirty="0"/>
-                <a:t>cl</a:t>
-              </a:r>
-            </a:p>
-          </p:txBody>
-        </p:sp>
-      </p:grpSp>
+            <a:ext cx="699770" cy="368300"/>
+          </a:xfrm>
+          <a:prstGeom prst="rect">
+            <a:avLst/>
+          </a:prstGeom>
+          <a:noFill/>
+        </p:spPr>
+        <p:txBody>
+          <a:bodyPr wrap="square" rtlCol="0">
+            <a:spAutoFit/>
+          </a:bodyPr>
+          <a:lstStyle/>
+          <a:p>
+            <a:r>
+              <a:rPr lang="en-US" altLang="zh-CN" dirty="0"/>
+              <a:t>xc1</a:t>
+            </a:r>
+          </a:p>
+        </p:txBody>
+      </p:sp>
+      <p:sp>
+        <p:nvSpPr>
+          <p:cNvPr id="3" name="文本框 2">
+            <a:hlinkClick r:id="rId13"/>
+          </p:cNvPr>
+          <p:cNvSpPr txBox="1"/>
+          <p:nvPr/>
+        </p:nvSpPr>
+        <p:spPr>
+          <a:xfrm>
+            <a:off x="3337131" y="2088515"/>
+            <a:ext cx="700405" cy="368300"/>
+          </a:xfrm>
+          <a:prstGeom prst="rect">
+            <a:avLst/>
+          </a:prstGeom>
+          <a:noFill/>
+        </p:spPr>
+        <p:txBody>
+          <a:bodyPr wrap="square" rtlCol="0">
+            <a:spAutoFit/>
+          </a:bodyPr>
+          <a:lstStyle/>
+          <a:p>
+            <a:r>
+              <a:rPr lang="en-US" altLang="zh-CN" dirty="0"/>
+              <a:t>xc2</a:t>
+            </a:r>
+          </a:p>
+        </p:txBody>
+      </p:sp>
+      <p:sp>
+        <p:nvSpPr>
+          <p:cNvPr id="14" name="文本框 13">
+            <a:hlinkClick r:id="rId14"/>
+          </p:cNvPr>
+          <p:cNvSpPr txBox="1"/>
+          <p:nvPr/>
+        </p:nvSpPr>
+        <p:spPr>
+          <a:xfrm>
+            <a:off x="3337131" y="2774474"/>
+            <a:ext cx="795655" cy="368300"/>
+          </a:xfrm>
+          <a:prstGeom prst="rect">
+            <a:avLst/>
+          </a:prstGeom>
+          <a:noFill/>
+        </p:spPr>
+        <p:txBody>
+          <a:bodyPr wrap="square" rtlCol="0">
+            <a:spAutoFit/>
+          </a:bodyPr>
+          <a:lstStyle/>
+          <a:p>
+            <a:r>
+              <a:rPr lang="en-US" altLang="zh-CN" dirty="0"/>
+              <a:t>bs1</a:t>
+            </a:r>
+          </a:p>
+        </p:txBody>
+      </p:sp>
+      <p:sp>
+        <p:nvSpPr>
+          <p:cNvPr id="15" name="文本框 14">
+            <a:hlinkClick r:id="rId15"/>
+          </p:cNvPr>
+          <p:cNvSpPr txBox="1"/>
+          <p:nvPr/>
+        </p:nvSpPr>
+        <p:spPr>
+          <a:xfrm>
+            <a:off x="3337131" y="3460433"/>
+            <a:ext cx="795655" cy="368300"/>
+          </a:xfrm>
+          <a:prstGeom prst="rect">
+            <a:avLst/>
+          </a:prstGeom>
+          <a:noFill/>
+        </p:spPr>
+        <p:txBody>
+          <a:bodyPr wrap="square" rtlCol="0">
+            <a:spAutoFit/>
+          </a:bodyPr>
+          <a:lstStyle/>
+          <a:p>
+            <a:r>
+              <a:rPr lang="en-US" altLang="zh-CN" dirty="0"/>
+              <a:t>bs2</a:t>
+            </a:r>
+          </a:p>
+        </p:txBody>
+      </p:sp>
+      <p:sp>
+        <p:nvSpPr>
+          <p:cNvPr id="16" name="文本框 15">
+            <a:hlinkClick r:id="rId16"/>
+          </p:cNvPr>
+          <p:cNvSpPr txBox="1"/>
+          <p:nvPr/>
+        </p:nvSpPr>
+        <p:spPr>
+          <a:xfrm>
+            <a:off x="3337131" y="4146391"/>
+            <a:ext cx="795655" cy="368300"/>
+          </a:xfrm>
+          <a:prstGeom prst="rect">
+            <a:avLst/>
+          </a:prstGeom>
+          <a:noFill/>
+        </p:spPr>
+        <p:txBody>
+          <a:bodyPr wrap="square" rtlCol="0">
+            <a:spAutoFit/>
+          </a:bodyPr>
+          <a:lstStyle/>
+          <a:p>
+            <a:r>
+              <a:rPr lang="en-US" altLang="zh-CN" dirty="0"/>
+              <a:t>cl</a:t>
+            </a:r>
+          </a:p>
+        </p:txBody>
+      </p:sp>
       <p:grpSp>
         <p:nvGrpSpPr>
           <p:cNvPr id="35" name="组合 34">

--- a/livefile/livepowerpoint.pptx
+++ b/livefile/livepowerpoint.pptx
@@ -6911,7 +6911,7 @@
         <p:spPr>
           <a:xfrm>
             <a:off x="1267274" y="2628900"/>
-            <a:ext cx="8520281" cy="646331"/>
+            <a:ext cx="5878532" cy="646331"/>
           </a:xfrm>
           <a:prstGeom prst="rect">
             <a:avLst/>
@@ -6926,15 +6926,7 @@
           <a:p>
             <a:r>
               <a:rPr lang="zh-CN" altLang="en-US" dirty="0"/>
-              <a:t>如果在使用过程中遇到问题，可以通过</a:t>
-            </a:r>
-            <a:r>
-              <a:rPr lang="en-US" altLang="zh-CN" dirty="0"/>
-              <a:t>GitHub</a:t>
-            </a:r>
-            <a:r>
-              <a:rPr lang="zh-CN" altLang="en-US" dirty="0"/>
-              <a:t>联系我，如果有资源更新需求，请在</a:t>
+              <a:t>如果在使用过程中遇到问题，或有资源更新需求，请在</a:t>
             </a:r>
             <a:endParaRPr lang="en-US" altLang="zh-CN" dirty="0"/>
           </a:p>

--- a/livefile/livepowerpoint.pptx
+++ b/livefile/livepowerpoint.pptx
@@ -10055,6 +10055,78 @@
           </p:txBody>
         </p:sp>
       </p:grpSp>
+      <p:sp>
+        <p:nvSpPr>
+          <p:cNvPr id="39" name="文本框 38">
+            <a:hlinkClick r:id="rId36"/>
+            <a:extLst>
+              <a:ext uri="{FF2B5EF4-FFF2-40B4-BE49-F238E27FC236}">
+                <a16:creationId xmlns:a16="http://schemas.microsoft.com/office/drawing/2014/main" id="{36872E92-22B9-6A3E-74BA-82DAB5A0856B}"/>
+              </a:ext>
+            </a:extLst>
+          </p:cNvPr>
+          <p:cNvSpPr txBox="1"/>
+          <p:nvPr/>
+        </p:nvSpPr>
+        <p:spPr>
+          <a:xfrm>
+            <a:off x="9225159" y="2048637"/>
+            <a:ext cx="700405" cy="368300"/>
+          </a:xfrm>
+          <a:prstGeom prst="rect">
+            <a:avLst/>
+          </a:prstGeom>
+          <a:noFill/>
+        </p:spPr>
+        <p:txBody>
+          <a:bodyPr wrap="square" rtlCol="0">
+            <a:spAutoFit/>
+          </a:bodyPr>
+          <a:lstStyle/>
+          <a:p>
+            <a:r>
+              <a:rPr lang="en-US" altLang="zh-CN" dirty="0"/>
+              <a:t>cd3</a:t>
+            </a:r>
+          </a:p>
+        </p:txBody>
+      </p:sp>
+      <p:sp>
+        <p:nvSpPr>
+          <p:cNvPr id="42" name="文本框 41">
+            <a:hlinkClick r:id="rId37"/>
+            <a:extLst>
+              <a:ext uri="{FF2B5EF4-FFF2-40B4-BE49-F238E27FC236}">
+                <a16:creationId xmlns:a16="http://schemas.microsoft.com/office/drawing/2014/main" id="{39D343D8-D205-2203-8434-DFF258EF9215}"/>
+              </a:ext>
+            </a:extLst>
+          </p:cNvPr>
+          <p:cNvSpPr txBox="1"/>
+          <p:nvPr/>
+        </p:nvSpPr>
+        <p:spPr>
+          <a:xfrm>
+            <a:off x="9225159" y="2679119"/>
+            <a:ext cx="700405" cy="368300"/>
+          </a:xfrm>
+          <a:prstGeom prst="rect">
+            <a:avLst/>
+          </a:prstGeom>
+          <a:noFill/>
+        </p:spPr>
+        <p:txBody>
+          <a:bodyPr wrap="square" rtlCol="0">
+            <a:spAutoFit/>
+          </a:bodyPr>
+          <a:lstStyle/>
+          <a:p>
+            <a:r>
+              <a:rPr lang="en-US" altLang="zh-CN" dirty="0"/>
+              <a:t>cd4</a:t>
+            </a:r>
+          </a:p>
+        </p:txBody>
+      </p:sp>
     </p:spTree>
   </p:cSld>
   <p:clrMapOvr>
@@ -10139,7 +10211,7 @@
         </p:nvGrpSpPr>
         <p:grpSpPr>
           <a:xfrm>
-            <a:off x="1312565" y="1417123"/>
+            <a:off x="1312565" y="1292178"/>
             <a:ext cx="914689" cy="4756861"/>
             <a:chOff x="1312565" y="1417123"/>
             <a:chExt cx="1010574" cy="4756861"/>
@@ -10434,167 +10506,12 @@
           </p:txBody>
         </p:sp>
       </p:grpSp>
-      <p:sp>
-        <p:nvSpPr>
-          <p:cNvPr id="2" name="文本框 1">
-            <a:hlinkClick r:id="rId12"/>
-          </p:cNvPr>
-          <p:cNvSpPr txBox="1"/>
-          <p:nvPr/>
-        </p:nvSpPr>
-        <p:spPr>
-          <a:xfrm>
-            <a:off x="3337131" y="1402556"/>
-            <a:ext cx="699770" cy="368300"/>
-          </a:xfrm>
-          <a:prstGeom prst="rect">
-            <a:avLst/>
-          </a:prstGeom>
-          <a:noFill/>
-        </p:spPr>
-        <p:txBody>
-          <a:bodyPr wrap="square" rtlCol="0">
-            <a:spAutoFit/>
-          </a:bodyPr>
-          <a:lstStyle/>
-          <a:p>
-            <a:r>
-              <a:rPr lang="en-US" altLang="zh-CN" dirty="0"/>
-              <a:t>xc1</a:t>
-            </a:r>
-          </a:p>
-        </p:txBody>
-      </p:sp>
-      <p:sp>
-        <p:nvSpPr>
-          <p:cNvPr id="3" name="文本框 2">
-            <a:hlinkClick r:id="rId13"/>
-          </p:cNvPr>
-          <p:cNvSpPr txBox="1"/>
-          <p:nvPr/>
-        </p:nvSpPr>
-        <p:spPr>
-          <a:xfrm>
-            <a:off x="3337131" y="2088515"/>
-            <a:ext cx="700405" cy="368300"/>
-          </a:xfrm>
-          <a:prstGeom prst="rect">
-            <a:avLst/>
-          </a:prstGeom>
-          <a:noFill/>
-        </p:spPr>
-        <p:txBody>
-          <a:bodyPr wrap="square" rtlCol="0">
-            <a:spAutoFit/>
-          </a:bodyPr>
-          <a:lstStyle/>
-          <a:p>
-            <a:r>
-              <a:rPr lang="en-US" altLang="zh-CN" dirty="0"/>
-              <a:t>xc2</a:t>
-            </a:r>
-          </a:p>
-        </p:txBody>
-      </p:sp>
-      <p:sp>
-        <p:nvSpPr>
-          <p:cNvPr id="14" name="文本框 13">
-            <a:hlinkClick r:id="rId14"/>
-          </p:cNvPr>
-          <p:cNvSpPr txBox="1"/>
-          <p:nvPr/>
-        </p:nvSpPr>
-        <p:spPr>
-          <a:xfrm>
-            <a:off x="3337131" y="2774474"/>
-            <a:ext cx="795655" cy="368300"/>
-          </a:xfrm>
-          <a:prstGeom prst="rect">
-            <a:avLst/>
-          </a:prstGeom>
-          <a:noFill/>
-        </p:spPr>
-        <p:txBody>
-          <a:bodyPr wrap="square" rtlCol="0">
-            <a:spAutoFit/>
-          </a:bodyPr>
-          <a:lstStyle/>
-          <a:p>
-            <a:r>
-              <a:rPr lang="en-US" altLang="zh-CN" dirty="0"/>
-              <a:t>bs1</a:t>
-            </a:r>
-          </a:p>
-        </p:txBody>
-      </p:sp>
-      <p:sp>
-        <p:nvSpPr>
-          <p:cNvPr id="15" name="文本框 14">
-            <a:hlinkClick r:id="rId15"/>
-          </p:cNvPr>
-          <p:cNvSpPr txBox="1"/>
-          <p:nvPr/>
-        </p:nvSpPr>
-        <p:spPr>
-          <a:xfrm>
-            <a:off x="3337131" y="3460433"/>
-            <a:ext cx="795655" cy="368300"/>
-          </a:xfrm>
-          <a:prstGeom prst="rect">
-            <a:avLst/>
-          </a:prstGeom>
-          <a:noFill/>
-        </p:spPr>
-        <p:txBody>
-          <a:bodyPr wrap="square" rtlCol="0">
-            <a:spAutoFit/>
-          </a:bodyPr>
-          <a:lstStyle/>
-          <a:p>
-            <a:r>
-              <a:rPr lang="en-US" altLang="zh-CN" dirty="0"/>
-              <a:t>bs2</a:t>
-            </a:r>
-          </a:p>
-        </p:txBody>
-      </p:sp>
-      <p:sp>
-        <p:nvSpPr>
-          <p:cNvPr id="16" name="文本框 15">
-            <a:hlinkClick r:id="rId16"/>
-          </p:cNvPr>
-          <p:cNvSpPr txBox="1"/>
-          <p:nvPr/>
-        </p:nvSpPr>
-        <p:spPr>
-          <a:xfrm>
-            <a:off x="3337131" y="4146391"/>
-            <a:ext cx="795655" cy="368300"/>
-          </a:xfrm>
-          <a:prstGeom prst="rect">
-            <a:avLst/>
-          </a:prstGeom>
-          <a:noFill/>
-        </p:spPr>
-        <p:txBody>
-          <a:bodyPr wrap="square" rtlCol="0">
-            <a:spAutoFit/>
-          </a:bodyPr>
-          <a:lstStyle/>
-          <a:p>
-            <a:r>
-              <a:rPr lang="en-US" altLang="zh-CN" dirty="0"/>
-              <a:t>cl</a:t>
-            </a:r>
-          </a:p>
-        </p:txBody>
-      </p:sp>
       <p:grpSp>
         <p:nvGrpSpPr>
-          <p:cNvPr id="35" name="组合 34">
+          <p:cNvPr id="39" name="组合 38">
             <a:extLst>
               <a:ext uri="{FF2B5EF4-FFF2-40B4-BE49-F238E27FC236}">
-                <a16:creationId xmlns:a16="http://schemas.microsoft.com/office/drawing/2014/main" id="{8DB15B07-D67A-DC5B-4B53-B6DADBE8973A}"/>
+                <a16:creationId xmlns:a16="http://schemas.microsoft.com/office/drawing/2014/main" id="{2D9F3442-2F84-BC96-EB51-67D2E9C40C9E}"/>
               </a:ext>
             </a:extLst>
           </p:cNvPr>
@@ -10603,15 +10520,170 @@
         </p:nvGrpSpPr>
         <p:grpSpPr>
           <a:xfrm>
-            <a:off x="3337130" y="1431632"/>
-            <a:ext cx="4511469" cy="4637418"/>
-            <a:chOff x="3337130" y="1431632"/>
-            <a:chExt cx="4511469" cy="4637418"/>
+            <a:off x="3337131" y="1292178"/>
+            <a:ext cx="795655" cy="3488469"/>
+            <a:chOff x="3337131" y="1402556"/>
+            <a:chExt cx="795655" cy="3488469"/>
           </a:xfrm>
         </p:grpSpPr>
         <p:sp>
           <p:nvSpPr>
-            <p:cNvPr id="18" name="文本框 17">
+            <p:cNvPr id="2" name="文本框 1">
+              <a:hlinkClick r:id="rId12"/>
+            </p:cNvPr>
+            <p:cNvSpPr txBox="1"/>
+            <p:nvPr/>
+          </p:nvSpPr>
+          <p:spPr>
+            <a:xfrm>
+              <a:off x="3337131" y="1402556"/>
+              <a:ext cx="699770" cy="368300"/>
+            </a:xfrm>
+            <a:prstGeom prst="rect">
+              <a:avLst/>
+            </a:prstGeom>
+            <a:noFill/>
+          </p:spPr>
+          <p:txBody>
+            <a:bodyPr wrap="square" rtlCol="0">
+              <a:spAutoFit/>
+            </a:bodyPr>
+            <a:lstStyle/>
+            <a:p>
+              <a:r>
+                <a:rPr lang="en-US" altLang="zh-CN" dirty="0"/>
+                <a:t>xc1</a:t>
+              </a:r>
+            </a:p>
+          </p:txBody>
+        </p:sp>
+        <p:sp>
+          <p:nvSpPr>
+            <p:cNvPr id="3" name="文本框 2">
+              <a:hlinkClick r:id="rId13"/>
+            </p:cNvPr>
+            <p:cNvSpPr txBox="1"/>
+            <p:nvPr/>
+          </p:nvSpPr>
+          <p:spPr>
+            <a:xfrm>
+              <a:off x="3337131" y="2088515"/>
+              <a:ext cx="700405" cy="368300"/>
+            </a:xfrm>
+            <a:prstGeom prst="rect">
+              <a:avLst/>
+            </a:prstGeom>
+            <a:noFill/>
+          </p:spPr>
+          <p:txBody>
+            <a:bodyPr wrap="square" rtlCol="0">
+              <a:spAutoFit/>
+            </a:bodyPr>
+            <a:lstStyle/>
+            <a:p>
+              <a:r>
+                <a:rPr lang="en-US" altLang="zh-CN" dirty="0"/>
+                <a:t>xc2</a:t>
+              </a:r>
+            </a:p>
+          </p:txBody>
+        </p:sp>
+        <p:sp>
+          <p:nvSpPr>
+            <p:cNvPr id="14" name="文本框 13">
+              <a:hlinkClick r:id="rId14"/>
+            </p:cNvPr>
+            <p:cNvSpPr txBox="1"/>
+            <p:nvPr/>
+          </p:nvSpPr>
+          <p:spPr>
+            <a:xfrm>
+              <a:off x="3337131" y="2774474"/>
+              <a:ext cx="795655" cy="368300"/>
+            </a:xfrm>
+            <a:prstGeom prst="rect">
+              <a:avLst/>
+            </a:prstGeom>
+            <a:noFill/>
+          </p:spPr>
+          <p:txBody>
+            <a:bodyPr wrap="square" rtlCol="0">
+              <a:spAutoFit/>
+            </a:bodyPr>
+            <a:lstStyle/>
+            <a:p>
+              <a:r>
+                <a:rPr lang="en-US" altLang="zh-CN" dirty="0"/>
+                <a:t>bs1</a:t>
+              </a:r>
+            </a:p>
+          </p:txBody>
+        </p:sp>
+        <p:sp>
+          <p:nvSpPr>
+            <p:cNvPr id="15" name="文本框 14">
+              <a:hlinkClick r:id="rId15"/>
+            </p:cNvPr>
+            <p:cNvSpPr txBox="1"/>
+            <p:nvPr/>
+          </p:nvSpPr>
+          <p:spPr>
+            <a:xfrm>
+              <a:off x="3337131" y="3460433"/>
+              <a:ext cx="795655" cy="368300"/>
+            </a:xfrm>
+            <a:prstGeom prst="rect">
+              <a:avLst/>
+            </a:prstGeom>
+            <a:noFill/>
+          </p:spPr>
+          <p:txBody>
+            <a:bodyPr wrap="square" rtlCol="0">
+              <a:spAutoFit/>
+            </a:bodyPr>
+            <a:lstStyle/>
+            <a:p>
+              <a:r>
+                <a:rPr lang="en-US" altLang="zh-CN" dirty="0"/>
+                <a:t>bs2</a:t>
+              </a:r>
+            </a:p>
+          </p:txBody>
+        </p:sp>
+        <p:sp>
+          <p:nvSpPr>
+            <p:cNvPr id="16" name="文本框 15">
+              <a:hlinkClick r:id="rId16"/>
+            </p:cNvPr>
+            <p:cNvSpPr txBox="1"/>
+            <p:nvPr/>
+          </p:nvSpPr>
+          <p:spPr>
+            <a:xfrm>
+              <a:off x="3337131" y="4146391"/>
+              <a:ext cx="795655" cy="368300"/>
+            </a:xfrm>
+            <a:prstGeom prst="rect">
+              <a:avLst/>
+            </a:prstGeom>
+            <a:noFill/>
+          </p:spPr>
+          <p:txBody>
+            <a:bodyPr wrap="square" rtlCol="0">
+              <a:spAutoFit/>
+            </a:bodyPr>
+            <a:lstStyle/>
+            <a:p>
+              <a:r>
+                <a:rPr lang="en-US" altLang="zh-CN" dirty="0"/>
+                <a:t>cl</a:t>
+              </a:r>
+            </a:p>
+          </p:txBody>
+        </p:sp>
+        <p:sp>
+          <p:nvSpPr>
+            <p:cNvPr id="28" name="文本框 27">
               <a:hlinkClick r:id="rId17"/>
             </p:cNvPr>
             <p:cNvSpPr txBox="1"/>
@@ -10619,7 +10691,90 @@
           </p:nvSpPr>
           <p:spPr>
             <a:xfrm>
-              <a:off x="7148194" y="1431632"/>
+              <a:off x="3337131" y="4522725"/>
+              <a:ext cx="700405" cy="368300"/>
+            </a:xfrm>
+            <a:prstGeom prst="rect">
+              <a:avLst/>
+            </a:prstGeom>
+            <a:noFill/>
+          </p:spPr>
+          <p:txBody>
+            <a:bodyPr wrap="square" rtlCol="0">
+              <a:spAutoFit/>
+            </a:bodyPr>
+            <a:lstStyle/>
+            <a:p>
+              <a:r>
+                <a:rPr lang="en-US" altLang="zh-CN"/>
+                <a:t>cl2</a:t>
+              </a:r>
+            </a:p>
+          </p:txBody>
+        </p:sp>
+      </p:grpSp>
+      <p:sp>
+        <p:nvSpPr>
+          <p:cNvPr id="31" name="文本框 30">
+            <a:hlinkClick r:id="rId18"/>
+          </p:cNvPr>
+          <p:cNvSpPr txBox="1"/>
+          <p:nvPr/>
+        </p:nvSpPr>
+        <p:spPr>
+          <a:xfrm>
+            <a:off x="9022925" y="1476328"/>
+            <a:ext cx="700405" cy="368300"/>
+          </a:xfrm>
+          <a:prstGeom prst="rect">
+            <a:avLst/>
+          </a:prstGeom>
+          <a:noFill/>
+        </p:spPr>
+        <p:txBody>
+          <a:bodyPr wrap="square" rtlCol="0">
+            <a:spAutoFit/>
+          </a:bodyPr>
+          <a:lstStyle/>
+          <a:p>
+            <a:r>
+              <a:rPr lang="en-US" altLang="zh-CN" dirty="0"/>
+              <a:t>cd</a:t>
+            </a:r>
+          </a:p>
+        </p:txBody>
+      </p:sp>
+      <p:grpSp>
+        <p:nvGrpSpPr>
+          <p:cNvPr id="41" name="组合 40">
+            <a:extLst>
+              <a:ext uri="{FF2B5EF4-FFF2-40B4-BE49-F238E27FC236}">
+                <a16:creationId xmlns:a16="http://schemas.microsoft.com/office/drawing/2014/main" id="{2072C0F9-F97B-2E18-3842-76EF65DBF863}"/>
+              </a:ext>
+            </a:extLst>
+          </p:cNvPr>
+          <p:cNvGrpSpPr/>
+          <p:nvPr/>
+        </p:nvGrpSpPr>
+        <p:grpSpPr>
+          <a:xfrm>
+            <a:off x="7148195" y="1292178"/>
+            <a:ext cx="700405" cy="4637418"/>
+            <a:chOff x="7148195" y="1292178"/>
+            <a:chExt cx="700405" cy="4637418"/>
+          </a:xfrm>
+        </p:grpSpPr>
+        <p:sp>
+          <p:nvSpPr>
+            <p:cNvPr id="18" name="文本框 17">
+              <a:hlinkClick r:id="rId19"/>
+            </p:cNvPr>
+            <p:cNvSpPr txBox="1"/>
+            <p:nvPr/>
+          </p:nvSpPr>
+          <p:spPr>
+            <a:xfrm>
+              <a:off x="7148195" y="1292178"/>
               <a:ext cx="700405" cy="368300"/>
             </a:xfrm>
             <a:prstGeom prst="rect">
@@ -10643,14 +10798,14 @@
         <p:sp>
           <p:nvSpPr>
             <p:cNvPr id="26" name="文本框 25">
-              <a:hlinkClick r:id="rId18"/>
+              <a:hlinkClick r:id="rId20"/>
             </p:cNvPr>
             <p:cNvSpPr txBox="1"/>
             <p:nvPr/>
           </p:nvSpPr>
           <p:spPr>
             <a:xfrm>
-              <a:off x="7148194" y="2041359"/>
+              <a:off x="7148195" y="2145795"/>
               <a:ext cx="700405" cy="368300"/>
             </a:xfrm>
             <a:prstGeom prst="rect">
@@ -10674,14 +10829,14 @@
         <p:sp>
           <p:nvSpPr>
             <p:cNvPr id="27" name="文本框 26">
-              <a:hlinkClick r:id="rId19"/>
+              <a:hlinkClick r:id="rId21"/>
             </p:cNvPr>
             <p:cNvSpPr txBox="1"/>
             <p:nvPr/>
           </p:nvSpPr>
           <p:spPr>
             <a:xfrm>
-              <a:off x="7148194" y="2651086"/>
+              <a:off x="7148195" y="2999412"/>
               <a:ext cx="700405" cy="368300"/>
             </a:xfrm>
             <a:prstGeom prst="rect">
@@ -10704,46 +10859,15 @@
         </p:sp>
         <p:sp>
           <p:nvSpPr>
-            <p:cNvPr id="28" name="文本框 27">
-              <a:hlinkClick r:id="rId20"/>
+            <p:cNvPr id="29" name="文本框 28">
+              <a:hlinkClick r:id="rId22"/>
             </p:cNvPr>
             <p:cNvSpPr txBox="1"/>
             <p:nvPr/>
           </p:nvSpPr>
           <p:spPr>
             <a:xfrm>
-              <a:off x="3337130" y="4662179"/>
-              <a:ext cx="700405" cy="368300"/>
-            </a:xfrm>
-            <a:prstGeom prst="rect">
-              <a:avLst/>
-            </a:prstGeom>
-            <a:noFill/>
-          </p:spPr>
-          <p:txBody>
-            <a:bodyPr wrap="square" rtlCol="0">
-              <a:spAutoFit/>
-            </a:bodyPr>
-            <a:lstStyle/>
-            <a:p>
-              <a:r>
-                <a:rPr lang="en-US" altLang="zh-CN"/>
-                <a:t>cl2</a:t>
-              </a:r>
-            </a:p>
-          </p:txBody>
-        </p:sp>
-        <p:sp>
-          <p:nvSpPr>
-            <p:cNvPr id="29" name="文本框 28">
-              <a:hlinkClick r:id="rId21"/>
-            </p:cNvPr>
-            <p:cNvSpPr txBox="1"/>
-            <p:nvPr/>
-          </p:nvSpPr>
-          <p:spPr>
-            <a:xfrm>
-              <a:off x="7148194" y="3870540"/>
+              <a:off x="7148195" y="3853029"/>
               <a:ext cx="700405" cy="368300"/>
             </a:xfrm>
             <a:prstGeom prst="rect">
@@ -10766,37 +10890,6 @@
         </p:sp>
         <p:sp>
           <p:nvSpPr>
-            <p:cNvPr id="31" name="文本框 30">
-              <a:hlinkClick r:id="rId22"/>
-            </p:cNvPr>
-            <p:cNvSpPr txBox="1"/>
-            <p:nvPr/>
-          </p:nvSpPr>
-          <p:spPr>
-            <a:xfrm>
-              <a:off x="7148194" y="4480267"/>
-              <a:ext cx="700405" cy="368300"/>
-            </a:xfrm>
-            <a:prstGeom prst="rect">
-              <a:avLst/>
-            </a:prstGeom>
-            <a:noFill/>
-          </p:spPr>
-          <p:txBody>
-            <a:bodyPr wrap="square" rtlCol="0">
-              <a:spAutoFit/>
-            </a:bodyPr>
-            <a:lstStyle/>
-            <a:p>
-              <a:r>
-                <a:rPr lang="en-US" altLang="zh-CN" dirty="0"/>
-                <a:t>cd</a:t>
-              </a:r>
-            </a:p>
-          </p:txBody>
-        </p:sp>
-        <p:sp>
-          <p:nvSpPr>
             <p:cNvPr id="32" name="文本框 31">
               <a:hlinkClick r:id="rId23"/>
             </p:cNvPr>
@@ -10805,7 +10898,7 @@
           </p:nvSpPr>
           <p:spPr>
             <a:xfrm>
-              <a:off x="7148194" y="5089994"/>
+              <a:off x="7148195" y="4706646"/>
               <a:ext cx="700405" cy="368300"/>
             </a:xfrm>
             <a:prstGeom prst="rect">
@@ -10836,7 +10929,7 @@
           </p:nvSpPr>
           <p:spPr>
             <a:xfrm>
-              <a:off x="7148195" y="5699718"/>
+              <a:off x="7148195" y="5560264"/>
               <a:ext cx="626004" cy="369332"/>
             </a:xfrm>
             <a:prstGeom prst="rect">
@@ -10858,12 +10951,84 @@
           </p:txBody>
         </p:sp>
       </p:grpSp>
+      <p:sp>
+        <p:nvSpPr>
+          <p:cNvPr id="36" name="文本框 35">
+            <a:hlinkClick r:id="rId25"/>
+            <a:extLst>
+              <a:ext uri="{FF2B5EF4-FFF2-40B4-BE49-F238E27FC236}">
+                <a16:creationId xmlns:a16="http://schemas.microsoft.com/office/drawing/2014/main" id="{421EB2B6-4236-0C13-A9AF-2FB363E4AE39}"/>
+              </a:ext>
+            </a:extLst>
+          </p:cNvPr>
+          <p:cNvSpPr txBox="1"/>
+          <p:nvPr/>
+        </p:nvSpPr>
+        <p:spPr>
+          <a:xfrm>
+            <a:off x="9022925" y="2614484"/>
+            <a:ext cx="700405" cy="368300"/>
+          </a:xfrm>
+          <a:prstGeom prst="rect">
+            <a:avLst/>
+          </a:prstGeom>
+          <a:noFill/>
+        </p:spPr>
+        <p:txBody>
+          <a:bodyPr wrap="square" rtlCol="0">
+            <a:spAutoFit/>
+          </a:bodyPr>
+          <a:lstStyle/>
+          <a:p>
+            <a:r>
+              <a:rPr lang="en-US" altLang="zh-CN" dirty="0"/>
+              <a:t>cd3</a:t>
+            </a:r>
+          </a:p>
+        </p:txBody>
+      </p:sp>
+      <p:sp>
+        <p:nvSpPr>
+          <p:cNvPr id="37" name="文本框 36">
+            <a:hlinkClick r:id="rId26"/>
+            <a:extLst>
+              <a:ext uri="{FF2B5EF4-FFF2-40B4-BE49-F238E27FC236}">
+                <a16:creationId xmlns:a16="http://schemas.microsoft.com/office/drawing/2014/main" id="{D4FA9C25-810F-927B-DFE2-9851769C3C34}"/>
+              </a:ext>
+            </a:extLst>
+          </p:cNvPr>
+          <p:cNvSpPr txBox="1"/>
+          <p:nvPr/>
+        </p:nvSpPr>
+        <p:spPr>
+          <a:xfrm>
+            <a:off x="9022925" y="2045406"/>
+            <a:ext cx="700405" cy="368300"/>
+          </a:xfrm>
+          <a:prstGeom prst="rect">
+            <a:avLst/>
+          </a:prstGeom>
+          <a:noFill/>
+        </p:spPr>
+        <p:txBody>
+          <a:bodyPr wrap="square" rtlCol="0">
+            <a:spAutoFit/>
+          </a:bodyPr>
+          <a:lstStyle/>
+          <a:p>
+            <a:r>
+              <a:rPr lang="en-US" altLang="zh-CN" dirty="0"/>
+              <a:t>cd2</a:t>
+            </a:r>
+          </a:p>
+        </p:txBody>
+      </p:sp>
       <p:grpSp>
         <p:nvGrpSpPr>
-          <p:cNvPr id="34" name="组合 33">
+          <p:cNvPr id="40" name="组合 39">
             <a:extLst>
               <a:ext uri="{FF2B5EF4-FFF2-40B4-BE49-F238E27FC236}">
-                <a16:creationId xmlns:a16="http://schemas.microsoft.com/office/drawing/2014/main" id="{BD5E8C76-6734-4AAA-182D-761DBD07CC2A}"/>
+                <a16:creationId xmlns:a16="http://schemas.microsoft.com/office/drawing/2014/main" id="{C6C0FD3F-C33C-CFD8-0181-C698036832C6}"/>
               </a:ext>
             </a:extLst>
           </p:cNvPr>
@@ -10872,23 +11037,23 @@
         </p:nvGrpSpPr>
         <p:grpSpPr>
           <a:xfrm>
-            <a:off x="5242663" y="1417955"/>
+            <a:off x="5242663" y="1292178"/>
             <a:ext cx="795655" cy="4672834"/>
-            <a:chOff x="5093970" y="1417955"/>
+            <a:chOff x="5242663" y="1417955"/>
             <a:chExt cx="795655" cy="4672834"/>
           </a:xfrm>
         </p:grpSpPr>
         <p:sp>
           <p:nvSpPr>
             <p:cNvPr id="19" name="文本框 18">
-              <a:hlinkClick r:id="rId25"/>
+              <a:hlinkClick r:id="rId27"/>
             </p:cNvPr>
             <p:cNvSpPr txBox="1"/>
             <p:nvPr/>
           </p:nvSpPr>
           <p:spPr>
             <a:xfrm>
-              <a:off x="5093970" y="2032888"/>
+              <a:off x="5242663" y="2032888"/>
               <a:ext cx="700405" cy="368300"/>
             </a:xfrm>
             <a:prstGeom prst="rect">
@@ -10912,14 +11077,14 @@
         <p:sp>
           <p:nvSpPr>
             <p:cNvPr id="20" name="文本框 19">
-              <a:hlinkClick r:id="rId26"/>
+              <a:hlinkClick r:id="rId28"/>
             </p:cNvPr>
             <p:cNvSpPr txBox="1"/>
             <p:nvPr/>
           </p:nvSpPr>
           <p:spPr>
             <a:xfrm>
-              <a:off x="5093970" y="1417955"/>
+              <a:off x="5242663" y="1417955"/>
               <a:ext cx="700405" cy="368300"/>
             </a:xfrm>
             <a:prstGeom prst="rect">
@@ -10943,14 +11108,14 @@
         <p:sp>
           <p:nvSpPr>
             <p:cNvPr id="17" name="文本框 16">
-              <a:hlinkClick r:id="rId27"/>
+              <a:hlinkClick r:id="rId29"/>
             </p:cNvPr>
             <p:cNvSpPr txBox="1"/>
             <p:nvPr/>
           </p:nvSpPr>
           <p:spPr>
             <a:xfrm>
-              <a:off x="5093970" y="2647821"/>
+              <a:off x="5242663" y="2647821"/>
               <a:ext cx="795655" cy="368300"/>
             </a:xfrm>
             <a:prstGeom prst="rect">
@@ -10975,14 +11140,14 @@
         <p:sp>
           <p:nvSpPr>
             <p:cNvPr id="21" name="文本框 20">
-              <a:hlinkClick r:id="rId28"/>
+              <a:hlinkClick r:id="rId30"/>
             </p:cNvPr>
             <p:cNvSpPr txBox="1"/>
             <p:nvPr/>
           </p:nvSpPr>
           <p:spPr>
             <a:xfrm>
-              <a:off x="5093970" y="3262754"/>
+              <a:off x="5242663" y="3262754"/>
               <a:ext cx="795655" cy="368300"/>
             </a:xfrm>
             <a:prstGeom prst="rect">
@@ -11006,14 +11171,14 @@
         <p:sp>
           <p:nvSpPr>
             <p:cNvPr id="22" name="文本框 21">
-              <a:hlinkClick r:id="rId29"/>
+              <a:hlinkClick r:id="rId31"/>
             </p:cNvPr>
             <p:cNvSpPr txBox="1"/>
             <p:nvPr/>
           </p:nvSpPr>
           <p:spPr>
             <a:xfrm>
-              <a:off x="5093970" y="3877687"/>
+              <a:off x="5242663" y="3877687"/>
               <a:ext cx="795655" cy="368300"/>
             </a:xfrm>
             <a:prstGeom prst="rect">
@@ -11037,14 +11202,14 @@
         <p:sp>
           <p:nvSpPr>
             <p:cNvPr id="23" name="文本框 22">
-              <a:hlinkClick r:id="rId30"/>
+              <a:hlinkClick r:id="rId32"/>
             </p:cNvPr>
             <p:cNvSpPr txBox="1"/>
             <p:nvPr/>
           </p:nvSpPr>
           <p:spPr>
             <a:xfrm>
-              <a:off x="5093970" y="4492620"/>
+              <a:off x="5242663" y="4492620"/>
               <a:ext cx="795655" cy="368300"/>
             </a:xfrm>
             <a:prstGeom prst="rect">
@@ -11068,14 +11233,14 @@
         <p:sp>
           <p:nvSpPr>
             <p:cNvPr id="24" name="文本框 23">
-              <a:hlinkClick r:id="rId31"/>
+              <a:hlinkClick r:id="rId33"/>
             </p:cNvPr>
             <p:cNvSpPr txBox="1"/>
             <p:nvPr/>
           </p:nvSpPr>
           <p:spPr>
             <a:xfrm>
-              <a:off x="5093970" y="5107553"/>
+              <a:off x="5242663" y="5107553"/>
               <a:ext cx="795655" cy="368300"/>
             </a:xfrm>
             <a:prstGeom prst="rect">
@@ -11099,7 +11264,7 @@
         <p:sp>
           <p:nvSpPr>
             <p:cNvPr id="30" name="文本框 29">
-              <a:hlinkClick r:id="rId32"/>
+              <a:hlinkClick r:id="rId34"/>
               <a:extLst>
                 <a:ext uri="{FF2B5EF4-FFF2-40B4-BE49-F238E27FC236}">
                   <a16:creationId xmlns:a16="http://schemas.microsoft.com/office/drawing/2014/main" id="{BB6445F0-A17D-212A-4630-C39597E3C157}"/>
@@ -11111,7 +11276,7 @@
           </p:nvSpPr>
           <p:spPr>
             <a:xfrm>
-              <a:off x="5093970" y="5722489"/>
+              <a:off x="5242663" y="5722489"/>
               <a:ext cx="795655" cy="368300"/>
             </a:xfrm>
             <a:prstGeom prst="rect">
@@ -11133,6 +11298,42 @@
           </p:txBody>
         </p:sp>
       </p:grpSp>
+      <p:sp>
+        <p:nvSpPr>
+          <p:cNvPr id="42" name="文本框 41">
+            <a:hlinkClick r:id="rId35"/>
+            <a:extLst>
+              <a:ext uri="{FF2B5EF4-FFF2-40B4-BE49-F238E27FC236}">
+                <a16:creationId xmlns:a16="http://schemas.microsoft.com/office/drawing/2014/main" id="{6EFDE8B6-B849-FAFE-FB00-639AD28E2D1B}"/>
+              </a:ext>
+            </a:extLst>
+          </p:cNvPr>
+          <p:cNvSpPr txBox="1"/>
+          <p:nvPr/>
+        </p:nvSpPr>
+        <p:spPr>
+          <a:xfrm>
+            <a:off x="9022925" y="3183562"/>
+            <a:ext cx="700405" cy="368300"/>
+          </a:xfrm>
+          <a:prstGeom prst="rect">
+            <a:avLst/>
+          </a:prstGeom>
+          <a:noFill/>
+        </p:spPr>
+        <p:txBody>
+          <a:bodyPr wrap="square" rtlCol="0">
+            <a:spAutoFit/>
+          </a:bodyPr>
+          <a:lstStyle/>
+          <a:p>
+            <a:r>
+              <a:rPr lang="en-US" altLang="zh-CN" dirty="0"/>
+              <a:t>cd4</a:t>
+            </a:r>
+          </a:p>
+        </p:txBody>
+      </p:sp>
     </p:spTree>
   </p:cSld>
   <p:clrMapOvr>

--- a/livefile/livepowerpoint.pptx
+++ b/livefile/livepowerpoint.pptx
@@ -209,7 +209,7 @@
           <a:p>
             <a:fld id="{16A2333F-9A84-48D5-897E-B51363C09104}" type="datetimeFigureOut">
               <a:rPr lang="zh-CN" altLang="en-US" smtClean="0"/>
-              <a:t>2024/3/25</a:t>
+              <a:t>2024/3/27</a:t>
             </a:fld>
             <a:endParaRPr lang="zh-CN" altLang="en-US"/>
           </a:p>
@@ -949,7 +949,7 @@
             </a:pPr>
             <a:fld id="{8D7D9A98-2B42-4142-BB4A-011734DDEA85}" type="datetimeFigureOut">
               <a:rPr lang="zh-CN" altLang="en-US"/>
-              <a:t>2024/3/25</a:t>
+              <a:t>2024/3/27</a:t>
             </a:fld>
             <a:endParaRPr lang="zh-CN" altLang="en-US"/>
           </a:p>
@@ -1098,7 +1098,7 @@
             </a:pPr>
             <a:fld id="{12F3D532-36F8-4FDA-B03A-4B8348962AD1}" type="datetime1">
               <a:rPr lang="zh-CN" altLang="en-US"/>
-              <a:t>2024/3/25</a:t>
+              <a:t>2024/3/27</a:t>
             </a:fld>
             <a:endParaRPr lang="zh-CN" altLang="en-US"/>
           </a:p>
@@ -1207,7 +1207,7 @@
           <a:p>
             <a:fld id="{F487EE23-058C-4F57-8869-2B6561E3103C}" type="datetimeFigureOut">
               <a:rPr lang="zh-CN" altLang="en-US" smtClean="0"/>
-              <a:t>2024/3/25</a:t>
+              <a:t>2024/3/27</a:t>
             </a:fld>
             <a:endParaRPr lang="zh-CN" altLang="en-US"/>
           </a:p>
@@ -1463,7 +1463,7 @@
           <a:p>
             <a:fld id="{F487EE23-058C-4F57-8869-2B6561E3103C}" type="datetimeFigureOut">
               <a:rPr lang="zh-CN" altLang="en-US" smtClean="0"/>
-              <a:t>2024/3/25</a:t>
+              <a:t>2024/3/27</a:t>
             </a:fld>
             <a:endParaRPr lang="zh-CN" altLang="en-US"/>
           </a:p>
@@ -1685,7 +1685,7 @@
             </a:pPr>
             <a:fld id="{A293AA06-7DE4-4BE9-9894-758112E5DCC1}" type="datetime1">
               <a:rPr lang="zh-CN" altLang="en-US"/>
-              <a:t>2024/3/25</a:t>
+              <a:t>2024/3/27</a:t>
             </a:fld>
             <a:endParaRPr lang="zh-CN" altLang="en-US"/>
           </a:p>
@@ -1999,7 +1999,7 @@
           <a:p>
             <a:fld id="{F487EE23-058C-4F57-8869-2B6561E3103C}" type="datetimeFigureOut">
               <a:rPr lang="zh-CN" altLang="en-US" smtClean="0"/>
-              <a:t>2024/3/25</a:t>
+              <a:t>2024/3/27</a:t>
             </a:fld>
             <a:endParaRPr lang="zh-CN" altLang="en-US"/>
           </a:p>
@@ -2250,7 +2250,7 @@
             </a:pPr>
             <a:fld id="{BEDED714-68C8-44B6-9732-DDF7DD97772E}" type="datetime1">
               <a:rPr lang="zh-CN" altLang="en-US"/>
-              <a:t>2024/3/25</a:t>
+              <a:t>2024/3/27</a:t>
             </a:fld>
             <a:endParaRPr lang="zh-CN" altLang="en-US"/>
           </a:p>
@@ -2632,7 +2632,7 @@
             </a:pPr>
             <a:fld id="{27A77D59-FE09-433D-B821-9B2BE50A514A}" type="datetime1">
               <a:rPr lang="zh-CN" altLang="en-US"/>
-              <a:t>2024/3/25</a:t>
+              <a:t>2024/3/27</a:t>
             </a:fld>
             <a:endParaRPr lang="zh-CN" altLang="en-US"/>
           </a:p>
@@ -2941,7 +2941,7 @@
             </a:pPr>
             <a:fld id="{E11AF4AC-5AFC-4379-B912-FCE9AB7477D3}" type="datetime1">
               <a:rPr lang="zh-CN" altLang="en-US"/>
-              <a:t>2024/3/25</a:t>
+              <a:t>2024/3/27</a:t>
             </a:fld>
             <a:endParaRPr lang="zh-CN" altLang="en-US"/>
           </a:p>
@@ -3669,7 +3669,7 @@
             </a:pPr>
             <a:fld id="{D2392E56-C887-40A0-B45B-7A180C992FB2}" type="datetime1">
               <a:rPr lang="zh-CN" altLang="en-US"/>
-              <a:t>2024/3/25</a:t>
+              <a:t>2024/3/27</a:t>
             </a:fld>
             <a:endParaRPr lang="zh-CN" altLang="en-US"/>
           </a:p>
@@ -4112,7 +4112,7 @@
             </a:pPr>
             <a:fld id="{614AAE4D-FD61-4E21-A39B-A3D833986EBE}" type="datetime1">
               <a:rPr lang="zh-CN" altLang="en-US"/>
-              <a:t>2024/3/25</a:t>
+              <a:t>2024/3/27</a:t>
             </a:fld>
             <a:endParaRPr lang="zh-CN" altLang="en-US"/>
           </a:p>
@@ -4474,7 +4474,7 @@
           <a:p>
             <a:fld id="{F487EE23-058C-4F57-8869-2B6561E3103C}" type="datetimeFigureOut">
               <a:rPr lang="zh-CN" altLang="en-US" smtClean="0"/>
-              <a:t>2024/3/25</a:t>
+              <a:t>2024/3/27</a:t>
             </a:fld>
             <a:endParaRPr lang="zh-CN" altLang="en-US"/>
           </a:p>
@@ -4960,7 +4960,7 @@
           <a:p>
             <a:fld id="{F487EE23-058C-4F57-8869-2B6561E3103C}" type="datetimeFigureOut">
               <a:rPr lang="zh-CN" altLang="en-US" smtClean="0"/>
-              <a:t>2024/3/25</a:t>
+              <a:t>2024/3/27</a:t>
             </a:fld>
             <a:endParaRPr lang="zh-CN" altLang="en-US"/>
           </a:p>
@@ -5233,7 +5233,7 @@
           <a:p>
             <a:fld id="{F487EE23-058C-4F57-8869-2B6561E3103C}" type="datetimeFigureOut">
               <a:rPr lang="zh-CN" altLang="en-US" smtClean="0"/>
-              <a:t>2024/3/25</a:t>
+              <a:t>2024/3/27</a:t>
             </a:fld>
             <a:endParaRPr lang="zh-CN" altLang="en-US"/>
           </a:p>
